--- a/docs/DataHour_HybridRAG_With_ReRanker.pptx
+++ b/docs/DataHour_HybridRAG_With_ReRanker.pptx
@@ -26,7 +26,9 @@
     <p:sldId id="276" r:id="rId20"/>
     <p:sldId id="277" r:id="rId21"/>
     <p:sldId id="278" r:id="rId22"/>
+    <p:sldId id="290" r:id="rId36"/>
     <p:sldId id="279" r:id="rId23"/>
+    <p:sldId id="291" r:id="rId37"/>
     <p:sldId id="280" r:id="rId24"/>
     <p:sldId id="281" r:id="rId25"/>
     <p:sldId id="282" r:id="rId26"/>
@@ -13387,7 +13389,7 @@
                   <a:srgbClr val="AAAAAA"/>
                 </a:solidFill>
               </a:rPr>
-              <a:t>22</a:t>
+              <a:t>23</a:t>
             </a:r>
           </a:p>
         </p:txBody>
@@ -13885,7 +13887,7 @@
                   <a:srgbClr val="AAAAAA"/>
                 </a:solidFill>
               </a:rPr>
-              <a:t>23</a:t>
+              <a:t>25</a:t>
             </a:r>
           </a:p>
         </p:txBody>
@@ -14358,7 +14360,7 @@
                   <a:srgbClr val="AAAAAA"/>
                 </a:solidFill>
               </a:rPr>
-              <a:t>24</a:t>
+              <a:t>26</a:t>
             </a:r>
           </a:p>
         </p:txBody>
@@ -14831,7 +14833,7 @@
                   <a:srgbClr val="AAAAAA"/>
                 </a:solidFill>
               </a:rPr>
-              <a:t>25</a:t>
+              <a:t>27</a:t>
             </a:r>
           </a:p>
         </p:txBody>
@@ -15353,7 +15355,7 @@
                   <a:srgbClr val="AAAAAA"/>
                 </a:solidFill>
               </a:rPr>
-              <a:t>26</a:t>
+              <a:t>28</a:t>
             </a:r>
           </a:p>
         </p:txBody>
@@ -15625,7 +15627,7 @@
                   <a:srgbClr val="AAAAAA"/>
                 </a:solidFill>
               </a:rPr>
-              <a:t>27</a:t>
+              <a:t>29</a:t>
             </a:r>
           </a:p>
         </p:txBody>
@@ -16063,7 +16065,7 @@
                   <a:srgbClr val="AAAAAA"/>
                 </a:solidFill>
               </a:rPr>
-              <a:t>28</a:t>
+              <a:t>30</a:t>
             </a:r>
           </a:p>
         </p:txBody>
@@ -16458,7 +16460,7 @@
                   <a:srgbClr val="AAAAAA"/>
                 </a:solidFill>
               </a:rPr>
-              <a:t>29</a:t>
+              <a:t>31</a:t>
             </a:r>
           </a:p>
         </p:txBody>
@@ -17183,6 +17185,1845 @@
                 <a:latin typeface="Calibri"/>
               </a:rPr>
               <a:t>Katiki Ravindra Babu  •  Strategic Technology Advisor, Vriksha.ai</a:t>
+            </a:r>
+          </a:p>
+        </p:txBody>
+      </p:sp>
+    </p:spTree>
+  </p:cSld>
+  <p:clrMapOvr>
+    <a:masterClrMapping/>
+  </p:clrMapOvr>
+</p:sld>
+</file>
+
+<file path=ppt/slides/slide31.xml><?xml version="1.0" encoding="utf-8"?>
+<p:sld xmlns:a="http://schemas.openxmlformats.org/drawingml/2006/main" xmlns:p="http://schemas.openxmlformats.org/presentationml/2006/main" xmlns:r="http://schemas.openxmlformats.org/officeDocument/2006/relationships">
+  <p:cSld>
+    <p:spTree>
+      <p:nvGrpSpPr>
+        <p:cNvPr id="1" name=""/>
+        <p:cNvGrpSpPr/>
+        <p:nvPr/>
+      </p:nvGrpSpPr>
+      <p:grpSpPr/>
+      <p:sp>
+        <p:nvSpPr>
+          <p:cNvPr id="2" name="Rectangle 1"/>
+          <p:cNvSpPr/>
+          <p:nvPr/>
+        </p:nvSpPr>
+        <p:spPr>
+          <a:xfrm>
+            <a:off x="0" y="0"/>
+            <a:ext cx="12192000" cy="6858000"/>
+          </a:xfrm>
+          <a:prstGeom prst="rect">
+            <a:avLst/>
+          </a:prstGeom>
+          <a:solidFill>
+            <a:srgbClr val="171115"/>
+          </a:solidFill>
+          <a:ln>
+            <a:noFill/>
+          </a:ln>
+        </p:spPr>
+        <p:style>
+          <a:lnRef idx="1">
+            <a:schemeClr val="accent1"/>
+          </a:lnRef>
+          <a:fillRef idx="3">
+            <a:schemeClr val="accent1"/>
+          </a:fillRef>
+          <a:effectRef idx="2">
+            <a:schemeClr val="accent1"/>
+          </a:effectRef>
+          <a:fontRef idx="minor">
+            <a:schemeClr val="lt1"/>
+          </a:fontRef>
+        </p:style>
+        <p:txBody>
+          <a:bodyPr rtlCol="0" anchor="ctr"/>
+          <a:lstStyle/>
+          <a:p>
+            <a:pPr algn="ctr"/>
+          </a:p>
+        </p:txBody>
+      </p:sp>
+      <p:sp>
+        <p:nvSpPr>
+          <p:cNvPr id="3" name="TextBox 2"/>
+          <p:cNvSpPr txBox="1"/>
+          <p:nvPr/>
+        </p:nvSpPr>
+        <p:spPr>
+          <a:xfrm>
+            <a:off x="457200" y="320040"/>
+            <a:ext cx="11430000" cy="777240"/>
+          </a:xfrm>
+          <a:prstGeom prst="rect">
+            <a:avLst/>
+          </a:prstGeom>
+          <a:noFill/>
+        </p:spPr>
+        <p:txBody>
+          <a:bodyPr wrap="square">
+            <a:spAutoFit/>
+          </a:bodyPr>
+          <a:lstStyle/>
+          <a:p>
+            <a:pPr algn="l"/>
+            <a:r>
+              <a:rPr sz="3000" b="1">
+                <a:solidFill>
+                  <a:srgbClr val="FFFFFF"/>
+                </a:solidFill>
+                <a:latin typeface="Calibri"/>
+              </a:rPr>
+              <a:t>When to Use What — Decision Guide</a:t>
+            </a:r>
+          </a:p>
+        </p:txBody>
+      </p:sp>
+      <p:sp>
+        <p:nvSpPr>
+          <p:cNvPr id="4" name="Rectangle 3"/>
+          <p:cNvSpPr/>
+          <p:nvPr/>
+        </p:nvSpPr>
+        <p:spPr>
+          <a:xfrm>
+            <a:off x="457200" y="1051560"/>
+            <a:ext cx="1188720" cy="64008"/>
+          </a:xfrm>
+          <a:prstGeom prst="rect">
+            <a:avLst/>
+          </a:prstGeom>
+          <a:solidFill>
+            <a:srgbClr val="F46E32"/>
+          </a:solidFill>
+          <a:ln>
+            <a:noFill/>
+          </a:ln>
+        </p:spPr>
+        <p:style>
+          <a:lnRef idx="1">
+            <a:schemeClr val="accent1"/>
+          </a:lnRef>
+          <a:fillRef idx="3">
+            <a:schemeClr val="accent1"/>
+          </a:fillRef>
+          <a:effectRef idx="2">
+            <a:schemeClr val="accent1"/>
+          </a:effectRef>
+          <a:fontRef idx="minor">
+            <a:schemeClr val="lt1"/>
+          </a:fontRef>
+        </p:style>
+        <p:txBody>
+          <a:bodyPr rtlCol="0" anchor="ctr"/>
+          <a:lstStyle/>
+          <a:p>
+            <a:pPr algn="ctr"/>
+          </a:p>
+        </p:txBody>
+      </p:sp>
+      <p:sp>
+        <p:nvSpPr>
+          <p:cNvPr id="5" name="TextBox 4"/>
+          <p:cNvSpPr txBox="1"/>
+          <p:nvPr/>
+        </p:nvSpPr>
+        <p:spPr>
+          <a:xfrm>
+            <a:off x="457200" y="1188720"/>
+            <a:ext cx="11430000" cy="365760"/>
+          </a:xfrm>
+          <a:prstGeom prst="rect">
+            <a:avLst/>
+          </a:prstGeom>
+          <a:noFill/>
+        </p:spPr>
+        <p:txBody>
+          <a:bodyPr wrap="square">
+            <a:spAutoFit/>
+          </a:bodyPr>
+          <a:lstStyle/>
+          <a:p>
+            <a:pPr algn="l"/>
+            <a:r>
+              <a:rPr sz="1400" b="0">
+                <a:solidFill>
+                  <a:srgbClr val="AAAAAA"/>
+                </a:solidFill>
+                <a:latin typeface="Calibri"/>
+              </a:rPr>
+              <a:t>Different query types deserve different retrieval stacks.</a:t>
+            </a:r>
+          </a:p>
+        </p:txBody>
+      </p:sp>
+      <p:sp>
+        <p:nvSpPr>
+          <p:cNvPr id="6" name="Rectangle 5"/>
+          <p:cNvSpPr/>
+          <p:nvPr/>
+        </p:nvSpPr>
+        <p:spPr>
+          <a:xfrm>
+            <a:off x="457200" y="1645920"/>
+            <a:ext cx="4754880" cy="530352"/>
+          </a:xfrm>
+          <a:prstGeom prst="rect">
+            <a:avLst/>
+          </a:prstGeom>
+          <a:solidFill>
+            <a:srgbClr val="F46E32"/>
+          </a:solidFill>
+          <a:ln>
+            <a:solidFill>
+              <a:srgbClr val="F46E32"/>
+            </a:solidFill>
+          </a:ln>
+        </p:spPr>
+        <p:style>
+          <a:lnRef idx="1">
+            <a:schemeClr val="accent1"/>
+          </a:lnRef>
+          <a:fillRef idx="3">
+            <a:schemeClr val="accent1"/>
+          </a:fillRef>
+          <a:effectRef idx="2">
+            <a:schemeClr val="accent1"/>
+          </a:effectRef>
+          <a:fontRef idx="minor">
+            <a:schemeClr val="lt1"/>
+          </a:fontRef>
+        </p:style>
+        <p:txBody>
+          <a:bodyPr rtlCol="0" anchor="ctr"/>
+          <a:lstStyle/>
+          <a:p>
+            <a:pPr algn="ctr"/>
+            <a:r>
+              <a:rPr sz="1400" b="1">
+                <a:solidFill>
+                  <a:srgbClr val="FFFFFF"/>
+                </a:solidFill>
+              </a:rPr>
+              <a:t>Your situation</a:t>
+            </a:r>
+          </a:p>
+        </p:txBody>
+      </p:sp>
+      <p:sp>
+        <p:nvSpPr>
+          <p:cNvPr id="7" name="Rectangle 6"/>
+          <p:cNvSpPr/>
+          <p:nvPr/>
+        </p:nvSpPr>
+        <p:spPr>
+          <a:xfrm>
+            <a:off x="5212080" y="1645920"/>
+            <a:ext cx="3474720" cy="530352"/>
+          </a:xfrm>
+          <a:prstGeom prst="rect">
+            <a:avLst/>
+          </a:prstGeom>
+          <a:solidFill>
+            <a:srgbClr val="F46E32"/>
+          </a:solidFill>
+          <a:ln>
+            <a:solidFill>
+              <a:srgbClr val="F46E32"/>
+            </a:solidFill>
+          </a:ln>
+        </p:spPr>
+        <p:style>
+          <a:lnRef idx="1">
+            <a:schemeClr val="accent1"/>
+          </a:lnRef>
+          <a:fillRef idx="3">
+            <a:schemeClr val="accent1"/>
+          </a:fillRef>
+          <a:effectRef idx="2">
+            <a:schemeClr val="accent1"/>
+          </a:effectRef>
+          <a:fontRef idx="minor">
+            <a:schemeClr val="lt1"/>
+          </a:fontRef>
+        </p:style>
+        <p:txBody>
+          <a:bodyPr rtlCol="0" anchor="ctr"/>
+          <a:lstStyle/>
+          <a:p>
+            <a:pPr algn="ctr"/>
+            <a:r>
+              <a:rPr sz="1400" b="1">
+                <a:solidFill>
+                  <a:srgbClr val="FFFFFF"/>
+                </a:solidFill>
+              </a:rPr>
+              <a:t>Best stack</a:t>
+            </a:r>
+          </a:p>
+        </p:txBody>
+      </p:sp>
+      <p:sp>
+        <p:nvSpPr>
+          <p:cNvPr id="8" name="Rectangle 7"/>
+          <p:cNvSpPr/>
+          <p:nvPr/>
+        </p:nvSpPr>
+        <p:spPr>
+          <a:xfrm>
+            <a:off x="8686800" y="1645920"/>
+            <a:ext cx="3200400" cy="530352"/>
+          </a:xfrm>
+          <a:prstGeom prst="rect">
+            <a:avLst/>
+          </a:prstGeom>
+          <a:solidFill>
+            <a:srgbClr val="F46E32"/>
+          </a:solidFill>
+          <a:ln>
+            <a:solidFill>
+              <a:srgbClr val="F46E32"/>
+            </a:solidFill>
+          </a:ln>
+        </p:spPr>
+        <p:style>
+          <a:lnRef idx="1">
+            <a:schemeClr val="accent1"/>
+          </a:lnRef>
+          <a:fillRef idx="3">
+            <a:schemeClr val="accent1"/>
+          </a:fillRef>
+          <a:effectRef idx="2">
+            <a:schemeClr val="accent1"/>
+          </a:effectRef>
+          <a:fontRef idx="minor">
+            <a:schemeClr val="lt1"/>
+          </a:fontRef>
+        </p:style>
+        <p:txBody>
+          <a:bodyPr rtlCol="0" anchor="ctr"/>
+          <a:lstStyle/>
+          <a:p>
+            <a:pPr algn="ctr"/>
+            <a:r>
+              <a:rPr sz="1400" b="1">
+                <a:solidFill>
+                  <a:srgbClr val="FFFFFF"/>
+                </a:solidFill>
+              </a:rPr>
+              <a:t>Why</a:t>
+            </a:r>
+          </a:p>
+        </p:txBody>
+      </p:sp>
+      <p:sp>
+        <p:nvSpPr>
+          <p:cNvPr id="9" name="Rectangle 8"/>
+          <p:cNvSpPr/>
+          <p:nvPr/>
+        </p:nvSpPr>
+        <p:spPr>
+          <a:xfrm>
+            <a:off x="457200" y="2176272"/>
+            <a:ext cx="4754880" cy="530352"/>
+          </a:xfrm>
+          <a:prstGeom prst="rect">
+            <a:avLst/>
+          </a:prstGeom>
+          <a:solidFill>
+            <a:srgbClr val="221B1F"/>
+          </a:solidFill>
+          <a:ln w="6350">
+            <a:solidFill>
+              <a:srgbClr val="F46E32"/>
+            </a:solidFill>
+          </a:ln>
+        </p:spPr>
+        <p:style>
+          <a:lnRef idx="1">
+            <a:schemeClr val="accent1"/>
+          </a:lnRef>
+          <a:fillRef idx="3">
+            <a:schemeClr val="accent1"/>
+          </a:fillRef>
+          <a:effectRef idx="2">
+            <a:schemeClr val="accent1"/>
+          </a:effectRef>
+          <a:fontRef idx="minor">
+            <a:schemeClr val="lt1"/>
+          </a:fontRef>
+        </p:style>
+        <p:txBody>
+          <a:bodyPr rtlCol="0" anchor="ctr"/>
+          <a:lstStyle/>
+          <a:p>
+            <a:pPr algn="ctr"/>
+            <a:r>
+              <a:rPr sz="1300">
+                <a:solidFill>
+                  <a:srgbClr val="FFFFFF"/>
+                </a:solidFill>
+              </a:rPr>
+              <a:t>Small corpus (&lt;1k docs), conceptual questions</a:t>
+            </a:r>
+          </a:p>
+        </p:txBody>
+      </p:sp>
+      <p:sp>
+        <p:nvSpPr>
+          <p:cNvPr id="10" name="Rectangle 9"/>
+          <p:cNvSpPr/>
+          <p:nvPr/>
+        </p:nvSpPr>
+        <p:spPr>
+          <a:xfrm>
+            <a:off x="5212080" y="2176272"/>
+            <a:ext cx="3474720" cy="530352"/>
+          </a:xfrm>
+          <a:prstGeom prst="rect">
+            <a:avLst/>
+          </a:prstGeom>
+          <a:solidFill>
+            <a:srgbClr val="221B1F"/>
+          </a:solidFill>
+          <a:ln w="6350">
+            <a:solidFill>
+              <a:srgbClr val="F46E32"/>
+            </a:solidFill>
+          </a:ln>
+        </p:spPr>
+        <p:style>
+          <a:lnRef idx="1">
+            <a:schemeClr val="accent1"/>
+          </a:lnRef>
+          <a:fillRef idx="3">
+            <a:schemeClr val="accent1"/>
+          </a:fillRef>
+          <a:effectRef idx="2">
+            <a:schemeClr val="accent1"/>
+          </a:effectRef>
+          <a:fontRef idx="minor">
+            <a:schemeClr val="lt1"/>
+          </a:fontRef>
+        </p:style>
+        <p:txBody>
+          <a:bodyPr rtlCol="0" anchor="ctr"/>
+          <a:lstStyle/>
+          <a:p>
+            <a:pPr algn="ctr"/>
+            <a:r>
+              <a:rPr sz="1300">
+                <a:solidFill>
+                  <a:srgbClr val="FFFFFF"/>
+                </a:solidFill>
+              </a:rPr>
+              <a:t>Dense only</a:t>
+            </a:r>
+          </a:p>
+        </p:txBody>
+      </p:sp>
+      <p:sp>
+        <p:nvSpPr>
+          <p:cNvPr id="11" name="Rectangle 10"/>
+          <p:cNvSpPr/>
+          <p:nvPr/>
+        </p:nvSpPr>
+        <p:spPr>
+          <a:xfrm>
+            <a:off x="8686800" y="2176272"/>
+            <a:ext cx="3200400" cy="530352"/>
+          </a:xfrm>
+          <a:prstGeom prst="rect">
+            <a:avLst/>
+          </a:prstGeom>
+          <a:solidFill>
+            <a:srgbClr val="221B1F"/>
+          </a:solidFill>
+          <a:ln w="6350">
+            <a:solidFill>
+              <a:srgbClr val="F46E32"/>
+            </a:solidFill>
+          </a:ln>
+        </p:spPr>
+        <p:style>
+          <a:lnRef idx="1">
+            <a:schemeClr val="accent1"/>
+          </a:lnRef>
+          <a:fillRef idx="3">
+            <a:schemeClr val="accent1"/>
+          </a:fillRef>
+          <a:effectRef idx="2">
+            <a:schemeClr val="accent1"/>
+          </a:effectRef>
+          <a:fontRef idx="minor">
+            <a:schemeClr val="lt1"/>
+          </a:fontRef>
+        </p:style>
+        <p:txBody>
+          <a:bodyPr rtlCol="0" anchor="ctr"/>
+          <a:lstStyle/>
+          <a:p>
+            <a:pPr algn="ctr"/>
+            <a:r>
+              <a:rPr sz="1300">
+                <a:solidFill>
+                  <a:srgbClr val="FFFFFF"/>
+                </a:solidFill>
+              </a:rPr>
+              <a:t>Simpler, faster, recall is easy</a:t>
+            </a:r>
+          </a:p>
+        </p:txBody>
+      </p:sp>
+      <p:sp>
+        <p:nvSpPr>
+          <p:cNvPr id="12" name="Rectangle 11"/>
+          <p:cNvSpPr/>
+          <p:nvPr/>
+        </p:nvSpPr>
+        <p:spPr>
+          <a:xfrm>
+            <a:off x="457200" y="2706624"/>
+            <a:ext cx="4754880" cy="530352"/>
+          </a:xfrm>
+          <a:prstGeom prst="rect">
+            <a:avLst/>
+          </a:prstGeom>
+          <a:solidFill>
+            <a:srgbClr val="2A2125"/>
+          </a:solidFill>
+          <a:ln w="6350">
+            <a:solidFill>
+              <a:srgbClr val="F46E32"/>
+            </a:solidFill>
+          </a:ln>
+        </p:spPr>
+        <p:style>
+          <a:lnRef idx="1">
+            <a:schemeClr val="accent1"/>
+          </a:lnRef>
+          <a:fillRef idx="3">
+            <a:schemeClr val="accent1"/>
+          </a:fillRef>
+          <a:effectRef idx="2">
+            <a:schemeClr val="accent1"/>
+          </a:effectRef>
+          <a:fontRef idx="minor">
+            <a:schemeClr val="lt1"/>
+          </a:fontRef>
+        </p:style>
+        <p:txBody>
+          <a:bodyPr rtlCol="0" anchor="ctr"/>
+          <a:lstStyle/>
+          <a:p>
+            <a:pPr algn="ctr"/>
+            <a:r>
+              <a:rPr sz="1300">
+                <a:solidFill>
+                  <a:srgbClr val="FFFFFF"/>
+                </a:solidFill>
+              </a:rPr>
+              <a:t>Exact-match queries (IDs, codes, product SKUs)</a:t>
+            </a:r>
+          </a:p>
+        </p:txBody>
+      </p:sp>
+      <p:sp>
+        <p:nvSpPr>
+          <p:cNvPr id="13" name="Rectangle 12"/>
+          <p:cNvSpPr/>
+          <p:nvPr/>
+        </p:nvSpPr>
+        <p:spPr>
+          <a:xfrm>
+            <a:off x="5212080" y="2706624"/>
+            <a:ext cx="3474720" cy="530352"/>
+          </a:xfrm>
+          <a:prstGeom prst="rect">
+            <a:avLst/>
+          </a:prstGeom>
+          <a:solidFill>
+            <a:srgbClr val="2A2125"/>
+          </a:solidFill>
+          <a:ln w="6350">
+            <a:solidFill>
+              <a:srgbClr val="F46E32"/>
+            </a:solidFill>
+          </a:ln>
+        </p:spPr>
+        <p:style>
+          <a:lnRef idx="1">
+            <a:schemeClr val="accent1"/>
+          </a:lnRef>
+          <a:fillRef idx="3">
+            <a:schemeClr val="accent1"/>
+          </a:fillRef>
+          <a:effectRef idx="2">
+            <a:schemeClr val="accent1"/>
+          </a:effectRef>
+          <a:fontRef idx="minor">
+            <a:schemeClr val="lt1"/>
+          </a:fontRef>
+        </p:style>
+        <p:txBody>
+          <a:bodyPr rtlCol="0" anchor="ctr"/>
+          <a:lstStyle/>
+          <a:p>
+            <a:pPr algn="ctr"/>
+            <a:r>
+              <a:rPr sz="1300">
+                <a:solidFill>
+                  <a:srgbClr val="FFFFFF"/>
+                </a:solidFill>
+              </a:rPr>
+              <a:t>BM25 only</a:t>
+            </a:r>
+          </a:p>
+        </p:txBody>
+      </p:sp>
+      <p:sp>
+        <p:nvSpPr>
+          <p:cNvPr id="14" name="Rectangle 13"/>
+          <p:cNvSpPr/>
+          <p:nvPr/>
+        </p:nvSpPr>
+        <p:spPr>
+          <a:xfrm>
+            <a:off x="8686800" y="2706624"/>
+            <a:ext cx="3200400" cy="530352"/>
+          </a:xfrm>
+          <a:prstGeom prst="rect">
+            <a:avLst/>
+          </a:prstGeom>
+          <a:solidFill>
+            <a:srgbClr val="2A2125"/>
+          </a:solidFill>
+          <a:ln w="6350">
+            <a:solidFill>
+              <a:srgbClr val="F46E32"/>
+            </a:solidFill>
+          </a:ln>
+        </p:spPr>
+        <p:style>
+          <a:lnRef idx="1">
+            <a:schemeClr val="accent1"/>
+          </a:lnRef>
+          <a:fillRef idx="3">
+            <a:schemeClr val="accent1"/>
+          </a:fillRef>
+          <a:effectRef idx="2">
+            <a:schemeClr val="accent1"/>
+          </a:effectRef>
+          <a:fontRef idx="minor">
+            <a:schemeClr val="lt1"/>
+          </a:fontRef>
+        </p:style>
+        <p:txBody>
+          <a:bodyPr rtlCol="0" anchor="ctr"/>
+          <a:lstStyle/>
+          <a:p>
+            <a:pPr algn="ctr"/>
+            <a:r>
+              <a:rPr sz="1300">
+                <a:solidFill>
+                  <a:srgbClr val="FFFFFF"/>
+                </a:solidFill>
+              </a:rPr>
+              <a:t>Keyword precision beats semantic blur</a:t>
+            </a:r>
+          </a:p>
+        </p:txBody>
+      </p:sp>
+      <p:sp>
+        <p:nvSpPr>
+          <p:cNvPr id="15" name="Rectangle 14"/>
+          <p:cNvSpPr/>
+          <p:nvPr/>
+        </p:nvSpPr>
+        <p:spPr>
+          <a:xfrm>
+            <a:off x="457200" y="3236976"/>
+            <a:ext cx="4754880" cy="530352"/>
+          </a:xfrm>
+          <a:prstGeom prst="rect">
+            <a:avLst/>
+          </a:prstGeom>
+          <a:solidFill>
+            <a:srgbClr val="221B1F"/>
+          </a:solidFill>
+          <a:ln w="6350">
+            <a:solidFill>
+              <a:srgbClr val="F46E32"/>
+            </a:solidFill>
+          </a:ln>
+        </p:spPr>
+        <p:style>
+          <a:lnRef idx="1">
+            <a:schemeClr val="accent1"/>
+          </a:lnRef>
+          <a:fillRef idx="3">
+            <a:schemeClr val="accent1"/>
+          </a:fillRef>
+          <a:effectRef idx="2">
+            <a:schemeClr val="accent1"/>
+          </a:effectRef>
+          <a:fontRef idx="minor">
+            <a:schemeClr val="lt1"/>
+          </a:fontRef>
+        </p:style>
+        <p:txBody>
+          <a:bodyPr rtlCol="0" anchor="ctr"/>
+          <a:lstStyle/>
+          <a:p>
+            <a:pPr algn="ctr"/>
+            <a:r>
+              <a:rPr sz="1300">
+                <a:solidFill>
+                  <a:srgbClr val="FFFFFF"/>
+                </a:solidFill>
+              </a:rPr>
+              <a:t>Mixed query styles (most real systems)</a:t>
+            </a:r>
+          </a:p>
+        </p:txBody>
+      </p:sp>
+      <p:sp>
+        <p:nvSpPr>
+          <p:cNvPr id="16" name="Rectangle 15"/>
+          <p:cNvSpPr/>
+          <p:nvPr/>
+        </p:nvSpPr>
+        <p:spPr>
+          <a:xfrm>
+            <a:off x="5212080" y="3236976"/>
+            <a:ext cx="3474720" cy="530352"/>
+          </a:xfrm>
+          <a:prstGeom prst="rect">
+            <a:avLst/>
+          </a:prstGeom>
+          <a:solidFill>
+            <a:srgbClr val="221B1F"/>
+          </a:solidFill>
+          <a:ln w="6350">
+            <a:solidFill>
+              <a:srgbClr val="F46E32"/>
+            </a:solidFill>
+          </a:ln>
+        </p:spPr>
+        <p:style>
+          <a:lnRef idx="1">
+            <a:schemeClr val="accent1"/>
+          </a:lnRef>
+          <a:fillRef idx="3">
+            <a:schemeClr val="accent1"/>
+          </a:fillRef>
+          <a:effectRef idx="2">
+            <a:schemeClr val="accent1"/>
+          </a:effectRef>
+          <a:fontRef idx="minor">
+            <a:schemeClr val="lt1"/>
+          </a:fontRef>
+        </p:style>
+        <p:txBody>
+          <a:bodyPr rtlCol="0" anchor="ctr"/>
+          <a:lstStyle/>
+          <a:p>
+            <a:pPr algn="ctr"/>
+            <a:r>
+              <a:rPr sz="1300">
+                <a:solidFill>
+                  <a:srgbClr val="FFFFFF"/>
+                </a:solidFill>
+              </a:rPr>
+              <a:t>Hybrid (Dense + BM25 + RRF)</a:t>
+            </a:r>
+          </a:p>
+        </p:txBody>
+      </p:sp>
+      <p:sp>
+        <p:nvSpPr>
+          <p:cNvPr id="17" name="Rectangle 16"/>
+          <p:cNvSpPr/>
+          <p:nvPr/>
+        </p:nvSpPr>
+        <p:spPr>
+          <a:xfrm>
+            <a:off x="8686800" y="3236976"/>
+            <a:ext cx="3200400" cy="530352"/>
+          </a:xfrm>
+          <a:prstGeom prst="rect">
+            <a:avLst/>
+          </a:prstGeom>
+          <a:solidFill>
+            <a:srgbClr val="221B1F"/>
+          </a:solidFill>
+          <a:ln w="6350">
+            <a:solidFill>
+              <a:srgbClr val="F46E32"/>
+            </a:solidFill>
+          </a:ln>
+        </p:spPr>
+        <p:style>
+          <a:lnRef idx="1">
+            <a:schemeClr val="accent1"/>
+          </a:lnRef>
+          <a:fillRef idx="3">
+            <a:schemeClr val="accent1"/>
+          </a:fillRef>
+          <a:effectRef idx="2">
+            <a:schemeClr val="accent1"/>
+          </a:effectRef>
+          <a:fontRef idx="minor">
+            <a:schemeClr val="lt1"/>
+          </a:fontRef>
+        </p:style>
+        <p:txBody>
+          <a:bodyPr rtlCol="0" anchor="ctr"/>
+          <a:lstStyle/>
+          <a:p>
+            <a:pPr algn="ctr"/>
+            <a:r>
+              <a:rPr sz="1300">
+                <a:solidFill>
+                  <a:srgbClr val="FFFFFF"/>
+                </a:solidFill>
+              </a:rPr>
+              <a:t>Robust across paraphrases and exact terms</a:t>
+            </a:r>
+          </a:p>
+        </p:txBody>
+      </p:sp>
+      <p:sp>
+        <p:nvSpPr>
+          <p:cNvPr id="18" name="Rectangle 17"/>
+          <p:cNvSpPr/>
+          <p:nvPr/>
+        </p:nvSpPr>
+        <p:spPr>
+          <a:xfrm>
+            <a:off x="457200" y="3767328"/>
+            <a:ext cx="4754880" cy="530352"/>
+          </a:xfrm>
+          <a:prstGeom prst="rect">
+            <a:avLst/>
+          </a:prstGeom>
+          <a:solidFill>
+            <a:srgbClr val="2A2125"/>
+          </a:solidFill>
+          <a:ln w="6350">
+            <a:solidFill>
+              <a:srgbClr val="F46E32"/>
+            </a:solidFill>
+          </a:ln>
+        </p:spPr>
+        <p:style>
+          <a:lnRef idx="1">
+            <a:schemeClr val="accent1"/>
+          </a:lnRef>
+          <a:fillRef idx="3">
+            <a:schemeClr val="accent1"/>
+          </a:fillRef>
+          <a:effectRef idx="2">
+            <a:schemeClr val="accent1"/>
+          </a:effectRef>
+          <a:fontRef idx="minor">
+            <a:schemeClr val="lt1"/>
+          </a:fontRef>
+        </p:style>
+        <p:txBody>
+          <a:bodyPr rtlCol="0" anchor="ctr"/>
+          <a:lstStyle/>
+          <a:p>
+            <a:pPr algn="ctr"/>
+            <a:r>
+              <a:rPr sz="1300">
+                <a:solidFill>
+                  <a:srgbClr val="FFFFFF"/>
+                </a:solidFill>
+              </a:rPr>
+              <a:t>Quality matters more than latency</a:t>
+            </a:r>
+          </a:p>
+        </p:txBody>
+      </p:sp>
+      <p:sp>
+        <p:nvSpPr>
+          <p:cNvPr id="19" name="Rectangle 18"/>
+          <p:cNvSpPr/>
+          <p:nvPr/>
+        </p:nvSpPr>
+        <p:spPr>
+          <a:xfrm>
+            <a:off x="5212080" y="3767328"/>
+            <a:ext cx="3474720" cy="530352"/>
+          </a:xfrm>
+          <a:prstGeom prst="rect">
+            <a:avLst/>
+          </a:prstGeom>
+          <a:solidFill>
+            <a:srgbClr val="2A2125"/>
+          </a:solidFill>
+          <a:ln w="6350">
+            <a:solidFill>
+              <a:srgbClr val="F46E32"/>
+            </a:solidFill>
+          </a:ln>
+        </p:spPr>
+        <p:style>
+          <a:lnRef idx="1">
+            <a:schemeClr val="accent1"/>
+          </a:lnRef>
+          <a:fillRef idx="3">
+            <a:schemeClr val="accent1"/>
+          </a:fillRef>
+          <a:effectRef idx="2">
+            <a:schemeClr val="accent1"/>
+          </a:effectRef>
+          <a:fontRef idx="minor">
+            <a:schemeClr val="lt1"/>
+          </a:fontRef>
+        </p:style>
+        <p:txBody>
+          <a:bodyPr rtlCol="0" anchor="ctr"/>
+          <a:lstStyle/>
+          <a:p>
+            <a:pPr algn="ctr"/>
+            <a:r>
+              <a:rPr sz="1300">
+                <a:solidFill>
+                  <a:srgbClr val="FFFFFF"/>
+                </a:solidFill>
+              </a:rPr>
+              <a:t>Hybrid + Cross-Encoder Re-Ranker</a:t>
+            </a:r>
+          </a:p>
+        </p:txBody>
+      </p:sp>
+      <p:sp>
+        <p:nvSpPr>
+          <p:cNvPr id="20" name="Rectangle 19"/>
+          <p:cNvSpPr/>
+          <p:nvPr/>
+        </p:nvSpPr>
+        <p:spPr>
+          <a:xfrm>
+            <a:off x="8686800" y="3767328"/>
+            <a:ext cx="3200400" cy="530352"/>
+          </a:xfrm>
+          <a:prstGeom prst="rect">
+            <a:avLst/>
+          </a:prstGeom>
+          <a:solidFill>
+            <a:srgbClr val="2A2125"/>
+          </a:solidFill>
+          <a:ln w="6350">
+            <a:solidFill>
+              <a:srgbClr val="F46E32"/>
+            </a:solidFill>
+          </a:ln>
+        </p:spPr>
+        <p:style>
+          <a:lnRef idx="1">
+            <a:schemeClr val="accent1"/>
+          </a:lnRef>
+          <a:fillRef idx="3">
+            <a:schemeClr val="accent1"/>
+          </a:fillRef>
+          <a:effectRef idx="2">
+            <a:schemeClr val="accent1"/>
+          </a:effectRef>
+          <a:fontRef idx="minor">
+            <a:schemeClr val="lt1"/>
+          </a:fontRef>
+        </p:style>
+        <p:txBody>
+          <a:bodyPr rtlCol="0" anchor="ctr"/>
+          <a:lstStyle/>
+          <a:p>
+            <a:pPr algn="ctr"/>
+            <a:r>
+              <a:rPr sz="1300">
+                <a:solidFill>
+                  <a:srgbClr val="FFFFFF"/>
+                </a:solidFill>
+              </a:rPr>
+              <a:t>Highest precision per millisecond</a:t>
+            </a:r>
+          </a:p>
+        </p:txBody>
+      </p:sp>
+      <p:sp>
+        <p:nvSpPr>
+          <p:cNvPr id="21" name="Rectangle 20"/>
+          <p:cNvSpPr/>
+          <p:nvPr/>
+        </p:nvSpPr>
+        <p:spPr>
+          <a:xfrm>
+            <a:off x="457200" y="4297680"/>
+            <a:ext cx="4754880" cy="530352"/>
+          </a:xfrm>
+          <a:prstGeom prst="rect">
+            <a:avLst/>
+          </a:prstGeom>
+          <a:solidFill>
+            <a:srgbClr val="221B1F"/>
+          </a:solidFill>
+          <a:ln w="6350">
+            <a:solidFill>
+              <a:srgbClr val="F46E32"/>
+            </a:solidFill>
+          </a:ln>
+        </p:spPr>
+        <p:style>
+          <a:lnRef idx="1">
+            <a:schemeClr val="accent1"/>
+          </a:lnRef>
+          <a:fillRef idx="3">
+            <a:schemeClr val="accent1"/>
+          </a:fillRef>
+          <a:effectRef idx="2">
+            <a:schemeClr val="accent1"/>
+          </a:effectRef>
+          <a:fontRef idx="minor">
+            <a:schemeClr val="lt1"/>
+          </a:fontRef>
+        </p:style>
+        <p:txBody>
+          <a:bodyPr rtlCol="0" anchor="ctr"/>
+          <a:lstStyle/>
+          <a:p>
+            <a:pPr algn="ctr"/>
+            <a:r>
+              <a:rPr sz="1300">
+                <a:solidFill>
+                  <a:srgbClr val="FFFFFF"/>
+                </a:solidFill>
+              </a:rPr>
+              <a:t>Highly structured data (relational records)</a:t>
+            </a:r>
+          </a:p>
+        </p:txBody>
+      </p:sp>
+      <p:sp>
+        <p:nvSpPr>
+          <p:cNvPr id="22" name="Rectangle 21"/>
+          <p:cNvSpPr/>
+          <p:nvPr/>
+        </p:nvSpPr>
+        <p:spPr>
+          <a:xfrm>
+            <a:off x="5212080" y="4297680"/>
+            <a:ext cx="3474720" cy="530352"/>
+          </a:xfrm>
+          <a:prstGeom prst="rect">
+            <a:avLst/>
+          </a:prstGeom>
+          <a:solidFill>
+            <a:srgbClr val="221B1F"/>
+          </a:solidFill>
+          <a:ln w="6350">
+            <a:solidFill>
+              <a:srgbClr val="F46E32"/>
+            </a:solidFill>
+          </a:ln>
+        </p:spPr>
+        <p:style>
+          <a:lnRef idx="1">
+            <a:schemeClr val="accent1"/>
+          </a:lnRef>
+          <a:fillRef idx="3">
+            <a:schemeClr val="accent1"/>
+          </a:fillRef>
+          <a:effectRef idx="2">
+            <a:schemeClr val="accent1"/>
+          </a:effectRef>
+          <a:fontRef idx="minor">
+            <a:schemeClr val="lt1"/>
+          </a:fontRef>
+        </p:style>
+        <p:txBody>
+          <a:bodyPr rtlCol="0" anchor="ctr"/>
+          <a:lstStyle/>
+          <a:p>
+            <a:pPr algn="ctr"/>
+            <a:r>
+              <a:rPr sz="1300">
+                <a:solidFill>
+                  <a:srgbClr val="FFFFFF"/>
+                </a:solidFill>
+              </a:rPr>
+              <a:t>SQL / SPARQL, not RAG</a:t>
+            </a:r>
+          </a:p>
+        </p:txBody>
+      </p:sp>
+      <p:sp>
+        <p:nvSpPr>
+          <p:cNvPr id="23" name="Rectangle 22"/>
+          <p:cNvSpPr/>
+          <p:nvPr/>
+        </p:nvSpPr>
+        <p:spPr>
+          <a:xfrm>
+            <a:off x="8686800" y="4297680"/>
+            <a:ext cx="3200400" cy="530352"/>
+          </a:xfrm>
+          <a:prstGeom prst="rect">
+            <a:avLst/>
+          </a:prstGeom>
+          <a:solidFill>
+            <a:srgbClr val="221B1F"/>
+          </a:solidFill>
+          <a:ln w="6350">
+            <a:solidFill>
+              <a:srgbClr val="F46E32"/>
+            </a:solidFill>
+          </a:ln>
+        </p:spPr>
+        <p:style>
+          <a:lnRef idx="1">
+            <a:schemeClr val="accent1"/>
+          </a:lnRef>
+          <a:fillRef idx="3">
+            <a:schemeClr val="accent1"/>
+          </a:fillRef>
+          <a:effectRef idx="2">
+            <a:schemeClr val="accent1"/>
+          </a:effectRef>
+          <a:fontRef idx="minor">
+            <a:schemeClr val="lt1"/>
+          </a:fontRef>
+        </p:style>
+        <p:txBody>
+          <a:bodyPr rtlCol="0" anchor="ctr"/>
+          <a:lstStyle/>
+          <a:p>
+            <a:pPr algn="ctr"/>
+            <a:r>
+              <a:rPr sz="1300">
+                <a:solidFill>
+                  <a:srgbClr val="FFFFFF"/>
+                </a:solidFill>
+              </a:rPr>
+              <a:t>Structured query beats vector search</a:t>
+            </a:r>
+          </a:p>
+        </p:txBody>
+      </p:sp>
+      <p:sp>
+        <p:nvSpPr>
+          <p:cNvPr id="24" name="Rectangle 23"/>
+          <p:cNvSpPr/>
+          <p:nvPr/>
+        </p:nvSpPr>
+        <p:spPr>
+          <a:xfrm>
+            <a:off x="457200" y="4828032"/>
+            <a:ext cx="4754880" cy="530352"/>
+          </a:xfrm>
+          <a:prstGeom prst="rect">
+            <a:avLst/>
+          </a:prstGeom>
+          <a:solidFill>
+            <a:srgbClr val="2A2125"/>
+          </a:solidFill>
+          <a:ln w="6350">
+            <a:solidFill>
+              <a:srgbClr val="F46E32"/>
+            </a:solidFill>
+          </a:ln>
+        </p:spPr>
+        <p:style>
+          <a:lnRef idx="1">
+            <a:schemeClr val="accent1"/>
+          </a:lnRef>
+          <a:fillRef idx="3">
+            <a:schemeClr val="accent1"/>
+          </a:fillRef>
+          <a:effectRef idx="2">
+            <a:schemeClr val="accent1"/>
+          </a:effectRef>
+          <a:fontRef idx="minor">
+            <a:schemeClr val="lt1"/>
+          </a:fontRef>
+        </p:style>
+        <p:txBody>
+          <a:bodyPr rtlCol="0" anchor="ctr"/>
+          <a:lstStyle/>
+          <a:p>
+            <a:pPr algn="ctr"/>
+            <a:r>
+              <a:rPr sz="1300">
+                <a:solidFill>
+                  <a:srgbClr val="FFFFFF"/>
+                </a:solidFill>
+              </a:rPr>
+              <a:t>Sub-100ms p99 latency budget</a:t>
+            </a:r>
+          </a:p>
+        </p:txBody>
+      </p:sp>
+      <p:sp>
+        <p:nvSpPr>
+          <p:cNvPr id="25" name="Rectangle 24"/>
+          <p:cNvSpPr/>
+          <p:nvPr/>
+        </p:nvSpPr>
+        <p:spPr>
+          <a:xfrm>
+            <a:off x="5212080" y="4828032"/>
+            <a:ext cx="3474720" cy="530352"/>
+          </a:xfrm>
+          <a:prstGeom prst="rect">
+            <a:avLst/>
+          </a:prstGeom>
+          <a:solidFill>
+            <a:srgbClr val="2A2125"/>
+          </a:solidFill>
+          <a:ln w="6350">
+            <a:solidFill>
+              <a:srgbClr val="F46E32"/>
+            </a:solidFill>
+          </a:ln>
+        </p:spPr>
+        <p:style>
+          <a:lnRef idx="1">
+            <a:schemeClr val="accent1"/>
+          </a:lnRef>
+          <a:fillRef idx="3">
+            <a:schemeClr val="accent1"/>
+          </a:fillRef>
+          <a:effectRef idx="2">
+            <a:schemeClr val="accent1"/>
+          </a:effectRef>
+          <a:fontRef idx="minor">
+            <a:schemeClr val="lt1"/>
+          </a:fontRef>
+        </p:style>
+        <p:txBody>
+          <a:bodyPr rtlCol="0" anchor="ctr"/>
+          <a:lstStyle/>
+          <a:p>
+            <a:pPr algn="ctr"/>
+            <a:r>
+              <a:rPr sz="1300">
+                <a:solidFill>
+                  <a:srgbClr val="FFFFFF"/>
+                </a:solidFill>
+              </a:rPr>
+              <a:t>Dense only, no reranker</a:t>
+            </a:r>
+          </a:p>
+        </p:txBody>
+      </p:sp>
+      <p:sp>
+        <p:nvSpPr>
+          <p:cNvPr id="26" name="Rectangle 25"/>
+          <p:cNvSpPr/>
+          <p:nvPr/>
+        </p:nvSpPr>
+        <p:spPr>
+          <a:xfrm>
+            <a:off x="8686800" y="4828032"/>
+            <a:ext cx="3200400" cy="530352"/>
+          </a:xfrm>
+          <a:prstGeom prst="rect">
+            <a:avLst/>
+          </a:prstGeom>
+          <a:solidFill>
+            <a:srgbClr val="2A2125"/>
+          </a:solidFill>
+          <a:ln w="6350">
+            <a:solidFill>
+              <a:srgbClr val="F46E32"/>
+            </a:solidFill>
+          </a:ln>
+        </p:spPr>
+        <p:style>
+          <a:lnRef idx="1">
+            <a:schemeClr val="accent1"/>
+          </a:lnRef>
+          <a:fillRef idx="3">
+            <a:schemeClr val="accent1"/>
+          </a:fillRef>
+          <a:effectRef idx="2">
+            <a:schemeClr val="accent1"/>
+          </a:effectRef>
+          <a:fontRef idx="minor">
+            <a:schemeClr val="lt1"/>
+          </a:fontRef>
+        </p:style>
+        <p:txBody>
+          <a:bodyPr rtlCol="0" anchor="ctr"/>
+          <a:lstStyle/>
+          <a:p>
+            <a:pPr algn="ctr"/>
+            <a:r>
+              <a:rPr sz="1300">
+                <a:solidFill>
+                  <a:srgbClr val="FFFFFF"/>
+                </a:solidFill>
+              </a:rPr>
+              <a:t>Reranker adds 300–800ms</a:t>
+            </a:r>
+          </a:p>
+        </p:txBody>
+      </p:sp>
+      <p:sp>
+        <p:nvSpPr>
+          <p:cNvPr id="27" name="TextBox 26"/>
+          <p:cNvSpPr txBox="1"/>
+          <p:nvPr/>
+        </p:nvSpPr>
+        <p:spPr>
+          <a:xfrm>
+            <a:off x="640080" y="5852160"/>
+            <a:ext cx="10972800" cy="457200"/>
+          </a:xfrm>
+          <a:prstGeom prst="rect">
+            <a:avLst/>
+          </a:prstGeom>
+          <a:noFill/>
+        </p:spPr>
+        <p:txBody>
+          <a:bodyPr wrap="square">
+            <a:spAutoFit/>
+          </a:bodyPr>
+          <a:lstStyle/>
+          <a:p>
+            <a:pPr algn="ctr"/>
+            <a:r>
+              <a:rPr sz="1500" b="1">
+                <a:solidFill>
+                  <a:srgbClr val="F46E32"/>
+                </a:solidFill>
+                <a:latin typeface="Calibri"/>
+              </a:rPr>
+              <a:t>Start with hybrid + reranker. Drop pieces only when latency or simplicity forces it.</a:t>
+            </a:r>
+          </a:p>
+        </p:txBody>
+      </p:sp>
+    </p:spTree>
+  </p:cSld>
+  <p:clrMapOvr>
+    <a:masterClrMapping/>
+  </p:clrMapOvr>
+</p:sld>
+</file>
+
+<file path=ppt/slides/slide32.xml><?xml version="1.0" encoding="utf-8"?>
+<p:sld xmlns:a="http://schemas.openxmlformats.org/drawingml/2006/main" xmlns:p="http://schemas.openxmlformats.org/presentationml/2006/main" xmlns:r="http://schemas.openxmlformats.org/officeDocument/2006/relationships">
+  <p:cSld>
+    <p:spTree>
+      <p:nvGrpSpPr>
+        <p:cNvPr id="1" name=""/>
+        <p:cNvGrpSpPr/>
+        <p:nvPr/>
+      </p:nvGrpSpPr>
+      <p:grpSpPr/>
+      <p:sp>
+        <p:nvSpPr>
+          <p:cNvPr id="2" name="Rectangle 1"/>
+          <p:cNvSpPr/>
+          <p:nvPr/>
+        </p:nvSpPr>
+        <p:spPr>
+          <a:xfrm>
+            <a:off x="0" y="0"/>
+            <a:ext cx="12192000" cy="6858000"/>
+          </a:xfrm>
+          <a:prstGeom prst="rect">
+            <a:avLst/>
+          </a:prstGeom>
+          <a:solidFill>
+            <a:srgbClr val="171115"/>
+          </a:solidFill>
+          <a:ln>
+            <a:noFill/>
+          </a:ln>
+        </p:spPr>
+        <p:style>
+          <a:lnRef idx="1">
+            <a:schemeClr val="accent1"/>
+          </a:lnRef>
+          <a:fillRef idx="3">
+            <a:schemeClr val="accent1"/>
+          </a:fillRef>
+          <a:effectRef idx="2">
+            <a:schemeClr val="accent1"/>
+          </a:effectRef>
+          <a:fontRef idx="minor">
+            <a:schemeClr val="lt1"/>
+          </a:fontRef>
+        </p:style>
+        <p:txBody>
+          <a:bodyPr rtlCol="0" anchor="ctr"/>
+          <a:lstStyle/>
+          <a:p>
+            <a:pPr algn="ctr"/>
+          </a:p>
+        </p:txBody>
+      </p:sp>
+      <p:sp>
+        <p:nvSpPr>
+          <p:cNvPr id="3" name="TextBox 2"/>
+          <p:cNvSpPr txBox="1"/>
+          <p:nvPr/>
+        </p:nvSpPr>
+        <p:spPr>
+          <a:xfrm>
+            <a:off x="457200" y="320040"/>
+            <a:ext cx="11430000" cy="777240"/>
+          </a:xfrm>
+          <a:prstGeom prst="rect">
+            <a:avLst/>
+          </a:prstGeom>
+          <a:noFill/>
+        </p:spPr>
+        <p:txBody>
+          <a:bodyPr wrap="square">
+            <a:spAutoFit/>
+          </a:bodyPr>
+          <a:lstStyle/>
+          <a:p>
+            <a:pPr algn="l"/>
+            <a:r>
+              <a:rPr sz="3000" b="1">
+                <a:solidFill>
+                  <a:srgbClr val="FFFFFF"/>
+                </a:solidFill>
+                <a:latin typeface="Calibri"/>
+              </a:rPr>
+              <a:t>A Real-World Lesson — When Dense Alone Fails</a:t>
+            </a:r>
+          </a:p>
+        </p:txBody>
+      </p:sp>
+      <p:sp>
+        <p:nvSpPr>
+          <p:cNvPr id="4" name="Rectangle 3"/>
+          <p:cNvSpPr/>
+          <p:nvPr/>
+        </p:nvSpPr>
+        <p:spPr>
+          <a:xfrm>
+            <a:off x="457200" y="1051560"/>
+            <a:ext cx="1188720" cy="64008"/>
+          </a:xfrm>
+          <a:prstGeom prst="rect">
+            <a:avLst/>
+          </a:prstGeom>
+          <a:solidFill>
+            <a:srgbClr val="F46E32"/>
+          </a:solidFill>
+          <a:ln>
+            <a:noFill/>
+          </a:ln>
+        </p:spPr>
+        <p:style>
+          <a:lnRef idx="1">
+            <a:schemeClr val="accent1"/>
+          </a:lnRef>
+          <a:fillRef idx="3">
+            <a:schemeClr val="accent1"/>
+          </a:fillRef>
+          <a:effectRef idx="2">
+            <a:schemeClr val="accent1"/>
+          </a:effectRef>
+          <a:fontRef idx="minor">
+            <a:schemeClr val="lt1"/>
+          </a:fontRef>
+        </p:style>
+        <p:txBody>
+          <a:bodyPr rtlCol="0" anchor="ctr"/>
+          <a:lstStyle/>
+          <a:p>
+            <a:pPr algn="ctr"/>
+          </a:p>
+        </p:txBody>
+      </p:sp>
+      <p:sp>
+        <p:nvSpPr>
+          <p:cNvPr id="5" name="Rounded Rectangle 4"/>
+          <p:cNvSpPr/>
+          <p:nvPr/>
+        </p:nvSpPr>
+        <p:spPr>
+          <a:xfrm>
+            <a:off x="640080" y="1280160"/>
+            <a:ext cx="10972800" cy="1234440"/>
+          </a:xfrm>
+          <a:prstGeom prst="roundRect">
+            <a:avLst/>
+          </a:prstGeom>
+          <a:solidFill>
+            <a:srgbClr val="221B1F"/>
+          </a:solidFill>
+          <a:ln w="15875">
+            <a:solidFill>
+              <a:srgbClr val="F46E32"/>
+            </a:solidFill>
+          </a:ln>
+        </p:spPr>
+        <p:style>
+          <a:lnRef idx="1">
+            <a:schemeClr val="accent1"/>
+          </a:lnRef>
+          <a:fillRef idx="3">
+            <a:schemeClr val="accent1"/>
+          </a:fillRef>
+          <a:effectRef idx="2">
+            <a:schemeClr val="accent1"/>
+          </a:effectRef>
+          <a:fontRef idx="minor">
+            <a:schemeClr val="lt1"/>
+          </a:fontRef>
+        </p:style>
+        <p:txBody>
+          <a:bodyPr rtlCol="0" anchor="ctr" wrap="square" lIns="182880" rIns="182880"/>
+          <a:lstStyle/>
+          <a:p>
+            <a:pPr algn="ctr"/>
+            <a:r>
+              <a:rPr sz="1600" b="1">
+                <a:solidFill>
+                  <a:srgbClr val="F46E32"/>
+                </a:solidFill>
+                <a:latin typeface="Calibri"/>
+              </a:rPr>
+              <a:t>Scenario: </a:t>
+            </a:r>
+            <a:r>
+              <a:rPr sz="1600">
+                <a:solidFill>
+                  <a:srgbClr val="FFFFFF"/>
+                </a:solidFill>
+                <a:latin typeface="Calibri"/>
+              </a:rPr>
+              <a:t>A customer-support team ships a dense-only RAG over their product docs. Three weeks in, users search </a:t>
+            </a:r>
+            <a:r>
+              <a:rPr sz="1600" b="1">
+                <a:solidFill>
+                  <a:srgbClr val="2E8BC4"/>
+                </a:solidFill>
+                <a:latin typeface="Consolas"/>
+              </a:rPr>
+              <a:t>"ORA-04031 fix"</a:t>
+            </a:r>
+            <a:r>
+              <a:rPr sz="1600">
+                <a:solidFill>
+                  <a:srgbClr val="FFFFFF"/>
+                </a:solidFill>
+                <a:latin typeface="Calibri"/>
+              </a:rPr>
+              <a:t> and get an article about Oracle licensing instead of the one that actually debugs the error. Ticket volume climbs; trust tanks.</a:t>
+            </a:r>
+          </a:p>
+        </p:txBody>
+      </p:sp>
+      <p:sp>
+        <p:nvSpPr>
+          <p:cNvPr id="6" name="TextBox 5"/>
+          <p:cNvSpPr txBox="1"/>
+          <p:nvPr/>
+        </p:nvSpPr>
+        <p:spPr>
+          <a:xfrm>
+            <a:off x="640080" y="2743200"/>
+            <a:ext cx="10972800" cy="457200"/>
+          </a:xfrm>
+          <a:prstGeom prst="rect">
+            <a:avLst/>
+          </a:prstGeom>
+          <a:noFill/>
+        </p:spPr>
+        <p:txBody>
+          <a:bodyPr wrap="square">
+            <a:spAutoFit/>
+          </a:bodyPr>
+          <a:lstStyle/>
+          <a:p>
+            <a:pPr algn="l"/>
+            <a:r>
+              <a:rPr sz="1800" b="1">
+                <a:solidFill>
+                  <a:srgbClr val="F46E32"/>
+                </a:solidFill>
+                <a:latin typeface="Calibri"/>
+              </a:rPr>
+              <a:t>What went wrong</a:t>
+            </a:r>
+          </a:p>
+        </p:txBody>
+      </p:sp>
+      <p:sp>
+        <p:nvSpPr>
+          <p:cNvPr id="7" name="TextBox 6"/>
+          <p:cNvSpPr txBox="1"/>
+          <p:nvPr/>
+        </p:nvSpPr>
+        <p:spPr>
+          <a:xfrm>
+            <a:off x="640080" y="3200400"/>
+            <a:ext cx="11247120" cy="2011680"/>
+          </a:xfrm>
+          <a:prstGeom prst="rect">
+            <a:avLst/>
+          </a:prstGeom>
+          <a:noFill/>
+        </p:spPr>
+        <p:txBody>
+          <a:bodyPr wrap="square">
+            <a:spAutoFit/>
+          </a:bodyPr>
+          <a:lstStyle/>
+          <a:p>
+            <a:pPr algn="l">
+              <a:spcAft>
+                <a:spcPts val="700"/>
+              </a:spcAft>
+            </a:pPr>
+            <a:r>
+              <a:rPr sz="1600" b="1">
+                <a:solidFill>
+                  <a:srgbClr val="F46E32"/>
+                </a:solidFill>
+                <a:latin typeface="Calibri"/>
+              </a:rPr>
+              <a:t>▸  </a:t>
+            </a:r>
+            <a:r>
+              <a:rPr b="1" sz="1600">
+                <a:solidFill>
+                  <a:srgbClr val="F46E32"/>
+                </a:solidFill>
+                <a:latin typeface="Calibri"/>
+              </a:rPr>
+              <a:t>Embeddings smooth over exact tokens.</a:t>
+            </a:r>
+            <a:r>
+              <a:rPr sz="1600">
+                <a:solidFill>
+                  <a:srgbClr val="FFFFFF"/>
+                </a:solidFill>
+                <a:latin typeface="Calibri"/>
+              </a:rPr>
+              <a:t> "ORA-04031" is rare; the model finds docs with similar prose, not the exact code.</a:t>
+            </a:r>
+          </a:p>
+          <a:p>
+            <a:pPr algn="l">
+              <a:spcAft>
+                <a:spcPts val="700"/>
+              </a:spcAft>
+            </a:pPr>
+            <a:r>
+              <a:rPr sz="1600" b="1">
+                <a:solidFill>
+                  <a:srgbClr val="F46E32"/>
+                </a:solidFill>
+                <a:latin typeface="Calibri"/>
+              </a:rPr>
+              <a:t>▸  </a:t>
+            </a:r>
+            <a:r>
+              <a:rPr b="1" sz="1600">
+                <a:solidFill>
+                  <a:srgbClr val="F46E32"/>
+                </a:solidFill>
+                <a:latin typeface="Calibri"/>
+              </a:rPr>
+              <a:t>Recall ceiling hit.</a:t>
+            </a:r>
+            <a:r>
+              <a:rPr sz="1600">
+                <a:solidFill>
+                  <a:srgbClr val="FFFFFF"/>
+                </a:solidFill>
+                <a:latin typeface="Calibri"/>
+              </a:rPr>
+              <a:t> The right doc wasn't in the top-50 at all — no amount of prompt tuning could save the generator.</a:t>
+            </a:r>
+          </a:p>
+          <a:p>
+            <a:pPr algn="l">
+              <a:spcAft>
+                <a:spcPts val="700"/>
+              </a:spcAft>
+            </a:pPr>
+            <a:r>
+              <a:rPr sz="1600" b="1">
+                <a:solidFill>
+                  <a:srgbClr val="F46E32"/>
+                </a:solidFill>
+                <a:latin typeface="Calibri"/>
+              </a:rPr>
+              <a:t>▸  </a:t>
+            </a:r>
+            <a:r>
+              <a:rPr b="1" sz="1600">
+                <a:solidFill>
+                  <a:srgbClr val="F46E32"/>
+                </a:solidFill>
+                <a:latin typeface="Calibri"/>
+              </a:rPr>
+              <a:t>The generator looked confident.</a:t>
+            </a:r>
+            <a:r>
+              <a:rPr sz="1600">
+                <a:solidFill>
+                  <a:srgbClr val="FFFFFF"/>
+                </a:solidFill>
+                <a:latin typeface="Calibri"/>
+              </a:rPr>
+              <a:t> The LLM answered from the wrong doc rather than saying "I don't know".</a:t>
+            </a:r>
+          </a:p>
+        </p:txBody>
+      </p:sp>
+      <p:sp>
+        <p:nvSpPr>
+          <p:cNvPr id="8" name="TextBox 7"/>
+          <p:cNvSpPr txBox="1"/>
+          <p:nvPr/>
+        </p:nvSpPr>
+        <p:spPr>
+          <a:xfrm>
+            <a:off x="640080" y="5120640"/>
+            <a:ext cx="10972800" cy="457200"/>
+          </a:xfrm>
+          <a:prstGeom prst="rect">
+            <a:avLst/>
+          </a:prstGeom>
+          <a:noFill/>
+        </p:spPr>
+        <p:txBody>
+          <a:bodyPr wrap="square">
+            <a:spAutoFit/>
+          </a:bodyPr>
+          <a:lstStyle/>
+          <a:p>
+            <a:pPr algn="l"/>
+            <a:r>
+              <a:rPr sz="1800" b="1">
+                <a:solidFill>
+                  <a:srgbClr val="F46E32"/>
+                </a:solidFill>
+                <a:latin typeface="Calibri"/>
+              </a:rPr>
+              <a:t>What fixed it (one afternoon of work)</a:t>
+            </a:r>
+          </a:p>
+        </p:txBody>
+      </p:sp>
+      <p:sp>
+        <p:nvSpPr>
+          <p:cNvPr id="9" name="TextBox 8"/>
+          <p:cNvSpPr txBox="1"/>
+          <p:nvPr/>
+        </p:nvSpPr>
+        <p:spPr>
+          <a:xfrm>
+            <a:off x="640080" y="5577840"/>
+            <a:ext cx="11247120" cy="731520"/>
+          </a:xfrm>
+          <a:prstGeom prst="rect">
+            <a:avLst/>
+          </a:prstGeom>
+          <a:noFill/>
+        </p:spPr>
+        <p:txBody>
+          <a:bodyPr wrap="square">
+            <a:spAutoFit/>
+          </a:bodyPr>
+          <a:lstStyle/>
+          <a:p>
+            <a:pPr algn="l">
+              <a:spcAft>
+                <a:spcPts val="700"/>
+              </a:spcAft>
+            </a:pPr>
+            <a:r>
+              <a:rPr sz="1500" b="1">
+                <a:solidFill>
+                  <a:srgbClr val="F46E32"/>
+                </a:solidFill>
+                <a:latin typeface="Calibri"/>
+              </a:rPr>
+              <a:t>▸  </a:t>
+            </a:r>
+            <a:r>
+              <a:rPr sz="1500">
+                <a:solidFill>
+                  <a:srgbClr val="FFFFFF"/>
+                </a:solidFill>
+                <a:latin typeface="Calibri"/>
+              </a:rPr>
+              <a:t>Added </a:t>
+            </a:r>
+            <a:r>
+              <a:rPr b="1" sz="1500">
+                <a:solidFill>
+                  <a:srgbClr val="F46E32"/>
+                </a:solidFill>
+                <a:latin typeface="Calibri"/>
+              </a:rPr>
+              <a:t>BM25</a:t>
+            </a:r>
+            <a:r>
+              <a:rPr sz="1500">
+                <a:solidFill>
+                  <a:srgbClr val="FFFFFF"/>
+                </a:solidFill>
+                <a:latin typeface="Calibri"/>
+              </a:rPr>
+              <a:t> alongside dense; fused with </a:t>
+            </a:r>
+            <a:r>
+              <a:rPr b="1" sz="1500">
+                <a:solidFill>
+                  <a:srgbClr val="F46E32"/>
+                </a:solidFill>
+                <a:latin typeface="Calibri"/>
+              </a:rPr>
+              <a:t>RRF</a:t>
+            </a:r>
+            <a:r>
+              <a:rPr sz="1500">
+                <a:solidFill>
+                  <a:srgbClr val="FFFFFF"/>
+                </a:solidFill>
+                <a:latin typeface="Calibri"/>
+              </a:rPr>
+              <a:t> — exact-code match jumped to rank 1. Added a </a:t>
+            </a:r>
+            <a:r>
+              <a:rPr b="1" sz="1500">
+                <a:solidFill>
+                  <a:srgbClr val="F46E32"/>
+                </a:solidFill>
+                <a:latin typeface="Calibri"/>
+              </a:rPr>
+              <a:t>cross-encoder reranker</a:t>
+            </a:r>
+            <a:r>
+              <a:rPr sz="1500">
+                <a:solidFill>
+                  <a:srgbClr val="FFFFFF"/>
+                </a:solidFill>
+                <a:latin typeface="Calibri"/>
+              </a:rPr>
+              <a:t> to keep noisy matches out of the prompt. Ticket deflection went back above baseline.</a:t>
             </a:r>
           </a:p>
         </p:txBody>

--- a/docs/DataHour_HybridRAG_With_ReRanker.pptx
+++ b/docs/DataHour_HybridRAG_With_ReRanker.pptx
@@ -26,17 +26,16 @@
     <p:sldId id="276" r:id="rId20"/>
     <p:sldId id="277" r:id="rId21"/>
     <p:sldId id="278" r:id="rId22"/>
-    <p:sldId id="290" r:id="rId36"/>
-    <p:sldId id="279" r:id="rId23"/>
-    <p:sldId id="291" r:id="rId37"/>
-    <p:sldId id="280" r:id="rId24"/>
-    <p:sldId id="281" r:id="rId25"/>
-    <p:sldId id="282" r:id="rId26"/>
-    <p:sldId id="283" r:id="rId27"/>
-    <p:sldId id="289" r:id="rId28"/>
-    <p:sldId id="284" r:id="rId29"/>
-    <p:sldId id="285" r:id="rId30"/>
-    <p:sldId id="286" r:id="rId31"/>
+    <p:sldId id="290" r:id="rId23"/>
+    <p:sldId id="279" r:id="rId24"/>
+    <p:sldId id="291" r:id="rId25"/>
+    <p:sldId id="280" r:id="rId26"/>
+    <p:sldId id="281" r:id="rId27"/>
+    <p:sldId id="282" r:id="rId28"/>
+    <p:sldId id="283" r:id="rId29"/>
+    <p:sldId id="289" r:id="rId30"/>
+    <p:sldId id="284" r:id="rId31"/>
+    <p:sldId id="285" r:id="rId32"/>
   </p:sldIdLst>
   <p:sldSz cx="12192000" cy="6858000"/>
   <p:notesSz cx="6858000" cy="9144000"/>
@@ -12882,7 +12881,7 @@
         <p:spPr>
           <a:xfrm>
             <a:off x="0" y="0"/>
-            <a:ext cx="12191695" cy="6858000"/>
+            <a:ext cx="12192000" cy="6858000"/>
           </a:xfrm>
           <a:prstGeom prst="rect">
             <a:avLst/>
@@ -12934,7 +12933,7 @@
           <a:noFill/>
         </p:spPr>
         <p:txBody>
-          <a:bodyPr wrap="square" lIns="45720" rIns="45720">
+          <a:bodyPr wrap="square">
             <a:spAutoFit/>
           </a:bodyPr>
           <a:lstStyle/>
@@ -12947,7 +12946,7 @@
                 </a:solidFill>
                 <a:latin typeface="Calibri"/>
               </a:rPr>
-              <a:t>Re-Ranker Impact — A Real Example</a:t>
+              <a:t>When to Use What — Decision Guide</a:t>
             </a:r>
           </a:p>
         </p:txBody>
@@ -13004,43 +13003,8 @@
         </p:nvSpPr>
         <p:spPr>
           <a:xfrm>
-            <a:off x="640080" y="1463040"/>
-            <a:ext cx="10972800" cy="457200"/>
-          </a:xfrm>
-          <a:prstGeom prst="rect">
-            <a:avLst/>
-          </a:prstGeom>
-          <a:noFill/>
-        </p:spPr>
-        <p:txBody>
-          <a:bodyPr wrap="square" lIns="45720" rIns="45720">
-            <a:spAutoFit/>
-          </a:bodyPr>
-          <a:lstStyle/>
-          <a:p>
-            <a:pPr algn="l"/>
-            <a:r>
-              <a:rPr sz="1800" b="1">
-                <a:solidFill>
-                  <a:srgbClr val="F46E32"/>
-                </a:solidFill>
-                <a:latin typeface="Calibri"/>
-              </a:rPr>
-              <a:t>Query: "Where is the Burj Khalifa and when was it built?"</a:t>
-            </a:r>
-          </a:p>
-        </p:txBody>
-      </p:sp>
-      <p:sp>
-        <p:nvSpPr>
-          <p:cNvPr id="6" name="TextBox 5"/>
-          <p:cNvSpPr txBox="1"/>
-          <p:nvPr/>
-        </p:nvSpPr>
-        <p:spPr>
-          <a:xfrm>
-            <a:off x="640080" y="2011680"/>
-            <a:ext cx="11247120" cy="4389120"/>
+            <a:off x="457200" y="1188720"/>
+            <a:ext cx="11430000" cy="365760"/>
           </a:xfrm>
           <a:prstGeom prst="rect">
             <a:avLst/>
@@ -13053,248 +13017,1135 @@
           </a:bodyPr>
           <a:lstStyle/>
           <a:p>
-            <a:pPr algn="l">
-              <a:spcAft>
-                <a:spcPts val="700"/>
-              </a:spcAft>
-            </a:pPr>
-            <a:r>
-              <a:rPr sz="1800" b="1">
-                <a:solidFill>
-                  <a:srgbClr val="F46E32"/>
-                </a:solidFill>
-                <a:latin typeface="Calibri"/>
-              </a:rPr>
-              <a:t>▸  Without rerank</a:t>
-            </a:r>
-            <a:r>
-              <a:rPr sz="1800">
-                <a:solidFill>
-                  <a:srgbClr val="FFFFFF"/>
-                </a:solidFill>
-                <a:latin typeface="Calibri"/>
-              </a:rPr>
-              <a:t> — the correct Burj Khalifa article was BM25 rank </a:t>
-            </a:r>
-            <a:r>
-              <a:rPr sz="1800" b="1">
-                <a:solidFill>
-                  <a:srgbClr val="F46E32"/>
-                </a:solidFill>
-                <a:latin typeface="Calibri"/>
-              </a:rPr>
-              <a:t>12</a:t>
-            </a:r>
-            <a:r>
-              <a:rPr sz="1800">
-                <a:solidFill>
-                  <a:srgbClr val="FFFFFF"/>
-                </a:solidFill>
-                <a:latin typeface="Calibri"/>
-              </a:rPr>
-              <a:t> → likely missed top-6 context</a:t>
-            </a:r>
-          </a:p>
-          <a:p>
-            <a:pPr algn="l">
-              <a:spcAft>
-                <a:spcPts val="700"/>
-              </a:spcAft>
-            </a:pPr>
-            <a:r>
-              <a:rPr sz="1800" b="1">
-                <a:solidFill>
-                  <a:srgbClr val="F46E32"/>
-                </a:solidFill>
-                <a:latin typeface="Calibri"/>
-              </a:rPr>
-              <a:t>▸  Dense retrieval</a:t>
-            </a:r>
-            <a:r>
-              <a:rPr sz="1800">
-                <a:solidFill>
-                  <a:srgbClr val="FFFFFF"/>
-                </a:solidFill>
-                <a:latin typeface="Calibri"/>
-              </a:rPr>
-              <a:t> ranked it #1, but RRF averaged the two and pushed it to RRF rank ~5</a:t>
-            </a:r>
-          </a:p>
-          <a:p>
-            <a:pPr algn="l">
-              <a:spcAft>
-                <a:spcPts val="700"/>
-              </a:spcAft>
-            </a:pPr>
-            <a:r>
-              <a:rPr sz="1800" b="1">
-                <a:solidFill>
-                  <a:srgbClr val="F46E32"/>
-                </a:solidFill>
-                <a:latin typeface="Calibri"/>
-              </a:rPr>
-              <a:t>▸  With rerank</a:t>
-            </a:r>
-            <a:r>
-              <a:rPr sz="1800">
-                <a:solidFill>
-                  <a:srgbClr val="FFFFFF"/>
-                </a:solidFill>
-                <a:latin typeface="Calibri"/>
-              </a:rPr>
-              <a:t> — the cross-encoder rescored every (query, chunk) pair jointly</a:t>
-            </a:r>
-          </a:p>
-          <a:p>
-            <a:pPr algn="l">
-              <a:spcAft>
-                <a:spcPts val="700"/>
-              </a:spcAft>
-            </a:pPr>
-            <a:r>
-              <a:rPr sz="1800" b="1">
-                <a:solidFill>
-                  <a:srgbClr val="F46E32"/>
-                </a:solidFill>
-                <a:latin typeface="Calibri"/>
-              </a:rPr>
-              <a:t>▸  </a:t>
-            </a:r>
-            <a:r>
-              <a:rPr sz="1800">
-                <a:solidFill>
-                  <a:srgbClr val="FFFFFF"/>
-                </a:solidFill>
-                <a:latin typeface="Calibri"/>
-              </a:rPr>
-              <a:t>It promoted Burj Khalifa to </a:t>
-            </a:r>
-            <a:r>
-              <a:rPr sz="1800" b="1">
-                <a:solidFill>
-                  <a:srgbClr val="F46E32"/>
-                </a:solidFill>
-                <a:latin typeface="Calibri"/>
-              </a:rPr>
-              <a:t>position 1</a:t>
-            </a:r>
-            <a:r>
-              <a:rPr sz="1800">
-                <a:solidFill>
-                  <a:srgbClr val="FFFFFF"/>
-                </a:solidFill>
-                <a:latin typeface="Calibri"/>
-              </a:rPr>
-              <a:t> with a rerank score of </a:t>
-            </a:r>
-            <a:r>
-              <a:rPr sz="1800" b="1">
-                <a:solidFill>
-                  <a:srgbClr val="F46E32"/>
-                </a:solidFill>
-                <a:latin typeface="Calibri"/>
-              </a:rPr>
-              <a:t>3.41</a:t>
-            </a:r>
-          </a:p>
-          <a:p>
-            <a:pPr algn="l">
-              <a:spcAft>
-                <a:spcPts val="700"/>
-              </a:spcAft>
-            </a:pPr>
-            <a:r>
-              <a:rPr sz="1800" b="1">
-                <a:solidFill>
-                  <a:srgbClr val="F46E32"/>
-                </a:solidFill>
-                <a:latin typeface="Calibri"/>
-              </a:rPr>
-              <a:t>▸  Source 2</a:t>
-            </a:r>
-            <a:r>
-              <a:rPr sz="1800">
-                <a:solidFill>
-                  <a:srgbClr val="FFFFFF"/>
-                </a:solidFill>
-                <a:latin typeface="Calibri"/>
-              </a:rPr>
-              <a:t> (Burj Al Arab) was a noisy near-match — reranker kept it but ranked it second</a:t>
-            </a:r>
-          </a:p>
-          <a:p>
-            <a:pPr algn="l">
-              <a:spcAft>
-                <a:spcPts val="700"/>
-              </a:spcAft>
-            </a:pPr>
-            <a:r>
-              <a:rPr sz="1800" b="1">
-                <a:solidFill>
-                  <a:srgbClr val="F46E32"/>
-                </a:solidFill>
-                <a:latin typeface="Calibri"/>
-              </a:rPr>
-              <a:t>▸  Latency cost</a:t>
-            </a:r>
-            <a:r>
-              <a:rPr sz="1800">
-                <a:solidFill>
-                  <a:srgbClr val="FFFFFF"/>
-                </a:solidFill>
-                <a:latin typeface="Calibri"/>
-              </a:rPr>
-              <a:t> — about </a:t>
-            </a:r>
-            <a:r>
-              <a:rPr sz="1800" b="1">
-                <a:solidFill>
-                  <a:srgbClr val="F46E32"/>
-                </a:solidFill>
-                <a:latin typeface="Calibri"/>
-              </a:rPr>
-              <a:t>300–800 ms</a:t>
-            </a:r>
-            <a:r>
-              <a:rPr sz="1800">
-                <a:solidFill>
-                  <a:srgbClr val="FFFFFF"/>
-                </a:solidFill>
-                <a:latin typeface="Calibri"/>
-              </a:rPr>
-              <a:t> per query on CPU after model warm-up</a:t>
-            </a:r>
-          </a:p>
-          <a:p>
-            <a:pPr algn="l">
-              <a:spcAft>
-                <a:spcPts val="700"/>
-              </a:spcAft>
-            </a:pPr>
-            <a:r>
-              <a:rPr sz="1800" b="1">
-                <a:solidFill>
-                  <a:srgbClr val="F46E32"/>
-                </a:solidFill>
-                <a:latin typeface="Calibri"/>
-              </a:rPr>
-              <a:t>▸  Result:</a:t>
-            </a:r>
-            <a:r>
-              <a:rPr sz="1800">
-                <a:solidFill>
-                  <a:srgbClr val="FFFFFF"/>
-                </a:solidFill>
-                <a:latin typeface="Calibri"/>
-              </a:rPr>
-              <a:t> the LLM got the right context and produced a grounded answer with citations</a:t>
-            </a:r>
-          </a:p>
-        </p:txBody>
-      </p:sp>
-      <p:sp>
-        <p:nvSpPr>
-          <p:cNvPr id="7" name="TextBox 6"/>
+            <a:pPr algn="l"/>
+            <a:r>
+              <a:rPr sz="1400" b="0">
+                <a:solidFill>
+                  <a:srgbClr val="AAAAAA"/>
+                </a:solidFill>
+                <a:latin typeface="Calibri"/>
+              </a:rPr>
+              <a:t>Different query types deserve different retrieval stacks.</a:t>
+            </a:r>
+          </a:p>
+        </p:txBody>
+      </p:sp>
+      <p:sp>
+        <p:nvSpPr>
+          <p:cNvPr id="6" name="Rectangle 5"/>
+          <p:cNvSpPr/>
+          <p:nvPr/>
+        </p:nvSpPr>
+        <p:spPr>
+          <a:xfrm>
+            <a:off x="457200" y="1645920"/>
+            <a:ext cx="4754880" cy="530352"/>
+          </a:xfrm>
+          <a:prstGeom prst="rect">
+            <a:avLst/>
+          </a:prstGeom>
+          <a:solidFill>
+            <a:srgbClr val="F46E32"/>
+          </a:solidFill>
+          <a:ln>
+            <a:solidFill>
+              <a:srgbClr val="F46E32"/>
+            </a:solidFill>
+          </a:ln>
+        </p:spPr>
+        <p:style>
+          <a:lnRef idx="1">
+            <a:schemeClr val="accent1"/>
+          </a:lnRef>
+          <a:fillRef idx="3">
+            <a:schemeClr val="accent1"/>
+          </a:fillRef>
+          <a:effectRef idx="2">
+            <a:schemeClr val="accent1"/>
+          </a:effectRef>
+          <a:fontRef idx="minor">
+            <a:schemeClr val="lt1"/>
+          </a:fontRef>
+        </p:style>
+        <p:txBody>
+          <a:bodyPr rtlCol="0" anchor="ctr"/>
+          <a:lstStyle/>
+          <a:p>
+            <a:pPr algn="ctr"/>
+            <a:r>
+              <a:rPr sz="1400" b="1">
+                <a:solidFill>
+                  <a:srgbClr val="FFFFFF"/>
+                </a:solidFill>
+              </a:rPr>
+              <a:t>Your situation</a:t>
+            </a:r>
+          </a:p>
+        </p:txBody>
+      </p:sp>
+      <p:sp>
+        <p:nvSpPr>
+          <p:cNvPr id="7" name="Rectangle 6"/>
+          <p:cNvSpPr/>
+          <p:nvPr/>
+        </p:nvSpPr>
+        <p:spPr>
+          <a:xfrm>
+            <a:off x="5212080" y="1645920"/>
+            <a:ext cx="3474720" cy="530352"/>
+          </a:xfrm>
+          <a:prstGeom prst="rect">
+            <a:avLst/>
+          </a:prstGeom>
+          <a:solidFill>
+            <a:srgbClr val="F46E32"/>
+          </a:solidFill>
+          <a:ln>
+            <a:solidFill>
+              <a:srgbClr val="F46E32"/>
+            </a:solidFill>
+          </a:ln>
+        </p:spPr>
+        <p:style>
+          <a:lnRef idx="1">
+            <a:schemeClr val="accent1"/>
+          </a:lnRef>
+          <a:fillRef idx="3">
+            <a:schemeClr val="accent1"/>
+          </a:fillRef>
+          <a:effectRef idx="2">
+            <a:schemeClr val="accent1"/>
+          </a:effectRef>
+          <a:fontRef idx="minor">
+            <a:schemeClr val="lt1"/>
+          </a:fontRef>
+        </p:style>
+        <p:txBody>
+          <a:bodyPr rtlCol="0" anchor="ctr"/>
+          <a:lstStyle/>
+          <a:p>
+            <a:pPr algn="ctr"/>
+            <a:r>
+              <a:rPr sz="1400" b="1">
+                <a:solidFill>
+                  <a:srgbClr val="FFFFFF"/>
+                </a:solidFill>
+              </a:rPr>
+              <a:t>Best stack</a:t>
+            </a:r>
+          </a:p>
+        </p:txBody>
+      </p:sp>
+      <p:sp>
+        <p:nvSpPr>
+          <p:cNvPr id="8" name="Rectangle 7"/>
+          <p:cNvSpPr/>
+          <p:nvPr/>
+        </p:nvSpPr>
+        <p:spPr>
+          <a:xfrm>
+            <a:off x="8686800" y="1645920"/>
+            <a:ext cx="3200400" cy="530352"/>
+          </a:xfrm>
+          <a:prstGeom prst="rect">
+            <a:avLst/>
+          </a:prstGeom>
+          <a:solidFill>
+            <a:srgbClr val="F46E32"/>
+          </a:solidFill>
+          <a:ln>
+            <a:solidFill>
+              <a:srgbClr val="F46E32"/>
+            </a:solidFill>
+          </a:ln>
+        </p:spPr>
+        <p:style>
+          <a:lnRef idx="1">
+            <a:schemeClr val="accent1"/>
+          </a:lnRef>
+          <a:fillRef idx="3">
+            <a:schemeClr val="accent1"/>
+          </a:fillRef>
+          <a:effectRef idx="2">
+            <a:schemeClr val="accent1"/>
+          </a:effectRef>
+          <a:fontRef idx="minor">
+            <a:schemeClr val="lt1"/>
+          </a:fontRef>
+        </p:style>
+        <p:txBody>
+          <a:bodyPr rtlCol="0" anchor="ctr"/>
+          <a:lstStyle/>
+          <a:p>
+            <a:pPr algn="ctr"/>
+            <a:r>
+              <a:rPr sz="1400" b="1">
+                <a:solidFill>
+                  <a:srgbClr val="FFFFFF"/>
+                </a:solidFill>
+              </a:rPr>
+              <a:t>Why</a:t>
+            </a:r>
+          </a:p>
+        </p:txBody>
+      </p:sp>
+      <p:sp>
+        <p:nvSpPr>
+          <p:cNvPr id="9" name="Rectangle 8"/>
+          <p:cNvSpPr/>
+          <p:nvPr/>
+        </p:nvSpPr>
+        <p:spPr>
+          <a:xfrm>
+            <a:off x="457200" y="2176272"/>
+            <a:ext cx="4754880" cy="530352"/>
+          </a:xfrm>
+          <a:prstGeom prst="rect">
+            <a:avLst/>
+          </a:prstGeom>
+          <a:solidFill>
+            <a:srgbClr val="221B1F"/>
+          </a:solidFill>
+          <a:ln w="6350">
+            <a:solidFill>
+              <a:srgbClr val="F46E32"/>
+            </a:solidFill>
+          </a:ln>
+        </p:spPr>
+        <p:style>
+          <a:lnRef idx="1">
+            <a:schemeClr val="accent1"/>
+          </a:lnRef>
+          <a:fillRef idx="3">
+            <a:schemeClr val="accent1"/>
+          </a:fillRef>
+          <a:effectRef idx="2">
+            <a:schemeClr val="accent1"/>
+          </a:effectRef>
+          <a:fontRef idx="minor">
+            <a:schemeClr val="lt1"/>
+          </a:fontRef>
+        </p:style>
+        <p:txBody>
+          <a:bodyPr rtlCol="0" anchor="ctr"/>
+          <a:lstStyle/>
+          <a:p>
+            <a:pPr algn="ctr"/>
+            <a:r>
+              <a:rPr sz="1300">
+                <a:solidFill>
+                  <a:srgbClr val="FFFFFF"/>
+                </a:solidFill>
+              </a:rPr>
+              <a:t>Small corpus (&lt;1k docs), conceptual questions</a:t>
+            </a:r>
+          </a:p>
+        </p:txBody>
+      </p:sp>
+      <p:sp>
+        <p:nvSpPr>
+          <p:cNvPr id="10" name="Rectangle 9"/>
+          <p:cNvSpPr/>
+          <p:nvPr/>
+        </p:nvSpPr>
+        <p:spPr>
+          <a:xfrm>
+            <a:off x="5212080" y="2176272"/>
+            <a:ext cx="3474720" cy="530352"/>
+          </a:xfrm>
+          <a:prstGeom prst="rect">
+            <a:avLst/>
+          </a:prstGeom>
+          <a:solidFill>
+            <a:srgbClr val="221B1F"/>
+          </a:solidFill>
+          <a:ln w="6350">
+            <a:solidFill>
+              <a:srgbClr val="F46E32"/>
+            </a:solidFill>
+          </a:ln>
+        </p:spPr>
+        <p:style>
+          <a:lnRef idx="1">
+            <a:schemeClr val="accent1"/>
+          </a:lnRef>
+          <a:fillRef idx="3">
+            <a:schemeClr val="accent1"/>
+          </a:fillRef>
+          <a:effectRef idx="2">
+            <a:schemeClr val="accent1"/>
+          </a:effectRef>
+          <a:fontRef idx="minor">
+            <a:schemeClr val="lt1"/>
+          </a:fontRef>
+        </p:style>
+        <p:txBody>
+          <a:bodyPr rtlCol="0" anchor="ctr"/>
+          <a:lstStyle/>
+          <a:p>
+            <a:pPr algn="ctr"/>
+            <a:r>
+              <a:rPr sz="1300">
+                <a:solidFill>
+                  <a:srgbClr val="FFFFFF"/>
+                </a:solidFill>
+              </a:rPr>
+              <a:t>Dense only</a:t>
+            </a:r>
+          </a:p>
+        </p:txBody>
+      </p:sp>
+      <p:sp>
+        <p:nvSpPr>
+          <p:cNvPr id="11" name="Rectangle 10"/>
+          <p:cNvSpPr/>
+          <p:nvPr/>
+        </p:nvSpPr>
+        <p:spPr>
+          <a:xfrm>
+            <a:off x="8686800" y="2176272"/>
+            <a:ext cx="3200400" cy="530352"/>
+          </a:xfrm>
+          <a:prstGeom prst="rect">
+            <a:avLst/>
+          </a:prstGeom>
+          <a:solidFill>
+            <a:srgbClr val="221B1F"/>
+          </a:solidFill>
+          <a:ln w="6350">
+            <a:solidFill>
+              <a:srgbClr val="F46E32"/>
+            </a:solidFill>
+          </a:ln>
+        </p:spPr>
+        <p:style>
+          <a:lnRef idx="1">
+            <a:schemeClr val="accent1"/>
+          </a:lnRef>
+          <a:fillRef idx="3">
+            <a:schemeClr val="accent1"/>
+          </a:fillRef>
+          <a:effectRef idx="2">
+            <a:schemeClr val="accent1"/>
+          </a:effectRef>
+          <a:fontRef idx="minor">
+            <a:schemeClr val="lt1"/>
+          </a:fontRef>
+        </p:style>
+        <p:txBody>
+          <a:bodyPr rtlCol="0" anchor="ctr"/>
+          <a:lstStyle/>
+          <a:p>
+            <a:pPr algn="ctr"/>
+            <a:r>
+              <a:rPr sz="1300">
+                <a:solidFill>
+                  <a:srgbClr val="FFFFFF"/>
+                </a:solidFill>
+              </a:rPr>
+              <a:t>Simpler, faster, recall is easy</a:t>
+            </a:r>
+          </a:p>
+        </p:txBody>
+      </p:sp>
+      <p:sp>
+        <p:nvSpPr>
+          <p:cNvPr id="12" name="Rectangle 11"/>
+          <p:cNvSpPr/>
+          <p:nvPr/>
+        </p:nvSpPr>
+        <p:spPr>
+          <a:xfrm>
+            <a:off x="457200" y="2706624"/>
+            <a:ext cx="4754880" cy="530352"/>
+          </a:xfrm>
+          <a:prstGeom prst="rect">
+            <a:avLst/>
+          </a:prstGeom>
+          <a:solidFill>
+            <a:srgbClr val="2A2125"/>
+          </a:solidFill>
+          <a:ln w="6350">
+            <a:solidFill>
+              <a:srgbClr val="F46E32"/>
+            </a:solidFill>
+          </a:ln>
+        </p:spPr>
+        <p:style>
+          <a:lnRef idx="1">
+            <a:schemeClr val="accent1"/>
+          </a:lnRef>
+          <a:fillRef idx="3">
+            <a:schemeClr val="accent1"/>
+          </a:fillRef>
+          <a:effectRef idx="2">
+            <a:schemeClr val="accent1"/>
+          </a:effectRef>
+          <a:fontRef idx="minor">
+            <a:schemeClr val="lt1"/>
+          </a:fontRef>
+        </p:style>
+        <p:txBody>
+          <a:bodyPr rtlCol="0" anchor="ctr"/>
+          <a:lstStyle/>
+          <a:p>
+            <a:pPr algn="ctr"/>
+            <a:r>
+              <a:rPr sz="1300">
+                <a:solidFill>
+                  <a:srgbClr val="FFFFFF"/>
+                </a:solidFill>
+              </a:rPr>
+              <a:t>Exact-match queries (IDs, codes, product SKUs)</a:t>
+            </a:r>
+          </a:p>
+        </p:txBody>
+      </p:sp>
+      <p:sp>
+        <p:nvSpPr>
+          <p:cNvPr id="13" name="Rectangle 12"/>
+          <p:cNvSpPr/>
+          <p:nvPr/>
+        </p:nvSpPr>
+        <p:spPr>
+          <a:xfrm>
+            <a:off x="5212080" y="2706624"/>
+            <a:ext cx="3474720" cy="530352"/>
+          </a:xfrm>
+          <a:prstGeom prst="rect">
+            <a:avLst/>
+          </a:prstGeom>
+          <a:solidFill>
+            <a:srgbClr val="2A2125"/>
+          </a:solidFill>
+          <a:ln w="6350">
+            <a:solidFill>
+              <a:srgbClr val="F46E32"/>
+            </a:solidFill>
+          </a:ln>
+        </p:spPr>
+        <p:style>
+          <a:lnRef idx="1">
+            <a:schemeClr val="accent1"/>
+          </a:lnRef>
+          <a:fillRef idx="3">
+            <a:schemeClr val="accent1"/>
+          </a:fillRef>
+          <a:effectRef idx="2">
+            <a:schemeClr val="accent1"/>
+          </a:effectRef>
+          <a:fontRef idx="minor">
+            <a:schemeClr val="lt1"/>
+          </a:fontRef>
+        </p:style>
+        <p:txBody>
+          <a:bodyPr rtlCol="0" anchor="ctr"/>
+          <a:lstStyle/>
+          <a:p>
+            <a:pPr algn="ctr"/>
+            <a:r>
+              <a:rPr sz="1300">
+                <a:solidFill>
+                  <a:srgbClr val="FFFFFF"/>
+                </a:solidFill>
+              </a:rPr>
+              <a:t>BM25 only</a:t>
+            </a:r>
+          </a:p>
+        </p:txBody>
+      </p:sp>
+      <p:sp>
+        <p:nvSpPr>
+          <p:cNvPr id="14" name="Rectangle 13"/>
+          <p:cNvSpPr/>
+          <p:nvPr/>
+        </p:nvSpPr>
+        <p:spPr>
+          <a:xfrm>
+            <a:off x="8686800" y="2706624"/>
+            <a:ext cx="3200400" cy="530352"/>
+          </a:xfrm>
+          <a:prstGeom prst="rect">
+            <a:avLst/>
+          </a:prstGeom>
+          <a:solidFill>
+            <a:srgbClr val="2A2125"/>
+          </a:solidFill>
+          <a:ln w="6350">
+            <a:solidFill>
+              <a:srgbClr val="F46E32"/>
+            </a:solidFill>
+          </a:ln>
+        </p:spPr>
+        <p:style>
+          <a:lnRef idx="1">
+            <a:schemeClr val="accent1"/>
+          </a:lnRef>
+          <a:fillRef idx="3">
+            <a:schemeClr val="accent1"/>
+          </a:fillRef>
+          <a:effectRef idx="2">
+            <a:schemeClr val="accent1"/>
+          </a:effectRef>
+          <a:fontRef idx="minor">
+            <a:schemeClr val="lt1"/>
+          </a:fontRef>
+        </p:style>
+        <p:txBody>
+          <a:bodyPr rtlCol="0" anchor="ctr"/>
+          <a:lstStyle/>
+          <a:p>
+            <a:pPr algn="ctr"/>
+            <a:r>
+              <a:rPr sz="1300">
+                <a:solidFill>
+                  <a:srgbClr val="FFFFFF"/>
+                </a:solidFill>
+              </a:rPr>
+              <a:t>Keyword precision beats semantic blur</a:t>
+            </a:r>
+          </a:p>
+        </p:txBody>
+      </p:sp>
+      <p:sp>
+        <p:nvSpPr>
+          <p:cNvPr id="15" name="Rectangle 14"/>
+          <p:cNvSpPr/>
+          <p:nvPr/>
+        </p:nvSpPr>
+        <p:spPr>
+          <a:xfrm>
+            <a:off x="457200" y="3236976"/>
+            <a:ext cx="4754880" cy="530352"/>
+          </a:xfrm>
+          <a:prstGeom prst="rect">
+            <a:avLst/>
+          </a:prstGeom>
+          <a:solidFill>
+            <a:srgbClr val="221B1F"/>
+          </a:solidFill>
+          <a:ln w="6350">
+            <a:solidFill>
+              <a:srgbClr val="F46E32"/>
+            </a:solidFill>
+          </a:ln>
+        </p:spPr>
+        <p:style>
+          <a:lnRef idx="1">
+            <a:schemeClr val="accent1"/>
+          </a:lnRef>
+          <a:fillRef idx="3">
+            <a:schemeClr val="accent1"/>
+          </a:fillRef>
+          <a:effectRef idx="2">
+            <a:schemeClr val="accent1"/>
+          </a:effectRef>
+          <a:fontRef idx="minor">
+            <a:schemeClr val="lt1"/>
+          </a:fontRef>
+        </p:style>
+        <p:txBody>
+          <a:bodyPr rtlCol="0" anchor="ctr"/>
+          <a:lstStyle/>
+          <a:p>
+            <a:pPr algn="ctr"/>
+            <a:r>
+              <a:rPr sz="1300">
+                <a:solidFill>
+                  <a:srgbClr val="FFFFFF"/>
+                </a:solidFill>
+              </a:rPr>
+              <a:t>Mixed query styles (most real systems)</a:t>
+            </a:r>
+          </a:p>
+        </p:txBody>
+      </p:sp>
+      <p:sp>
+        <p:nvSpPr>
+          <p:cNvPr id="16" name="Rectangle 15"/>
+          <p:cNvSpPr/>
+          <p:nvPr/>
+        </p:nvSpPr>
+        <p:spPr>
+          <a:xfrm>
+            <a:off x="5212080" y="3236976"/>
+            <a:ext cx="3474720" cy="530352"/>
+          </a:xfrm>
+          <a:prstGeom prst="rect">
+            <a:avLst/>
+          </a:prstGeom>
+          <a:solidFill>
+            <a:srgbClr val="221B1F"/>
+          </a:solidFill>
+          <a:ln w="6350">
+            <a:solidFill>
+              <a:srgbClr val="F46E32"/>
+            </a:solidFill>
+          </a:ln>
+        </p:spPr>
+        <p:style>
+          <a:lnRef idx="1">
+            <a:schemeClr val="accent1"/>
+          </a:lnRef>
+          <a:fillRef idx="3">
+            <a:schemeClr val="accent1"/>
+          </a:fillRef>
+          <a:effectRef idx="2">
+            <a:schemeClr val="accent1"/>
+          </a:effectRef>
+          <a:fontRef idx="minor">
+            <a:schemeClr val="lt1"/>
+          </a:fontRef>
+        </p:style>
+        <p:txBody>
+          <a:bodyPr rtlCol="0" anchor="ctr"/>
+          <a:lstStyle/>
+          <a:p>
+            <a:pPr algn="ctr"/>
+            <a:r>
+              <a:rPr sz="1300">
+                <a:solidFill>
+                  <a:srgbClr val="FFFFFF"/>
+                </a:solidFill>
+              </a:rPr>
+              <a:t>Hybrid (Dense + BM25 + RRF)</a:t>
+            </a:r>
+          </a:p>
+        </p:txBody>
+      </p:sp>
+      <p:sp>
+        <p:nvSpPr>
+          <p:cNvPr id="17" name="Rectangle 16"/>
+          <p:cNvSpPr/>
+          <p:nvPr/>
+        </p:nvSpPr>
+        <p:spPr>
+          <a:xfrm>
+            <a:off x="8686800" y="3236976"/>
+            <a:ext cx="3200400" cy="530352"/>
+          </a:xfrm>
+          <a:prstGeom prst="rect">
+            <a:avLst/>
+          </a:prstGeom>
+          <a:solidFill>
+            <a:srgbClr val="221B1F"/>
+          </a:solidFill>
+          <a:ln w="6350">
+            <a:solidFill>
+              <a:srgbClr val="F46E32"/>
+            </a:solidFill>
+          </a:ln>
+        </p:spPr>
+        <p:style>
+          <a:lnRef idx="1">
+            <a:schemeClr val="accent1"/>
+          </a:lnRef>
+          <a:fillRef idx="3">
+            <a:schemeClr val="accent1"/>
+          </a:fillRef>
+          <a:effectRef idx="2">
+            <a:schemeClr val="accent1"/>
+          </a:effectRef>
+          <a:fontRef idx="minor">
+            <a:schemeClr val="lt1"/>
+          </a:fontRef>
+        </p:style>
+        <p:txBody>
+          <a:bodyPr rtlCol="0" anchor="ctr"/>
+          <a:lstStyle/>
+          <a:p>
+            <a:pPr algn="ctr"/>
+            <a:r>
+              <a:rPr sz="1300">
+                <a:solidFill>
+                  <a:srgbClr val="FFFFFF"/>
+                </a:solidFill>
+              </a:rPr>
+              <a:t>Robust across paraphrases and exact terms</a:t>
+            </a:r>
+          </a:p>
+        </p:txBody>
+      </p:sp>
+      <p:sp>
+        <p:nvSpPr>
+          <p:cNvPr id="18" name="Rectangle 17"/>
+          <p:cNvSpPr/>
+          <p:nvPr/>
+        </p:nvSpPr>
+        <p:spPr>
+          <a:xfrm>
+            <a:off x="457200" y="3767328"/>
+            <a:ext cx="4754880" cy="530352"/>
+          </a:xfrm>
+          <a:prstGeom prst="rect">
+            <a:avLst/>
+          </a:prstGeom>
+          <a:solidFill>
+            <a:srgbClr val="2A2125"/>
+          </a:solidFill>
+          <a:ln w="6350">
+            <a:solidFill>
+              <a:srgbClr val="F46E32"/>
+            </a:solidFill>
+          </a:ln>
+        </p:spPr>
+        <p:style>
+          <a:lnRef idx="1">
+            <a:schemeClr val="accent1"/>
+          </a:lnRef>
+          <a:fillRef idx="3">
+            <a:schemeClr val="accent1"/>
+          </a:fillRef>
+          <a:effectRef idx="2">
+            <a:schemeClr val="accent1"/>
+          </a:effectRef>
+          <a:fontRef idx="minor">
+            <a:schemeClr val="lt1"/>
+          </a:fontRef>
+        </p:style>
+        <p:txBody>
+          <a:bodyPr rtlCol="0" anchor="ctr"/>
+          <a:lstStyle/>
+          <a:p>
+            <a:pPr algn="ctr"/>
+            <a:r>
+              <a:rPr sz="1300">
+                <a:solidFill>
+                  <a:srgbClr val="FFFFFF"/>
+                </a:solidFill>
+              </a:rPr>
+              <a:t>Quality matters more than latency</a:t>
+            </a:r>
+          </a:p>
+        </p:txBody>
+      </p:sp>
+      <p:sp>
+        <p:nvSpPr>
+          <p:cNvPr id="19" name="Rectangle 18"/>
+          <p:cNvSpPr/>
+          <p:nvPr/>
+        </p:nvSpPr>
+        <p:spPr>
+          <a:xfrm>
+            <a:off x="5212080" y="3767328"/>
+            <a:ext cx="3474720" cy="530352"/>
+          </a:xfrm>
+          <a:prstGeom prst="rect">
+            <a:avLst/>
+          </a:prstGeom>
+          <a:solidFill>
+            <a:srgbClr val="2A2125"/>
+          </a:solidFill>
+          <a:ln w="6350">
+            <a:solidFill>
+              <a:srgbClr val="F46E32"/>
+            </a:solidFill>
+          </a:ln>
+        </p:spPr>
+        <p:style>
+          <a:lnRef idx="1">
+            <a:schemeClr val="accent1"/>
+          </a:lnRef>
+          <a:fillRef idx="3">
+            <a:schemeClr val="accent1"/>
+          </a:fillRef>
+          <a:effectRef idx="2">
+            <a:schemeClr val="accent1"/>
+          </a:effectRef>
+          <a:fontRef idx="minor">
+            <a:schemeClr val="lt1"/>
+          </a:fontRef>
+        </p:style>
+        <p:txBody>
+          <a:bodyPr rtlCol="0" anchor="ctr"/>
+          <a:lstStyle/>
+          <a:p>
+            <a:pPr algn="ctr"/>
+            <a:r>
+              <a:rPr sz="1300">
+                <a:solidFill>
+                  <a:srgbClr val="FFFFFF"/>
+                </a:solidFill>
+              </a:rPr>
+              <a:t>Hybrid + Cross-Encoder Re-Ranker</a:t>
+            </a:r>
+          </a:p>
+        </p:txBody>
+      </p:sp>
+      <p:sp>
+        <p:nvSpPr>
+          <p:cNvPr id="20" name="Rectangle 19"/>
+          <p:cNvSpPr/>
+          <p:nvPr/>
+        </p:nvSpPr>
+        <p:spPr>
+          <a:xfrm>
+            <a:off x="8686800" y="3767328"/>
+            <a:ext cx="3200400" cy="530352"/>
+          </a:xfrm>
+          <a:prstGeom prst="rect">
+            <a:avLst/>
+          </a:prstGeom>
+          <a:solidFill>
+            <a:srgbClr val="2A2125"/>
+          </a:solidFill>
+          <a:ln w="6350">
+            <a:solidFill>
+              <a:srgbClr val="F46E32"/>
+            </a:solidFill>
+          </a:ln>
+        </p:spPr>
+        <p:style>
+          <a:lnRef idx="1">
+            <a:schemeClr val="accent1"/>
+          </a:lnRef>
+          <a:fillRef idx="3">
+            <a:schemeClr val="accent1"/>
+          </a:fillRef>
+          <a:effectRef idx="2">
+            <a:schemeClr val="accent1"/>
+          </a:effectRef>
+          <a:fontRef idx="minor">
+            <a:schemeClr val="lt1"/>
+          </a:fontRef>
+        </p:style>
+        <p:txBody>
+          <a:bodyPr rtlCol="0" anchor="ctr"/>
+          <a:lstStyle/>
+          <a:p>
+            <a:pPr algn="ctr"/>
+            <a:r>
+              <a:rPr sz="1300">
+                <a:solidFill>
+                  <a:srgbClr val="FFFFFF"/>
+                </a:solidFill>
+              </a:rPr>
+              <a:t>Highest precision per millisecond</a:t>
+            </a:r>
+          </a:p>
+        </p:txBody>
+      </p:sp>
+      <p:sp>
+        <p:nvSpPr>
+          <p:cNvPr id="21" name="Rectangle 20"/>
+          <p:cNvSpPr/>
+          <p:nvPr/>
+        </p:nvSpPr>
+        <p:spPr>
+          <a:xfrm>
+            <a:off x="457200" y="4297680"/>
+            <a:ext cx="4754880" cy="530352"/>
+          </a:xfrm>
+          <a:prstGeom prst="rect">
+            <a:avLst/>
+          </a:prstGeom>
+          <a:solidFill>
+            <a:srgbClr val="221B1F"/>
+          </a:solidFill>
+          <a:ln w="6350">
+            <a:solidFill>
+              <a:srgbClr val="F46E32"/>
+            </a:solidFill>
+          </a:ln>
+        </p:spPr>
+        <p:style>
+          <a:lnRef idx="1">
+            <a:schemeClr val="accent1"/>
+          </a:lnRef>
+          <a:fillRef idx="3">
+            <a:schemeClr val="accent1"/>
+          </a:fillRef>
+          <a:effectRef idx="2">
+            <a:schemeClr val="accent1"/>
+          </a:effectRef>
+          <a:fontRef idx="minor">
+            <a:schemeClr val="lt1"/>
+          </a:fontRef>
+        </p:style>
+        <p:txBody>
+          <a:bodyPr rtlCol="0" anchor="ctr"/>
+          <a:lstStyle/>
+          <a:p>
+            <a:pPr algn="ctr"/>
+            <a:r>
+              <a:rPr sz="1300">
+                <a:solidFill>
+                  <a:srgbClr val="FFFFFF"/>
+                </a:solidFill>
+              </a:rPr>
+              <a:t>Highly structured data (relational records)</a:t>
+            </a:r>
+          </a:p>
+        </p:txBody>
+      </p:sp>
+      <p:sp>
+        <p:nvSpPr>
+          <p:cNvPr id="22" name="Rectangle 21"/>
+          <p:cNvSpPr/>
+          <p:nvPr/>
+        </p:nvSpPr>
+        <p:spPr>
+          <a:xfrm>
+            <a:off x="5212080" y="4297680"/>
+            <a:ext cx="3474720" cy="530352"/>
+          </a:xfrm>
+          <a:prstGeom prst="rect">
+            <a:avLst/>
+          </a:prstGeom>
+          <a:solidFill>
+            <a:srgbClr val="221B1F"/>
+          </a:solidFill>
+          <a:ln w="6350">
+            <a:solidFill>
+              <a:srgbClr val="F46E32"/>
+            </a:solidFill>
+          </a:ln>
+        </p:spPr>
+        <p:style>
+          <a:lnRef idx="1">
+            <a:schemeClr val="accent1"/>
+          </a:lnRef>
+          <a:fillRef idx="3">
+            <a:schemeClr val="accent1"/>
+          </a:fillRef>
+          <a:effectRef idx="2">
+            <a:schemeClr val="accent1"/>
+          </a:effectRef>
+          <a:fontRef idx="minor">
+            <a:schemeClr val="lt1"/>
+          </a:fontRef>
+        </p:style>
+        <p:txBody>
+          <a:bodyPr rtlCol="0" anchor="ctr"/>
+          <a:lstStyle/>
+          <a:p>
+            <a:pPr algn="ctr"/>
+            <a:r>
+              <a:rPr sz="1300">
+                <a:solidFill>
+                  <a:srgbClr val="FFFFFF"/>
+                </a:solidFill>
+              </a:rPr>
+              <a:t>SQL / SPARQL, not RAG</a:t>
+            </a:r>
+          </a:p>
+        </p:txBody>
+      </p:sp>
+      <p:sp>
+        <p:nvSpPr>
+          <p:cNvPr id="23" name="Rectangle 22"/>
+          <p:cNvSpPr/>
+          <p:nvPr/>
+        </p:nvSpPr>
+        <p:spPr>
+          <a:xfrm>
+            <a:off x="8686800" y="4297680"/>
+            <a:ext cx="3200400" cy="530352"/>
+          </a:xfrm>
+          <a:prstGeom prst="rect">
+            <a:avLst/>
+          </a:prstGeom>
+          <a:solidFill>
+            <a:srgbClr val="221B1F"/>
+          </a:solidFill>
+          <a:ln w="6350">
+            <a:solidFill>
+              <a:srgbClr val="F46E32"/>
+            </a:solidFill>
+          </a:ln>
+        </p:spPr>
+        <p:style>
+          <a:lnRef idx="1">
+            <a:schemeClr val="accent1"/>
+          </a:lnRef>
+          <a:fillRef idx="3">
+            <a:schemeClr val="accent1"/>
+          </a:fillRef>
+          <a:effectRef idx="2">
+            <a:schemeClr val="accent1"/>
+          </a:effectRef>
+          <a:fontRef idx="minor">
+            <a:schemeClr val="lt1"/>
+          </a:fontRef>
+        </p:style>
+        <p:txBody>
+          <a:bodyPr rtlCol="0" anchor="ctr"/>
+          <a:lstStyle/>
+          <a:p>
+            <a:pPr algn="ctr"/>
+            <a:r>
+              <a:rPr sz="1300">
+                <a:solidFill>
+                  <a:srgbClr val="FFFFFF"/>
+                </a:solidFill>
+              </a:rPr>
+              <a:t>Structured query beats vector search</a:t>
+            </a:r>
+          </a:p>
+        </p:txBody>
+      </p:sp>
+      <p:sp>
+        <p:nvSpPr>
+          <p:cNvPr id="24" name="Rectangle 23"/>
+          <p:cNvSpPr/>
+          <p:nvPr/>
+        </p:nvSpPr>
+        <p:spPr>
+          <a:xfrm>
+            <a:off x="457200" y="4828032"/>
+            <a:ext cx="4754880" cy="530352"/>
+          </a:xfrm>
+          <a:prstGeom prst="rect">
+            <a:avLst/>
+          </a:prstGeom>
+          <a:solidFill>
+            <a:srgbClr val="2A2125"/>
+          </a:solidFill>
+          <a:ln w="6350">
+            <a:solidFill>
+              <a:srgbClr val="F46E32"/>
+            </a:solidFill>
+          </a:ln>
+        </p:spPr>
+        <p:style>
+          <a:lnRef idx="1">
+            <a:schemeClr val="accent1"/>
+          </a:lnRef>
+          <a:fillRef idx="3">
+            <a:schemeClr val="accent1"/>
+          </a:fillRef>
+          <a:effectRef idx="2">
+            <a:schemeClr val="accent1"/>
+          </a:effectRef>
+          <a:fontRef idx="minor">
+            <a:schemeClr val="lt1"/>
+          </a:fontRef>
+        </p:style>
+        <p:txBody>
+          <a:bodyPr rtlCol="0" anchor="ctr"/>
+          <a:lstStyle/>
+          <a:p>
+            <a:pPr algn="ctr"/>
+            <a:r>
+              <a:rPr sz="1300">
+                <a:solidFill>
+                  <a:srgbClr val="FFFFFF"/>
+                </a:solidFill>
+              </a:rPr>
+              <a:t>Sub-100ms p99 latency budget</a:t>
+            </a:r>
+          </a:p>
+        </p:txBody>
+      </p:sp>
+      <p:sp>
+        <p:nvSpPr>
+          <p:cNvPr id="25" name="Rectangle 24"/>
+          <p:cNvSpPr/>
+          <p:nvPr/>
+        </p:nvSpPr>
+        <p:spPr>
+          <a:xfrm>
+            <a:off x="5212080" y="4828032"/>
+            <a:ext cx="3474720" cy="530352"/>
+          </a:xfrm>
+          <a:prstGeom prst="rect">
+            <a:avLst/>
+          </a:prstGeom>
+          <a:solidFill>
+            <a:srgbClr val="2A2125"/>
+          </a:solidFill>
+          <a:ln w="6350">
+            <a:solidFill>
+              <a:srgbClr val="F46E32"/>
+            </a:solidFill>
+          </a:ln>
+        </p:spPr>
+        <p:style>
+          <a:lnRef idx="1">
+            <a:schemeClr val="accent1"/>
+          </a:lnRef>
+          <a:fillRef idx="3">
+            <a:schemeClr val="accent1"/>
+          </a:fillRef>
+          <a:effectRef idx="2">
+            <a:schemeClr val="accent1"/>
+          </a:effectRef>
+          <a:fontRef idx="minor">
+            <a:schemeClr val="lt1"/>
+          </a:fontRef>
+        </p:style>
+        <p:txBody>
+          <a:bodyPr rtlCol="0" anchor="ctr"/>
+          <a:lstStyle/>
+          <a:p>
+            <a:pPr algn="ctr"/>
+            <a:r>
+              <a:rPr sz="1300">
+                <a:solidFill>
+                  <a:srgbClr val="FFFFFF"/>
+                </a:solidFill>
+              </a:rPr>
+              <a:t>Dense only, no reranker</a:t>
+            </a:r>
+          </a:p>
+        </p:txBody>
+      </p:sp>
+      <p:sp>
+        <p:nvSpPr>
+          <p:cNvPr id="26" name="Rectangle 25"/>
+          <p:cNvSpPr/>
+          <p:nvPr/>
+        </p:nvSpPr>
+        <p:spPr>
+          <a:xfrm>
+            <a:off x="8686800" y="4828032"/>
+            <a:ext cx="3200400" cy="530352"/>
+          </a:xfrm>
+          <a:prstGeom prst="rect">
+            <a:avLst/>
+          </a:prstGeom>
+          <a:solidFill>
+            <a:srgbClr val="2A2125"/>
+          </a:solidFill>
+          <a:ln w="6350">
+            <a:solidFill>
+              <a:srgbClr val="F46E32"/>
+            </a:solidFill>
+          </a:ln>
+        </p:spPr>
+        <p:style>
+          <a:lnRef idx="1">
+            <a:schemeClr val="accent1"/>
+          </a:lnRef>
+          <a:fillRef idx="3">
+            <a:schemeClr val="accent1"/>
+          </a:fillRef>
+          <a:effectRef idx="2">
+            <a:schemeClr val="accent1"/>
+          </a:effectRef>
+          <a:fontRef idx="minor">
+            <a:schemeClr val="lt1"/>
+          </a:fontRef>
+        </p:style>
+        <p:txBody>
+          <a:bodyPr rtlCol="0" anchor="ctr"/>
+          <a:lstStyle/>
+          <a:p>
+            <a:pPr algn="ctr"/>
+            <a:r>
+              <a:rPr sz="1300">
+                <a:solidFill>
+                  <a:srgbClr val="FFFFFF"/>
+                </a:solidFill>
+              </a:rPr>
+              <a:t>Reranker adds 300–800ms</a:t>
+            </a:r>
+          </a:p>
+        </p:txBody>
+      </p:sp>
+      <p:sp>
+        <p:nvSpPr>
+          <p:cNvPr id="27" name="TextBox 26"/>
           <p:cNvSpPr txBox="1"/>
           <p:nvPr/>
         </p:nvSpPr>
@@ -13309,7 +14160,7 @@
           <a:noFill/>
         </p:spPr>
         <p:txBody>
-          <a:bodyPr wrap="square" lIns="45720" rIns="45720">
+          <a:bodyPr wrap="square">
             <a:spAutoFit/>
           </a:bodyPr>
           <a:lstStyle/>
@@ -13322,74 +14173,7 @@
                 </a:solidFill>
                 <a:latin typeface="Calibri"/>
               </a:rPr>
-              <a:t>Cross-encoder reranking is the cheapest big quality win in RAG.</a:t>
-            </a:r>
-          </a:p>
-        </p:txBody>
-      </p:sp>
-      <p:sp>
-        <p:nvSpPr>
-          <p:cNvPr id="8" name="TextBox 7"/>
-          <p:cNvSpPr txBox="1"/>
-          <p:nvPr/>
-        </p:nvSpPr>
-        <p:spPr>
-          <a:xfrm>
-            <a:off x="365760" y="6446520"/>
-            <a:ext cx="11887200" cy="365760"/>
-          </a:xfrm>
-          <a:prstGeom prst="rect">
-            <a:avLst/>
-          </a:prstGeom>
-          <a:noFill/>
-        </p:spPr>
-        <p:txBody>
-          <a:bodyPr wrap="none" lIns="0" rIns="0">
-            <a:spAutoFit/>
-          </a:bodyPr>
-          <a:lstStyle/>
-          <a:p>
-            <a:r>
-              <a:rPr sz="1200">
-                <a:solidFill>
-                  <a:srgbClr val="AAAAAA"/>
-                </a:solidFill>
-              </a:rPr>
-              <a:t>DataHour  •  Hybrid RAG with Re-Ranker  •  Ravindra Babu Katiki</a:t>
-            </a:r>
-          </a:p>
-        </p:txBody>
-      </p:sp>
-      <p:sp>
-        <p:nvSpPr>
-          <p:cNvPr id="9" name="TextBox 8"/>
-          <p:cNvSpPr txBox="1"/>
-          <p:nvPr/>
-        </p:nvSpPr>
-        <p:spPr>
-          <a:xfrm>
-            <a:off x="11338560" y="6446520"/>
-            <a:ext cx="731520" cy="365760"/>
-          </a:xfrm>
-          <a:prstGeom prst="rect">
-            <a:avLst/>
-          </a:prstGeom>
-          <a:noFill/>
-        </p:spPr>
-        <p:txBody>
-          <a:bodyPr wrap="none">
-            <a:spAutoFit/>
-          </a:bodyPr>
-          <a:lstStyle/>
-          <a:p>
-            <a:pPr algn="r"/>
-            <a:r>
-              <a:rPr sz="1000">
-                <a:solidFill>
-                  <a:srgbClr val="AAAAAA"/>
-                </a:solidFill>
-              </a:rPr>
-              <a:t>23</a:t>
+              <a:t>Start with hybrid + reranker. Drop pieces only when latency or simplicity forces it.</a:t>
             </a:r>
           </a:p>
         </p:txBody>
@@ -13493,7 +14277,7 @@
                 </a:solidFill>
                 <a:latin typeface="Calibri"/>
               </a:rPr>
-              <a:t>Why RAG Systems Fail in Production</a:t>
+              <a:t>Re-Ranker Impact — A Real Example</a:t>
             </a:r>
           </a:p>
         </p:txBody>
@@ -13551,7 +14335,42 @@
         <p:spPr>
           <a:xfrm>
             <a:off x="640080" y="1463040"/>
-            <a:ext cx="11247120" cy="4846320"/>
+            <a:ext cx="10972800" cy="457200"/>
+          </a:xfrm>
+          <a:prstGeom prst="rect">
+            <a:avLst/>
+          </a:prstGeom>
+          <a:noFill/>
+        </p:spPr>
+        <p:txBody>
+          <a:bodyPr wrap="square" lIns="45720" rIns="45720">
+            <a:spAutoFit/>
+          </a:bodyPr>
+          <a:lstStyle/>
+          <a:p>
+            <a:pPr algn="l"/>
+            <a:r>
+              <a:rPr sz="1800" b="1">
+                <a:solidFill>
+                  <a:srgbClr val="F46E32"/>
+                </a:solidFill>
+                <a:latin typeface="Calibri"/>
+              </a:rPr>
+              <a:t>Query: "Where is the Burj Khalifa and when was it built?"</a:t>
+            </a:r>
+          </a:p>
+        </p:txBody>
+      </p:sp>
+      <p:sp>
+        <p:nvSpPr>
+          <p:cNvPr id="6" name="TextBox 5"/>
+          <p:cNvSpPr txBox="1"/>
+          <p:nvPr/>
+        </p:nvSpPr>
+        <p:spPr>
+          <a:xfrm>
+            <a:off x="640080" y="2011680"/>
+            <a:ext cx="11247120" cy="4389120"/>
           </a:xfrm>
           <a:prstGeom prst="rect">
             <a:avLst/>
@@ -13576,7 +14395,7 @@
                 </a:solidFill>
                 <a:latin typeface="Calibri"/>
               </a:rPr>
-              <a:t>▸  Bad chunking</a:t>
+              <a:t>▸  Without rerank</a:t>
             </a:r>
             <a:r>
               <a:rPr sz="1800">
@@ -13585,7 +14404,25 @@
                 </a:solidFill>
                 <a:latin typeface="Calibri"/>
               </a:rPr>
-              <a:t> — chunks too big lose precision, too small lose context</a:t>
+              <a:t> — the correct Burj Khalifa article was BM25 rank </a:t>
+            </a:r>
+            <a:r>
+              <a:rPr sz="1800" b="1">
+                <a:solidFill>
+                  <a:srgbClr val="F46E32"/>
+                </a:solidFill>
+                <a:latin typeface="Calibri"/>
+              </a:rPr>
+              <a:t>12</a:t>
+            </a:r>
+            <a:r>
+              <a:rPr sz="1800">
+                <a:solidFill>
+                  <a:srgbClr val="FFFFFF"/>
+                </a:solidFill>
+                <a:latin typeface="Calibri"/>
+              </a:rPr>
+              <a:t> → likely missed top-6 context</a:t>
             </a:r>
           </a:p>
           <a:p>
@@ -13601,7 +14438,7 @@
                 </a:solidFill>
                 <a:latin typeface="Calibri"/>
               </a:rPr>
-              <a:t>▸  Embedding drift</a:t>
+              <a:t>▸  Dense retrieval</a:t>
             </a:r>
             <a:r>
               <a:rPr sz="1800">
@@ -13610,7 +14447,7 @@
                 </a:solidFill>
                 <a:latin typeface="Calibri"/>
               </a:rPr>
-              <a:t> — your domain vocabulary doesn't match the embedding model's training</a:t>
+              <a:t> ranked it #1, but RRF averaged the two and pushed it to RRF rank ~5</a:t>
             </a:r>
           </a:p>
           <a:p>
@@ -13626,7 +14463,7 @@
                 </a:solidFill>
                 <a:latin typeface="Calibri"/>
               </a:rPr>
-              <a:t>▸  Stale indexes</a:t>
+              <a:t>▸  With rerank</a:t>
             </a:r>
             <a:r>
               <a:rPr sz="1800">
@@ -13635,7 +14472,7 @@
                 </a:solidFill>
                 <a:latin typeface="Calibri"/>
               </a:rPr>
-              <a:t> — documents change but the vector store doesn't</a:t>
+              <a:t> — the cross-encoder rescored every (query, chunk) pair jointly</a:t>
             </a:r>
           </a:p>
           <a:p>
@@ -13651,7 +14488,7 @@
                 </a:solidFill>
                 <a:latin typeface="Calibri"/>
               </a:rPr>
-              <a:t>▸  Single-retriever blind spots</a:t>
+              <a:t>▸  </a:t>
             </a:r>
             <a:r>
               <a:rPr sz="1800">
@@ -13660,7 +14497,34 @@
                 </a:solidFill>
                 <a:latin typeface="Calibri"/>
               </a:rPr>
-              <a:t> — dense misses exact terms; sparse misses paraphrases</a:t>
+              <a:t>It promoted Burj Khalifa to </a:t>
+            </a:r>
+            <a:r>
+              <a:rPr sz="1800" b="1">
+                <a:solidFill>
+                  <a:srgbClr val="F46E32"/>
+                </a:solidFill>
+                <a:latin typeface="Calibri"/>
+              </a:rPr>
+              <a:t>position 1</a:t>
+            </a:r>
+            <a:r>
+              <a:rPr sz="1800">
+                <a:solidFill>
+                  <a:srgbClr val="FFFFFF"/>
+                </a:solidFill>
+                <a:latin typeface="Calibri"/>
+              </a:rPr>
+              <a:t> with a rerank score of </a:t>
+            </a:r>
+            <a:r>
+              <a:rPr sz="1800" b="1">
+                <a:solidFill>
+                  <a:srgbClr val="F46E32"/>
+                </a:solidFill>
+                <a:latin typeface="Calibri"/>
+              </a:rPr>
+              <a:t>3.41</a:t>
             </a:r>
           </a:p>
           <a:p>
@@ -13676,7 +14540,7 @@
                 </a:solidFill>
                 <a:latin typeface="Calibri"/>
               </a:rPr>
-              <a:t>▸  Retrieval shows the right doc but the wrong chunk</a:t>
+              <a:t>▸  Source 2</a:t>
             </a:r>
             <a:r>
               <a:rPr sz="1800">
@@ -13685,7 +14549,7 @@
                 </a:solidFill>
                 <a:latin typeface="Calibri"/>
               </a:rPr>
-              <a:t> of it — segmentation matters</a:t>
+              <a:t> (Burj Al Arab) was a noisy near-match — reranker kept it but ranked it second</a:t>
             </a:r>
           </a:p>
           <a:p>
@@ -13701,7 +14565,7 @@
                 </a:solidFill>
                 <a:latin typeface="Calibri"/>
               </a:rPr>
-              <a:t>▸  Token budget overflow</a:t>
+              <a:t>▸  Latency cost</a:t>
             </a:r>
             <a:r>
               <a:rPr sz="1800">
@@ -13710,7 +14574,25 @@
                 </a:solidFill>
                 <a:latin typeface="Calibri"/>
               </a:rPr>
-              <a:t> — too many context chunks crowd out the question</a:t>
+              <a:t> — about </a:t>
+            </a:r>
+            <a:r>
+              <a:rPr sz="1800" b="1">
+                <a:solidFill>
+                  <a:srgbClr val="F46E32"/>
+                </a:solidFill>
+                <a:latin typeface="Calibri"/>
+              </a:rPr>
+              <a:t>300–800 ms</a:t>
+            </a:r>
+            <a:r>
+              <a:rPr sz="1800">
+                <a:solidFill>
+                  <a:srgbClr val="FFFFFF"/>
+                </a:solidFill>
+                <a:latin typeface="Calibri"/>
+              </a:rPr>
+              <a:t> per query on CPU after model warm-up</a:t>
             </a:r>
           </a:p>
           <a:p>
@@ -13726,7 +14608,7 @@
                 </a:solidFill>
                 <a:latin typeface="Calibri"/>
               </a:rPr>
-              <a:t>▸  Hallucinations from sparse context</a:t>
+              <a:t>▸  Result:</a:t>
             </a:r>
             <a:r>
               <a:rPr sz="1800">
@@ -13735,64 +14617,14 @@
                 </a:solidFill>
                 <a:latin typeface="Calibri"/>
               </a:rPr>
-              <a:t> — the LLM fills gaps confidently</a:t>
-            </a:r>
-          </a:p>
-          <a:p>
-            <a:pPr algn="l">
-              <a:spcAft>
-                <a:spcPts val="700"/>
-              </a:spcAft>
-            </a:pPr>
-            <a:r>
-              <a:rPr sz="1800" b="1">
-                <a:solidFill>
-                  <a:srgbClr val="F46E32"/>
-                </a:solidFill>
-                <a:latin typeface="Calibri"/>
-              </a:rPr>
-              <a:t>▸  No observability</a:t>
-            </a:r>
-            <a:r>
-              <a:rPr sz="1800">
-                <a:solidFill>
-                  <a:srgbClr val="FFFFFF"/>
-                </a:solidFill>
-                <a:latin typeface="Calibri"/>
-              </a:rPr>
-              <a:t> — you can't fix what you can't see</a:t>
-            </a:r>
-          </a:p>
-          <a:p>
-            <a:pPr algn="l">
-              <a:spcAft>
-                <a:spcPts val="700"/>
-              </a:spcAft>
-            </a:pPr>
-            <a:r>
-              <a:rPr sz="1800" b="1">
-                <a:solidFill>
-                  <a:srgbClr val="F46E32"/>
-                </a:solidFill>
-                <a:latin typeface="Calibri"/>
-              </a:rPr>
-              <a:t>▸  No evaluation harness</a:t>
-            </a:r>
-            <a:r>
-              <a:rPr sz="1800">
-                <a:solidFill>
-                  <a:srgbClr val="FFFFFF"/>
-                </a:solidFill>
-                <a:latin typeface="Calibri"/>
-              </a:rPr>
-              <a:t> — every change is a gamble</a:t>
-            </a:r>
-          </a:p>
-        </p:txBody>
-      </p:sp>
-      <p:sp>
-        <p:nvSpPr>
-          <p:cNvPr id="6" name="TextBox 5"/>
+              <a:t> the LLM got the right context and produced a grounded answer with citations</a:t>
+            </a:r>
+          </a:p>
+        </p:txBody>
+      </p:sp>
+      <p:sp>
+        <p:nvSpPr>
+          <p:cNvPr id="7" name="TextBox 6"/>
           <p:cNvSpPr txBox="1"/>
           <p:nvPr/>
         </p:nvSpPr>
@@ -13820,14 +14652,14 @@
                 </a:solidFill>
                 <a:latin typeface="Calibri"/>
               </a:rPr>
-              <a:t>RAG is easy to demo, hard to operate. Plan for both.</a:t>
-            </a:r>
-          </a:p>
-        </p:txBody>
-      </p:sp>
-      <p:sp>
-        <p:nvSpPr>
-          <p:cNvPr id="7" name="TextBox 6"/>
+              <a:t>Cross-encoder reranking is the cheapest big quality win in RAG.</a:t>
+            </a:r>
+          </a:p>
+        </p:txBody>
+      </p:sp>
+      <p:sp>
+        <p:nvSpPr>
+          <p:cNvPr id="8" name="TextBox 7"/>
           <p:cNvSpPr txBox="1"/>
           <p:nvPr/>
         </p:nvSpPr>
@@ -13860,7 +14692,7 @@
       </p:sp>
       <p:sp>
         <p:nvSpPr>
-          <p:cNvPr id="8" name="TextBox 7"/>
+          <p:cNvPr id="9" name="TextBox 8"/>
           <p:cNvSpPr txBox="1"/>
           <p:nvPr/>
         </p:nvSpPr>
@@ -13887,7 +14719,7 @@
                   <a:srgbClr val="AAAAAA"/>
                 </a:solidFill>
               </a:rPr>
-              <a:t>25</a:t>
+              <a:t>23</a:t>
             </a:r>
           </a:p>
         </p:txBody>
@@ -13926,7 +14758,7 @@
         <p:spPr>
           <a:xfrm>
             <a:off x="0" y="0"/>
-            <a:ext cx="12191695" cy="6858000"/>
+            <a:ext cx="12192000" cy="6858000"/>
           </a:xfrm>
           <a:prstGeom prst="rect">
             <a:avLst/>
@@ -13978,7 +14810,7 @@
           <a:noFill/>
         </p:spPr>
         <p:txBody>
-          <a:bodyPr wrap="square" lIns="45720" rIns="45720">
+          <a:bodyPr wrap="square">
             <a:spAutoFit/>
           </a:bodyPr>
           <a:lstStyle/>
@@ -13991,7 +14823,7 @@
                 </a:solidFill>
                 <a:latin typeface="Calibri"/>
               </a:rPr>
-              <a:t>Productionizing Hybrid RAG</a:t>
+              <a:t>A Real-World Lesson — When Dense Alone Fails</a:t>
             </a:r>
           </a:p>
         </p:txBody>
@@ -14042,14 +14874,130 @@
       </p:sp>
       <p:sp>
         <p:nvSpPr>
-          <p:cNvPr id="5" name="TextBox 4"/>
+          <p:cNvPr id="5" name="Rounded Rectangle 4"/>
+          <p:cNvSpPr/>
+          <p:nvPr/>
+        </p:nvSpPr>
+        <p:spPr>
+          <a:xfrm>
+            <a:off x="640080" y="1280160"/>
+            <a:ext cx="10972800" cy="1234440"/>
+          </a:xfrm>
+          <a:prstGeom prst="roundRect">
+            <a:avLst/>
+          </a:prstGeom>
+          <a:solidFill>
+            <a:srgbClr val="221B1F"/>
+          </a:solidFill>
+          <a:ln w="15875">
+            <a:solidFill>
+              <a:srgbClr val="F46E32"/>
+            </a:solidFill>
+          </a:ln>
+        </p:spPr>
+        <p:style>
+          <a:lnRef idx="1">
+            <a:schemeClr val="accent1"/>
+          </a:lnRef>
+          <a:fillRef idx="3">
+            <a:schemeClr val="accent1"/>
+          </a:fillRef>
+          <a:effectRef idx="2">
+            <a:schemeClr val="accent1"/>
+          </a:effectRef>
+          <a:fontRef idx="minor">
+            <a:schemeClr val="lt1"/>
+          </a:fontRef>
+        </p:style>
+        <p:txBody>
+          <a:bodyPr wrap="square" lIns="182880" rIns="182880" rtlCol="0" anchor="ctr"/>
+          <a:lstStyle/>
+          <a:p>
+            <a:pPr algn="ctr"/>
+            <a:r>
+              <a:rPr sz="1600" b="1">
+                <a:solidFill>
+                  <a:srgbClr val="F46E32"/>
+                </a:solidFill>
+                <a:latin typeface="Calibri"/>
+              </a:rPr>
+              <a:t>Scenario: </a:t>
+            </a:r>
+            <a:r>
+              <a:rPr sz="1600">
+                <a:solidFill>
+                  <a:srgbClr val="FFFFFF"/>
+                </a:solidFill>
+                <a:latin typeface="Calibri"/>
+              </a:rPr>
+              <a:t>A customer-support team ships a dense-only RAG over their product docs. Three weeks in, users search </a:t>
+            </a:r>
+            <a:r>
+              <a:rPr sz="1600" b="1">
+                <a:solidFill>
+                  <a:srgbClr val="2E8BC4"/>
+                </a:solidFill>
+                <a:latin typeface="Consolas"/>
+              </a:rPr>
+              <a:t>"ORA-04031 fix"</a:t>
+            </a:r>
+            <a:r>
+              <a:rPr sz="1600">
+                <a:solidFill>
+                  <a:srgbClr val="FFFFFF"/>
+                </a:solidFill>
+                <a:latin typeface="Calibri"/>
+              </a:rPr>
+              <a:t> and get an article about Oracle licensing instead of the one that actually debugs the error. Ticket volume climbs; trust tanks.</a:t>
+            </a:r>
+          </a:p>
+        </p:txBody>
+      </p:sp>
+      <p:sp>
+        <p:nvSpPr>
+          <p:cNvPr id="6" name="TextBox 5"/>
           <p:cNvSpPr txBox="1"/>
           <p:nvPr/>
         </p:nvSpPr>
         <p:spPr>
           <a:xfrm>
-            <a:off x="640080" y="1463040"/>
-            <a:ext cx="11247120" cy="4846320"/>
+            <a:off x="640080" y="2743200"/>
+            <a:ext cx="10972800" cy="457200"/>
+          </a:xfrm>
+          <a:prstGeom prst="rect">
+            <a:avLst/>
+          </a:prstGeom>
+          <a:noFill/>
+        </p:spPr>
+        <p:txBody>
+          <a:bodyPr wrap="square">
+            <a:spAutoFit/>
+          </a:bodyPr>
+          <a:lstStyle/>
+          <a:p>
+            <a:pPr algn="l"/>
+            <a:r>
+              <a:rPr sz="1800" b="1">
+                <a:solidFill>
+                  <a:srgbClr val="F46E32"/>
+                </a:solidFill>
+                <a:latin typeface="Calibri"/>
+              </a:rPr>
+              <a:t>What went wrong</a:t>
+            </a:r>
+          </a:p>
+        </p:txBody>
+      </p:sp>
+      <p:sp>
+        <p:nvSpPr>
+          <p:cNvPr id="7" name="TextBox 6"/>
+          <p:cNvSpPr txBox="1"/>
+          <p:nvPr/>
+        </p:nvSpPr>
+        <p:spPr>
+          <a:xfrm>
+            <a:off x="640080" y="3200400"/>
+            <a:ext cx="11247120" cy="2011680"/>
           </a:xfrm>
           <a:prstGeom prst="rect">
             <a:avLst/>
@@ -14068,22 +15016,22 @@
               </a:spcAft>
             </a:pPr>
             <a:r>
-              <a:rPr sz="1800" b="1">
-                <a:solidFill>
-                  <a:srgbClr val="F46E32"/>
-                </a:solidFill>
-                <a:latin typeface="Calibri"/>
-              </a:rPr>
-              <a:t>▸  Hybrid retrieval as the default</a:t>
-            </a:r>
-            <a:r>
-              <a:rPr sz="1800">
-                <a:solidFill>
-                  <a:srgbClr val="FFFFFF"/>
-                </a:solidFill>
-                <a:latin typeface="Calibri"/>
-              </a:rPr>
-              <a:t> — dense + sparse, fused with RRF</a:t>
+              <a:rPr sz="1600" b="1">
+                <a:solidFill>
+                  <a:srgbClr val="F46E32"/>
+                </a:solidFill>
+                <a:latin typeface="Calibri"/>
+              </a:rPr>
+              <a:t>▸  Embeddings smooth over exact tokens.</a:t>
+            </a:r>
+            <a:r>
+              <a:rPr sz="1600">
+                <a:solidFill>
+                  <a:srgbClr val="FFFFFF"/>
+                </a:solidFill>
+                <a:latin typeface="Calibri"/>
+              </a:rPr>
+              <a:t> "ORA-04031" is rare; the model finds docs with similar prose, not the exact code.</a:t>
             </a:r>
           </a:p>
           <a:p>
@@ -14093,22 +15041,22 @@
               </a:spcAft>
             </a:pPr>
             <a:r>
-              <a:rPr sz="1800" b="1">
-                <a:solidFill>
-                  <a:srgbClr val="F46E32"/>
-                </a:solidFill>
-                <a:latin typeface="Calibri"/>
-              </a:rPr>
-              <a:t>▸  Cross-encoder reranking</a:t>
-            </a:r>
-            <a:r>
-              <a:rPr sz="1800">
-                <a:solidFill>
-                  <a:srgbClr val="FFFFFF"/>
-                </a:solidFill>
-                <a:latin typeface="Calibri"/>
-              </a:rPr>
-              <a:t> on a small candidate pool — best precision per millisecond</a:t>
+              <a:rPr sz="1600" b="1">
+                <a:solidFill>
+                  <a:srgbClr val="F46E32"/>
+                </a:solidFill>
+                <a:latin typeface="Calibri"/>
+              </a:rPr>
+              <a:t>▸  Recall ceiling hit.</a:t>
+            </a:r>
+            <a:r>
+              <a:rPr sz="1600">
+                <a:solidFill>
+                  <a:srgbClr val="FFFFFF"/>
+                </a:solidFill>
+                <a:latin typeface="Calibri"/>
+              </a:rPr>
+              <a:t> The right doc wasn't in the top-50 at all — no amount of prompt tuning could save the generator.</a:t>
             </a:r>
           </a:p>
           <a:p>
@@ -14118,24 +15066,82 @@
               </a:spcAft>
             </a:pPr>
             <a:r>
+              <a:rPr sz="1600" b="1">
+                <a:solidFill>
+                  <a:srgbClr val="F46E32"/>
+                </a:solidFill>
+                <a:latin typeface="Calibri"/>
+              </a:rPr>
+              <a:t>▸  The generator looked confident.</a:t>
+            </a:r>
+            <a:r>
+              <a:rPr sz="1600">
+                <a:solidFill>
+                  <a:srgbClr val="FFFFFF"/>
+                </a:solidFill>
+                <a:latin typeface="Calibri"/>
+              </a:rPr>
+              <a:t> The LLM answered from the wrong doc rather than saying "I don't know".</a:t>
+            </a:r>
+          </a:p>
+        </p:txBody>
+      </p:sp>
+      <p:sp>
+        <p:nvSpPr>
+          <p:cNvPr id="8" name="TextBox 7"/>
+          <p:cNvSpPr txBox="1"/>
+          <p:nvPr/>
+        </p:nvSpPr>
+        <p:spPr>
+          <a:xfrm>
+            <a:off x="640080" y="5120640"/>
+            <a:ext cx="10972800" cy="457200"/>
+          </a:xfrm>
+          <a:prstGeom prst="rect">
+            <a:avLst/>
+          </a:prstGeom>
+          <a:noFill/>
+        </p:spPr>
+        <p:txBody>
+          <a:bodyPr wrap="square">
+            <a:spAutoFit/>
+          </a:bodyPr>
+          <a:lstStyle/>
+          <a:p>
+            <a:pPr algn="l"/>
+            <a:r>
               <a:rPr sz="1800" b="1">
                 <a:solidFill>
                   <a:srgbClr val="F46E32"/>
                 </a:solidFill>
                 <a:latin typeface="Calibri"/>
               </a:rPr>
-              <a:t>▸  Chunking strategy</a:t>
-            </a:r>
-            <a:r>
-              <a:rPr sz="1800">
-                <a:solidFill>
-                  <a:srgbClr val="FFFFFF"/>
-                </a:solidFill>
-                <a:latin typeface="Calibri"/>
-              </a:rPr>
-              <a:t> tuned per corpus — try 200–400 tokens with 50-token overlap as a starting point</a:t>
-            </a:r>
-          </a:p>
+              <a:t>What fixed it (one afternoon of work)</a:t>
+            </a:r>
+          </a:p>
+        </p:txBody>
+      </p:sp>
+      <p:sp>
+        <p:nvSpPr>
+          <p:cNvPr id="9" name="TextBox 8"/>
+          <p:cNvSpPr txBox="1"/>
+          <p:nvPr/>
+        </p:nvSpPr>
+        <p:spPr>
+          <a:xfrm>
+            <a:off x="640080" y="5577840"/>
+            <a:ext cx="11247120" cy="731520"/>
+          </a:xfrm>
+          <a:prstGeom prst="rect">
+            <a:avLst/>
+          </a:prstGeom>
+          <a:noFill/>
+        </p:spPr>
+        <p:txBody>
+          <a:bodyPr wrap="square">
+            <a:spAutoFit/>
+          </a:bodyPr>
+          <a:lstStyle/>
           <a:p>
             <a:pPr algn="l">
               <a:spcAft>
@@ -14143,224 +15149,76 @@
               </a:spcAft>
             </a:pPr>
             <a:r>
-              <a:rPr sz="1800" b="1">
-                <a:solidFill>
-                  <a:srgbClr val="F46E32"/>
-                </a:solidFill>
-                <a:latin typeface="Calibri"/>
-              </a:rPr>
-              <a:t>▸  Reindex on a schedule</a:t>
-            </a:r>
-            <a:r>
-              <a:rPr sz="1800">
-                <a:solidFill>
-                  <a:srgbClr val="FFFFFF"/>
-                </a:solidFill>
-                <a:latin typeface="Calibri"/>
-              </a:rPr>
-              <a:t> — embedding-model upgrades and content updates are routine, not exceptional</a:t>
-            </a:r>
-          </a:p>
-          <a:p>
-            <a:pPr algn="l">
-              <a:spcAft>
-                <a:spcPts val="700"/>
-              </a:spcAft>
-            </a:pPr>
-            <a:r>
-              <a:rPr sz="1800" b="1">
-                <a:solidFill>
-                  <a:srgbClr val="F46E32"/>
-                </a:solidFill>
-                <a:latin typeface="Calibri"/>
-              </a:rPr>
-              <a:t>▸  Caching</a:t>
-            </a:r>
-            <a:r>
-              <a:rPr sz="1800">
-                <a:solidFill>
-                  <a:srgbClr val="FFFFFF"/>
-                </a:solidFill>
-                <a:latin typeface="Calibri"/>
-              </a:rPr>
-              <a:t> — embed-once, cache reranker scores for common queries</a:t>
-            </a:r>
-          </a:p>
-          <a:p>
-            <a:pPr algn="l">
-              <a:spcAft>
-                <a:spcPts val="700"/>
-              </a:spcAft>
-            </a:pPr>
-            <a:r>
-              <a:rPr sz="1800" b="1">
-                <a:solidFill>
-                  <a:srgbClr val="F46E32"/>
-                </a:solidFill>
-                <a:latin typeface="Calibri"/>
-              </a:rPr>
-              <a:t>▸  Fallbacks</a:t>
-            </a:r>
-            <a:r>
-              <a:rPr sz="1800">
-                <a:solidFill>
-                  <a:srgbClr val="FFFFFF"/>
-                </a:solidFill>
-                <a:latin typeface="Calibri"/>
-              </a:rPr>
-              <a:t> — when retrieval confidence is low, return "I don't know" instead of guessing</a:t>
-            </a:r>
-          </a:p>
-          <a:p>
-            <a:pPr algn="l">
-              <a:spcAft>
-                <a:spcPts val="700"/>
-              </a:spcAft>
-            </a:pPr>
-            <a:r>
-              <a:rPr sz="1800" b="1">
-                <a:solidFill>
-                  <a:srgbClr val="F46E32"/>
-                </a:solidFill>
-                <a:latin typeface="Calibri"/>
-              </a:rPr>
-              <a:t>▸  Cite everything</a:t>
-            </a:r>
-            <a:r>
-              <a:rPr sz="1800">
-                <a:solidFill>
-                  <a:srgbClr val="FFFFFF"/>
-                </a:solidFill>
-                <a:latin typeface="Calibri"/>
-              </a:rPr>
-              <a:t> — every claim should map to a chunk the user can click</a:t>
-            </a:r>
-          </a:p>
-          <a:p>
-            <a:pPr algn="l">
-              <a:spcAft>
-                <a:spcPts val="700"/>
-              </a:spcAft>
-            </a:pPr>
-            <a:r>
-              <a:rPr sz="1800" b="1">
-                <a:solidFill>
-                  <a:srgbClr val="F46E32"/>
-                </a:solidFill>
-                <a:latin typeface="Calibri"/>
-              </a:rPr>
-              <a:t>▸  Evaluation harness in CI</a:t>
-            </a:r>
-            <a:r>
-              <a:rPr sz="1800">
-                <a:solidFill>
-                  <a:srgbClr val="FFFFFF"/>
-                </a:solidFill>
-                <a:latin typeface="Calibri"/>
-              </a:rPr>
-              <a:t> — run MRR / CUS / ACS on every change before merging</a:t>
-            </a:r>
-          </a:p>
-        </p:txBody>
-      </p:sp>
-      <p:sp>
-        <p:nvSpPr>
-          <p:cNvPr id="6" name="TextBox 5"/>
-          <p:cNvSpPr txBox="1"/>
-          <p:nvPr/>
-        </p:nvSpPr>
-        <p:spPr>
-          <a:xfrm>
-            <a:off x="640080" y="5852160"/>
-            <a:ext cx="10972800" cy="457200"/>
-          </a:xfrm>
-          <a:prstGeom prst="rect">
-            <a:avLst/>
-          </a:prstGeom>
-          <a:noFill/>
-        </p:spPr>
-        <p:txBody>
-          <a:bodyPr wrap="square" lIns="45720" rIns="45720">
-            <a:spAutoFit/>
-          </a:bodyPr>
-          <a:lstStyle/>
-          <a:p>
-            <a:pPr algn="ctr"/>
-            <a:r>
               <a:rPr sz="1500" b="1">
                 <a:solidFill>
                   <a:srgbClr val="F46E32"/>
                 </a:solidFill>
                 <a:latin typeface="Calibri"/>
               </a:rPr>
-              <a:t>Reliability is a feature, not a phase.</a:t>
-            </a:r>
-          </a:p>
-        </p:txBody>
-      </p:sp>
-      <p:sp>
-        <p:nvSpPr>
-          <p:cNvPr id="7" name="TextBox 6"/>
-          <p:cNvSpPr txBox="1"/>
-          <p:nvPr/>
-        </p:nvSpPr>
-        <p:spPr>
-          <a:xfrm>
-            <a:off x="365760" y="6446520"/>
-            <a:ext cx="11887200" cy="365760"/>
-          </a:xfrm>
-          <a:prstGeom prst="rect">
-            <a:avLst/>
-          </a:prstGeom>
-          <a:noFill/>
-        </p:spPr>
-        <p:txBody>
-          <a:bodyPr wrap="none" lIns="0" rIns="0">
-            <a:spAutoFit/>
-          </a:bodyPr>
-          <a:lstStyle/>
-          <a:p>
-            <a:r>
-              <a:rPr sz="1200">
-                <a:solidFill>
-                  <a:srgbClr val="AAAAAA"/>
-                </a:solidFill>
-              </a:rPr>
-              <a:t>DataHour  •  Hybrid RAG with Re-Ranker  •  Ravindra Babu Katiki</a:t>
-            </a:r>
-          </a:p>
-        </p:txBody>
-      </p:sp>
-      <p:sp>
-        <p:nvSpPr>
-          <p:cNvPr id="8" name="TextBox 7"/>
-          <p:cNvSpPr txBox="1"/>
-          <p:nvPr/>
-        </p:nvSpPr>
-        <p:spPr>
-          <a:xfrm>
-            <a:off x="11338560" y="6446520"/>
-            <a:ext cx="731520" cy="365760"/>
-          </a:xfrm>
-          <a:prstGeom prst="rect">
-            <a:avLst/>
-          </a:prstGeom>
-          <a:noFill/>
-        </p:spPr>
-        <p:txBody>
-          <a:bodyPr wrap="none">
-            <a:spAutoFit/>
-          </a:bodyPr>
-          <a:lstStyle/>
-          <a:p>
-            <a:pPr algn="r"/>
-            <a:r>
-              <a:rPr sz="1000">
-                <a:solidFill>
-                  <a:srgbClr val="AAAAAA"/>
-                </a:solidFill>
-              </a:rPr>
-              <a:t>26</a:t>
+              <a:t>▸  </a:t>
+            </a:r>
+            <a:r>
+              <a:rPr sz="1500">
+                <a:solidFill>
+                  <a:srgbClr val="FFFFFF"/>
+                </a:solidFill>
+                <a:latin typeface="Calibri"/>
+              </a:rPr>
+              <a:t>Added </a:t>
+            </a:r>
+            <a:r>
+              <a:rPr sz="1500" b="1">
+                <a:solidFill>
+                  <a:srgbClr val="F46E32"/>
+                </a:solidFill>
+                <a:latin typeface="Calibri"/>
+              </a:rPr>
+              <a:t>BM25</a:t>
+            </a:r>
+            <a:r>
+              <a:rPr sz="1500">
+                <a:solidFill>
+                  <a:srgbClr val="FFFFFF"/>
+                </a:solidFill>
+                <a:latin typeface="Calibri"/>
+              </a:rPr>
+              <a:t> alongside dense; fused with </a:t>
+            </a:r>
+            <a:r>
+              <a:rPr sz="1500" b="1">
+                <a:solidFill>
+                  <a:srgbClr val="F46E32"/>
+                </a:solidFill>
+                <a:latin typeface="Calibri"/>
+              </a:rPr>
+              <a:t>RRF</a:t>
+            </a:r>
+            <a:r>
+              <a:rPr sz="1500">
+                <a:solidFill>
+                  <a:srgbClr val="FFFFFF"/>
+                </a:solidFill>
+                <a:latin typeface="Calibri"/>
+              </a:rPr>
+              <a:t> — exact-code match jumped to rank 1. Added a </a:t>
+            </a:r>
+            <a:r>
+              <a:rPr sz="1500" b="1">
+                <a:solidFill>
+                  <a:srgbClr val="F46E32"/>
+                </a:solidFill>
+                <a:latin typeface="Calibri"/>
+              </a:rPr>
+              <a:t>cross-encoder reranker</a:t>
+            </a:r>
+            <a:r>
+              <a:rPr sz="1500">
+                <a:solidFill>
+                  <a:srgbClr val="FFFFFF"/>
+                </a:solidFill>
+                <a:latin typeface="Calibri"/>
+              </a:rPr>
+              <a:t> to keep noisy matches out of the prompt. Ticket deflection went back above baseline.</a:t>
             </a:r>
           </a:p>
         </p:txBody>
@@ -14464,7 +15322,7 @@
                 </a:solidFill>
                 <a:latin typeface="Calibri"/>
               </a:rPr>
-              <a:t>Observability for RAG</a:t>
+              <a:t>Why RAG Systems Fail in Production</a:t>
             </a:r>
           </a:p>
         </p:txBody>
@@ -14547,7 +15405,7 @@
                 </a:solidFill>
                 <a:latin typeface="Calibri"/>
               </a:rPr>
-              <a:t>▸  Log every stage</a:t>
+              <a:t>▸  Bad chunking</a:t>
             </a:r>
             <a:r>
               <a:rPr sz="1800">
@@ -14556,7 +15414,7 @@
                 </a:solidFill>
                 <a:latin typeface="Calibri"/>
               </a:rPr>
-              <a:t> — query, dense IDs, sparse IDs, fused order, rerank order, final context</a:t>
+              <a:t> — chunks too big lose precision, too small lose context</a:t>
             </a:r>
           </a:p>
           <a:p>
@@ -14572,7 +15430,7 @@
                 </a:solidFill>
                 <a:latin typeface="Calibri"/>
               </a:rPr>
-              <a:t>▸  Per-query latency breakdown</a:t>
+              <a:t>▸  Embedding drift</a:t>
             </a:r>
             <a:r>
               <a:rPr sz="1800">
@@ -14581,7 +15439,7 @@
                 </a:solidFill>
                 <a:latin typeface="Calibri"/>
               </a:rPr>
-              <a:t> — retrieve, rerank, generate, total</a:t>
+              <a:t> — your domain vocabulary doesn't match the embedding model's training</a:t>
             </a:r>
           </a:p>
           <a:p>
@@ -14597,7 +15455,7 @@
                 </a:solidFill>
                 <a:latin typeface="Calibri"/>
               </a:rPr>
-              <a:t>▸  Per-chunk attribution</a:t>
+              <a:t>▸  Stale indexes</a:t>
             </a:r>
             <a:r>
               <a:rPr sz="1800">
@@ -14606,7 +15464,7 @@
                 </a:solidFill>
                 <a:latin typeface="Calibri"/>
               </a:rPr>
-              <a:t> — which chunks supported which sentences in the answer</a:t>
+              <a:t> — documents change but the vector store doesn't</a:t>
             </a:r>
           </a:p>
           <a:p>
@@ -14622,7 +15480,7 @@
                 </a:solidFill>
                 <a:latin typeface="Calibri"/>
               </a:rPr>
-              <a:t>▸  User feedback loop</a:t>
+              <a:t>▸  Single-retriever blind spots</a:t>
             </a:r>
             <a:r>
               <a:rPr sz="1800">
@@ -14631,7 +15489,7 @@
                 </a:solidFill>
                 <a:latin typeface="Calibri"/>
               </a:rPr>
-              <a:t> — thumbs up/down feeds back into eval set and retrieval tuning</a:t>
+              <a:t> — dense misses exact terms; sparse misses paraphrases</a:t>
             </a:r>
           </a:p>
           <a:p>
@@ -14647,7 +15505,7 @@
                 </a:solidFill>
                 <a:latin typeface="Calibri"/>
               </a:rPr>
-              <a:t>▸  Drift monitoring</a:t>
+              <a:t>▸  Retrieval shows the right doc but the wrong chunk</a:t>
             </a:r>
             <a:r>
               <a:rPr sz="1800">
@@ -14656,7 +15514,7 @@
                 </a:solidFill>
                 <a:latin typeface="Calibri"/>
               </a:rPr>
-              <a:t> — track CUS / ACS over time, alert when they sag</a:t>
+              <a:t> of it — segmentation matters</a:t>
             </a:r>
           </a:p>
           <a:p>
@@ -14672,7 +15530,7 @@
                 </a:solidFill>
                 <a:latin typeface="Calibri"/>
               </a:rPr>
-              <a:t>▸  Replay debugging</a:t>
+              <a:t>▸  Token budget overflow</a:t>
             </a:r>
             <a:r>
               <a:rPr sz="1800">
@@ -14681,7 +15539,7 @@
                 </a:solidFill>
                 <a:latin typeface="Calibri"/>
               </a:rPr>
-              <a:t> — given a bad answer, replay the exact retrieval and prompt</a:t>
+              <a:t> — too many context chunks crowd out the question</a:t>
             </a:r>
           </a:p>
           <a:p>
@@ -14697,7 +15555,7 @@
                 </a:solidFill>
                 <a:latin typeface="Calibri"/>
               </a:rPr>
-              <a:t>▸  Cost tracking</a:t>
+              <a:t>▸  Hallucinations from sparse context</a:t>
             </a:r>
             <a:r>
               <a:rPr sz="1800">
@@ -14706,7 +15564,7 @@
                 </a:solidFill>
                 <a:latin typeface="Calibri"/>
               </a:rPr>
-              <a:t> — tokens per query, reranker calls, embeddings per day</a:t>
+              <a:t> — the LLM fills gaps confidently</a:t>
             </a:r>
           </a:p>
           <a:p>
@@ -14722,7 +15580,7 @@
                 </a:solidFill>
                 <a:latin typeface="Calibri"/>
               </a:rPr>
-              <a:t>▸  Eval-on-CI</a:t>
+              <a:t>▸  No observability</a:t>
             </a:r>
             <a:r>
               <a:rPr sz="1800">
@@ -14731,7 +15589,32 @@
                 </a:solidFill>
                 <a:latin typeface="Calibri"/>
               </a:rPr>
-              <a:t> — block regressions before they ship</a:t>
+              <a:t> — you can't fix what you can't see</a:t>
+            </a:r>
+          </a:p>
+          <a:p>
+            <a:pPr algn="l">
+              <a:spcAft>
+                <a:spcPts val="700"/>
+              </a:spcAft>
+            </a:pPr>
+            <a:r>
+              <a:rPr sz="1800" b="1">
+                <a:solidFill>
+                  <a:srgbClr val="F46E32"/>
+                </a:solidFill>
+                <a:latin typeface="Calibri"/>
+              </a:rPr>
+              <a:t>▸  No evaluation harness</a:t>
+            </a:r>
+            <a:r>
+              <a:rPr sz="1800">
+                <a:solidFill>
+                  <a:srgbClr val="FFFFFF"/>
+                </a:solidFill>
+                <a:latin typeface="Calibri"/>
+              </a:rPr>
+              <a:t> — every change is a gamble</a:t>
             </a:r>
           </a:p>
         </p:txBody>
@@ -14766,7 +15649,7 @@
                 </a:solidFill>
                 <a:latin typeface="Calibri"/>
               </a:rPr>
-              <a:t>If you can't trace it, you can't trust it.</a:t>
+              <a:t>RAG is easy to demo, hard to operate. Plan for both.</a:t>
             </a:r>
           </a:p>
         </p:txBody>
@@ -14833,7 +15716,7 @@
                   <a:srgbClr val="AAAAAA"/>
                 </a:solidFill>
               </a:rPr>
-              <a:t>27</a:t>
+              <a:t>25</a:t>
             </a:r>
           </a:p>
         </p:txBody>
@@ -14937,7 +15820,7 @@
                 </a:solidFill>
                 <a:latin typeface="Calibri"/>
               </a:rPr>
-              <a:t>Live Demo — Streamlit UI</a:t>
+              <a:t>Productionizing Hybrid RAG</a:t>
             </a:r>
           </a:p>
         </p:txBody>
@@ -14995,42 +15878,7 @@
         <p:spPr>
           <a:xfrm>
             <a:off x="640080" y="1463040"/>
-            <a:ext cx="10972800" cy="457200"/>
-          </a:xfrm>
-          <a:prstGeom prst="rect">
-            <a:avLst/>
-          </a:prstGeom>
-          <a:noFill/>
-        </p:spPr>
-        <p:txBody>
-          <a:bodyPr wrap="square" lIns="45720" rIns="45720">
-            <a:spAutoFit/>
-          </a:bodyPr>
-          <a:lstStyle/>
-          <a:p>
-            <a:pPr algn="l"/>
-            <a:r>
-              <a:rPr sz="1800" b="1">
-                <a:solidFill>
-                  <a:srgbClr val="F46E32"/>
-                </a:solidFill>
-                <a:latin typeface="Calibri"/>
-              </a:rPr>
-              <a:t>What you will see</a:t>
-            </a:r>
-          </a:p>
-        </p:txBody>
-      </p:sp>
-      <p:sp>
-        <p:nvSpPr>
-          <p:cNvPr id="6" name="TextBox 5"/>
-          <p:cNvSpPr txBox="1"/>
-          <p:nvPr/>
-        </p:nvSpPr>
-        <p:spPr>
-          <a:xfrm>
-            <a:off x="640080" y="1920240"/>
-            <a:ext cx="11247120" cy="2560320"/>
+            <a:ext cx="11247120" cy="4846320"/>
           </a:xfrm>
           <a:prstGeom prst="rect">
             <a:avLst/>
@@ -15055,7 +15903,7 @@
                 </a:solidFill>
                 <a:latin typeface="Calibri"/>
               </a:rPr>
-              <a:t>▸  Toggle the cross-encoder reranker</a:t>
+              <a:t>▸  Hybrid retrieval as the default</a:t>
             </a:r>
             <a:r>
               <a:rPr sz="1800">
@@ -15064,7 +15912,7 @@
                 </a:solidFill>
                 <a:latin typeface="Calibri"/>
               </a:rPr>
-              <a:t> on and off — same query, see the difference</a:t>
+              <a:t> — dense + sparse, fused with RRF</a:t>
             </a:r>
           </a:p>
           <a:p>
@@ -15080,7 +15928,7 @@
                 </a:solidFill>
                 <a:latin typeface="Calibri"/>
               </a:rPr>
-              <a:t>▸  </a:t>
+              <a:t>▸  Cross-encoder reranking</a:t>
             </a:r>
             <a:r>
               <a:rPr sz="1800">
@@ -15089,25 +15937,7 @@
                 </a:solidFill>
                 <a:latin typeface="Calibri"/>
               </a:rPr>
-              <a:t>Tune </a:t>
-            </a:r>
-            <a:r>
-              <a:rPr sz="1800" b="1">
-                <a:solidFill>
-                  <a:srgbClr val="F46E32"/>
-                </a:solidFill>
-                <a:latin typeface="Calibri"/>
-              </a:rPr>
-              <a:t>retrieval top-K, rerank pool size, context chunks, max tokens</a:t>
-            </a:r>
-            <a:r>
-              <a:rPr sz="1800">
-                <a:solidFill>
-                  <a:srgbClr val="FFFFFF"/>
-                </a:solidFill>
-                <a:latin typeface="Calibri"/>
-              </a:rPr>
-              <a:t> live</a:t>
+              <a:t> on a small candidate pool — best precision per millisecond</a:t>
             </a:r>
           </a:p>
           <a:p>
@@ -15123,7 +15953,7 @@
                 </a:solidFill>
                 <a:latin typeface="Calibri"/>
               </a:rPr>
-              <a:t>▸  Per-source explainability:</a:t>
+              <a:t>▸  Chunking strategy</a:t>
             </a:r>
             <a:r>
               <a:rPr sz="1800">
@@ -15132,7 +15962,7 @@
                 </a:solidFill>
                 <a:latin typeface="Calibri"/>
               </a:rPr>
-              <a:t> Dense Rank, BM25 Rank, RRF Score, Rerank Score</a:t>
+              <a:t> tuned per corpus — try 200–400 tokens with 50-token overlap as a starting point</a:t>
             </a:r>
           </a:p>
           <a:p>
@@ -15148,7 +15978,7 @@
                 </a:solidFill>
                 <a:latin typeface="Calibri"/>
               </a:rPr>
-              <a:t>▸  Latency breakdown:</a:t>
+              <a:t>▸  Reindex on a schedule</a:t>
             </a:r>
             <a:r>
               <a:rPr sz="1800">
@@ -15157,67 +15987,9 @@
                 </a:solidFill>
                 <a:latin typeface="Calibri"/>
               </a:rPr>
-              <a:t> retrieval vs generation vs total</a:t>
-            </a:r>
-          </a:p>
-        </p:txBody>
-      </p:sp>
-      <p:sp>
-        <p:nvSpPr>
-          <p:cNvPr id="7" name="TextBox 6"/>
-          <p:cNvSpPr txBox="1"/>
-          <p:nvPr/>
-        </p:nvSpPr>
-        <p:spPr>
-          <a:xfrm>
-            <a:off x="640080" y="4297680"/>
-            <a:ext cx="10972800" cy="457200"/>
-          </a:xfrm>
-          <a:prstGeom prst="rect">
-            <a:avLst/>
-          </a:prstGeom>
-          <a:noFill/>
-        </p:spPr>
-        <p:txBody>
-          <a:bodyPr wrap="square" lIns="45720" rIns="45720">
-            <a:spAutoFit/>
-          </a:bodyPr>
-          <a:lstStyle/>
-          <a:p>
-            <a:pPr algn="l"/>
-            <a:r>
-              <a:rPr sz="1800" b="1">
-                <a:solidFill>
-                  <a:srgbClr val="F46E32"/>
-                </a:solidFill>
-                <a:latin typeface="Calibri"/>
-              </a:rPr>
-              <a:t>Demo queries</a:t>
-            </a:r>
-          </a:p>
-        </p:txBody>
-      </p:sp>
-      <p:sp>
-        <p:nvSpPr>
-          <p:cNvPr id="8" name="TextBox 7"/>
-          <p:cNvSpPr txBox="1"/>
-          <p:nvPr/>
-        </p:nvSpPr>
-        <p:spPr>
-          <a:xfrm>
-            <a:off x="640080" y="4754880"/>
-            <a:ext cx="11247120" cy="1828800"/>
-          </a:xfrm>
-          <a:prstGeom prst="rect">
-            <a:avLst/>
-          </a:prstGeom>
-          <a:noFill/>
-        </p:spPr>
-        <p:txBody>
-          <a:bodyPr wrap="square">
-            <a:spAutoFit/>
-          </a:bodyPr>
-          <a:lstStyle/>
+              <a:t> — embedding-model upgrades and content updates are routine, not exceptional</a:t>
+            </a:r>
+          </a:p>
           <a:p>
             <a:pPr algn="l">
               <a:spcAft>
@@ -15231,7 +16003,16 @@
                 </a:solidFill>
                 <a:latin typeface="Calibri"/>
               </a:rPr>
-              <a:t>▸  "When was the Eiffel Tower built?"</a:t>
+              <a:t>▸  Caching</a:t>
+            </a:r>
+            <a:r>
+              <a:rPr sz="1800">
+                <a:solidFill>
+                  <a:srgbClr val="FFFFFF"/>
+                </a:solidFill>
+                <a:latin typeface="Calibri"/>
+              </a:rPr>
+              <a:t> — embed-once, cache reranker scores for common queries</a:t>
             </a:r>
           </a:p>
           <a:p>
@@ -15247,7 +16028,16 @@
                 </a:solidFill>
                 <a:latin typeface="Calibri"/>
               </a:rPr>
-              <a:t>▸  "What is the height of Burj Khalifa?"</a:t>
+              <a:t>▸  Fallbacks</a:t>
+            </a:r>
+            <a:r>
+              <a:rPr sz="1800">
+                <a:solidFill>
+                  <a:srgbClr val="FFFFFF"/>
+                </a:solidFill>
+                <a:latin typeface="Calibri"/>
+              </a:rPr>
+              <a:t> — when retrieval confidence is low, return "I don't know" instead of guessing</a:t>
             </a:r>
           </a:p>
           <a:p>
@@ -15263,7 +16053,16 @@
                 </a:solidFill>
                 <a:latin typeface="Calibri"/>
               </a:rPr>
-              <a:t>▸  "Which country is Machu Picchu located in?"</a:t>
+              <a:t>▸  Cite everything</a:t>
+            </a:r>
+            <a:r>
+              <a:rPr sz="1800">
+                <a:solidFill>
+                  <a:srgbClr val="FFFFFF"/>
+                </a:solidFill>
+                <a:latin typeface="Calibri"/>
+              </a:rPr>
+              <a:t> — every claim should map to a chunk the user can click</a:t>
             </a:r>
           </a:p>
           <a:p>
@@ -15279,7 +16078,7 @@
                 </a:solidFill>
                 <a:latin typeface="Calibri"/>
               </a:rPr>
-              <a:t>▸  "Where is the Burj Khalifa and when was it built?"</a:t>
+              <a:t>▸  Evaluation harness in CI</a:t>
             </a:r>
             <a:r>
               <a:rPr sz="1800">
@@ -15288,14 +16087,49 @@
                 </a:solidFill>
                 <a:latin typeface="Calibri"/>
               </a:rPr>
-              <a:t>  (compound query)</a:t>
-            </a:r>
-          </a:p>
-        </p:txBody>
-      </p:sp>
-      <p:sp>
-        <p:nvSpPr>
-          <p:cNvPr id="9" name="TextBox 8"/>
+              <a:t> — run MRR / CUS / ACS on every change before merging</a:t>
+            </a:r>
+          </a:p>
+        </p:txBody>
+      </p:sp>
+      <p:sp>
+        <p:nvSpPr>
+          <p:cNvPr id="6" name="TextBox 5"/>
+          <p:cNvSpPr txBox="1"/>
+          <p:nvPr/>
+        </p:nvSpPr>
+        <p:spPr>
+          <a:xfrm>
+            <a:off x="640080" y="5852160"/>
+            <a:ext cx="10972800" cy="457200"/>
+          </a:xfrm>
+          <a:prstGeom prst="rect">
+            <a:avLst/>
+          </a:prstGeom>
+          <a:noFill/>
+        </p:spPr>
+        <p:txBody>
+          <a:bodyPr wrap="square" lIns="45720" rIns="45720">
+            <a:spAutoFit/>
+          </a:bodyPr>
+          <a:lstStyle/>
+          <a:p>
+            <a:pPr algn="ctr"/>
+            <a:r>
+              <a:rPr sz="1500" b="1">
+                <a:solidFill>
+                  <a:srgbClr val="F46E32"/>
+                </a:solidFill>
+                <a:latin typeface="Calibri"/>
+              </a:rPr>
+              <a:t>Reliability is a feature, not a phase.</a:t>
+            </a:r>
+          </a:p>
+        </p:txBody>
+      </p:sp>
+      <p:sp>
+        <p:nvSpPr>
+          <p:cNvPr id="7" name="TextBox 6"/>
           <p:cNvSpPr txBox="1"/>
           <p:nvPr/>
         </p:nvSpPr>
@@ -15328,7 +16162,7 @@
       </p:sp>
       <p:sp>
         <p:nvSpPr>
-          <p:cNvPr id="10" name="TextBox 9"/>
+          <p:cNvPr id="8" name="TextBox 7"/>
           <p:cNvSpPr txBox="1"/>
           <p:nvPr/>
         </p:nvSpPr>
@@ -15355,7 +16189,7 @@
                   <a:srgbClr val="AAAAAA"/>
                 </a:solidFill>
               </a:rPr>
-              <a:t>28</a:t>
+              <a:t>26</a:t>
             </a:r>
           </a:p>
         </p:txBody>
@@ -15446,19 +16280,20 @@
           <a:noFill/>
         </p:spPr>
         <p:txBody>
-          <a:bodyPr wrap="none">
+          <a:bodyPr wrap="square" lIns="45720" rIns="45720">
             <a:spAutoFit/>
           </a:bodyPr>
           <a:lstStyle/>
           <a:p>
-            <a:r>
-              <a:rPr sz="2800" b="1">
-                <a:solidFill>
-                  <a:srgbClr val="FFFFFF"/>
-                </a:solidFill>
-                <a:latin typeface="Calibri"/>
-              </a:rPr>
-              <a:t>Live Demo — Example 1</a:t>
+            <a:pPr algn="l"/>
+            <a:r>
+              <a:rPr sz="3000" b="1">
+                <a:solidFill>
+                  <a:srgbClr val="FFFFFF"/>
+                </a:solidFill>
+                <a:latin typeface="Calibri"/>
+              </a:rPr>
+              <a:t>Observability for RAG</a:t>
             </a:r>
           </a:p>
         </p:txBody>
@@ -15471,7 +16306,7 @@
         </p:nvSpPr>
         <p:spPr>
           <a:xfrm>
-            <a:off x="457200" y="1005840"/>
+            <a:off x="457200" y="1051560"/>
             <a:ext cx="1188720" cy="64008"/>
           </a:xfrm>
           <a:prstGeom prst="rect">
@@ -15507,30 +16342,229 @@
           </a:p>
         </p:txBody>
       </p:sp>
-      <p:pic>
-        <p:nvPicPr>
-          <p:cNvPr id="5" name="Picture 4" descr="02_query_1.png"/>
-          <p:cNvPicPr>
-            <a:picLocks noChangeAspect="1"/>
-          </p:cNvPicPr>
-          <p:nvPr/>
-        </p:nvPicPr>
-        <p:blipFill>
-          <a:blip r:embed="rId2"/>
-          <a:stretch>
-            <a:fillRect/>
-          </a:stretch>
-        </p:blipFill>
-        <p:spPr>
-          <a:xfrm>
-            <a:off x="3875802" y="717804"/>
-            <a:ext cx="4760595" cy="5440680"/>
-          </a:xfrm>
-          <a:prstGeom prst="rect">
-            <a:avLst/>
-          </a:prstGeom>
-        </p:spPr>
-      </p:pic>
+      <p:sp>
+        <p:nvSpPr>
+          <p:cNvPr id="5" name="TextBox 4"/>
+          <p:cNvSpPr txBox="1"/>
+          <p:nvPr/>
+        </p:nvSpPr>
+        <p:spPr>
+          <a:xfrm>
+            <a:off x="640080" y="1463040"/>
+            <a:ext cx="11247120" cy="4846320"/>
+          </a:xfrm>
+          <a:prstGeom prst="rect">
+            <a:avLst/>
+          </a:prstGeom>
+          <a:noFill/>
+        </p:spPr>
+        <p:txBody>
+          <a:bodyPr wrap="square">
+            <a:spAutoFit/>
+          </a:bodyPr>
+          <a:lstStyle/>
+          <a:p>
+            <a:pPr algn="l">
+              <a:spcAft>
+                <a:spcPts val="700"/>
+              </a:spcAft>
+            </a:pPr>
+            <a:r>
+              <a:rPr sz="1800" b="1">
+                <a:solidFill>
+                  <a:srgbClr val="F46E32"/>
+                </a:solidFill>
+                <a:latin typeface="Calibri"/>
+              </a:rPr>
+              <a:t>▸  Log every stage</a:t>
+            </a:r>
+            <a:r>
+              <a:rPr sz="1800">
+                <a:solidFill>
+                  <a:srgbClr val="FFFFFF"/>
+                </a:solidFill>
+                <a:latin typeface="Calibri"/>
+              </a:rPr>
+              <a:t> — query, dense IDs, sparse IDs, fused order, rerank order, final context</a:t>
+            </a:r>
+          </a:p>
+          <a:p>
+            <a:pPr algn="l">
+              <a:spcAft>
+                <a:spcPts val="700"/>
+              </a:spcAft>
+            </a:pPr>
+            <a:r>
+              <a:rPr sz="1800" b="1">
+                <a:solidFill>
+                  <a:srgbClr val="F46E32"/>
+                </a:solidFill>
+                <a:latin typeface="Calibri"/>
+              </a:rPr>
+              <a:t>▸  Per-query latency breakdown</a:t>
+            </a:r>
+            <a:r>
+              <a:rPr sz="1800">
+                <a:solidFill>
+                  <a:srgbClr val="FFFFFF"/>
+                </a:solidFill>
+                <a:latin typeface="Calibri"/>
+              </a:rPr>
+              <a:t> — retrieve, rerank, generate, total</a:t>
+            </a:r>
+          </a:p>
+          <a:p>
+            <a:pPr algn="l">
+              <a:spcAft>
+                <a:spcPts val="700"/>
+              </a:spcAft>
+            </a:pPr>
+            <a:r>
+              <a:rPr sz="1800" b="1">
+                <a:solidFill>
+                  <a:srgbClr val="F46E32"/>
+                </a:solidFill>
+                <a:latin typeface="Calibri"/>
+              </a:rPr>
+              <a:t>▸  Per-chunk attribution</a:t>
+            </a:r>
+            <a:r>
+              <a:rPr sz="1800">
+                <a:solidFill>
+                  <a:srgbClr val="FFFFFF"/>
+                </a:solidFill>
+                <a:latin typeface="Calibri"/>
+              </a:rPr>
+              <a:t> — which chunks supported which sentences in the answer</a:t>
+            </a:r>
+          </a:p>
+          <a:p>
+            <a:pPr algn="l">
+              <a:spcAft>
+                <a:spcPts val="700"/>
+              </a:spcAft>
+            </a:pPr>
+            <a:r>
+              <a:rPr sz="1800" b="1">
+                <a:solidFill>
+                  <a:srgbClr val="F46E32"/>
+                </a:solidFill>
+                <a:latin typeface="Calibri"/>
+              </a:rPr>
+              <a:t>▸  User feedback loop</a:t>
+            </a:r>
+            <a:r>
+              <a:rPr sz="1800">
+                <a:solidFill>
+                  <a:srgbClr val="FFFFFF"/>
+                </a:solidFill>
+                <a:latin typeface="Calibri"/>
+              </a:rPr>
+              <a:t> — thumbs up/down feeds back into eval set and retrieval tuning</a:t>
+            </a:r>
+          </a:p>
+          <a:p>
+            <a:pPr algn="l">
+              <a:spcAft>
+                <a:spcPts val="700"/>
+              </a:spcAft>
+            </a:pPr>
+            <a:r>
+              <a:rPr sz="1800" b="1">
+                <a:solidFill>
+                  <a:srgbClr val="F46E32"/>
+                </a:solidFill>
+                <a:latin typeface="Calibri"/>
+              </a:rPr>
+              <a:t>▸  Drift monitoring</a:t>
+            </a:r>
+            <a:r>
+              <a:rPr sz="1800">
+                <a:solidFill>
+                  <a:srgbClr val="FFFFFF"/>
+                </a:solidFill>
+                <a:latin typeface="Calibri"/>
+              </a:rPr>
+              <a:t> — track CUS / ACS over time, alert when they sag</a:t>
+            </a:r>
+          </a:p>
+          <a:p>
+            <a:pPr algn="l">
+              <a:spcAft>
+                <a:spcPts val="700"/>
+              </a:spcAft>
+            </a:pPr>
+            <a:r>
+              <a:rPr sz="1800" b="1">
+                <a:solidFill>
+                  <a:srgbClr val="F46E32"/>
+                </a:solidFill>
+                <a:latin typeface="Calibri"/>
+              </a:rPr>
+              <a:t>▸  Replay debugging</a:t>
+            </a:r>
+            <a:r>
+              <a:rPr sz="1800">
+                <a:solidFill>
+                  <a:srgbClr val="FFFFFF"/>
+                </a:solidFill>
+                <a:latin typeface="Calibri"/>
+              </a:rPr>
+              <a:t> — given a bad answer, replay the exact retrieval and prompt</a:t>
+            </a:r>
+          </a:p>
+          <a:p>
+            <a:pPr algn="l">
+              <a:spcAft>
+                <a:spcPts val="700"/>
+              </a:spcAft>
+            </a:pPr>
+            <a:r>
+              <a:rPr sz="1800" b="1">
+                <a:solidFill>
+                  <a:srgbClr val="F46E32"/>
+                </a:solidFill>
+                <a:latin typeface="Calibri"/>
+              </a:rPr>
+              <a:t>▸  Cost tracking</a:t>
+            </a:r>
+            <a:r>
+              <a:rPr sz="1800">
+                <a:solidFill>
+                  <a:srgbClr val="FFFFFF"/>
+                </a:solidFill>
+                <a:latin typeface="Calibri"/>
+              </a:rPr>
+              <a:t> — tokens per query, reranker calls, embeddings per day</a:t>
+            </a:r>
+          </a:p>
+          <a:p>
+            <a:pPr algn="l">
+              <a:spcAft>
+                <a:spcPts val="700"/>
+              </a:spcAft>
+            </a:pPr>
+            <a:r>
+              <a:rPr sz="1800" b="1">
+                <a:solidFill>
+                  <a:srgbClr val="F46E32"/>
+                </a:solidFill>
+                <a:latin typeface="Calibri"/>
+              </a:rPr>
+              <a:t>▸  Eval-on-CI</a:t>
+            </a:r>
+            <a:r>
+              <a:rPr sz="1800">
+                <a:solidFill>
+                  <a:srgbClr val="FFFFFF"/>
+                </a:solidFill>
+                <a:latin typeface="Calibri"/>
+              </a:rPr>
+              <a:t> — block regressions before they ship</a:t>
+            </a:r>
+          </a:p>
+        </p:txBody>
+      </p:sp>
       <p:sp>
         <p:nvSpPr>
           <p:cNvPr id="6" name="TextBox 5"/>
@@ -15539,8 +16573,76 @@
         </p:nvSpPr>
         <p:spPr>
           <a:xfrm>
-            <a:off x="457200" y="6126480"/>
-            <a:ext cx="11430000" cy="320040"/>
+            <a:off x="640080" y="5852160"/>
+            <a:ext cx="10972800" cy="457200"/>
+          </a:xfrm>
+          <a:prstGeom prst="rect">
+            <a:avLst/>
+          </a:prstGeom>
+          <a:noFill/>
+        </p:spPr>
+        <p:txBody>
+          <a:bodyPr wrap="square" lIns="45720" rIns="45720">
+            <a:spAutoFit/>
+          </a:bodyPr>
+          <a:lstStyle/>
+          <a:p>
+            <a:pPr algn="ctr"/>
+            <a:r>
+              <a:rPr sz="1500" b="1">
+                <a:solidFill>
+                  <a:srgbClr val="F46E32"/>
+                </a:solidFill>
+                <a:latin typeface="Calibri"/>
+              </a:rPr>
+              <a:t>If you can't trace it, you can't trust it.</a:t>
+            </a:r>
+          </a:p>
+        </p:txBody>
+      </p:sp>
+      <p:sp>
+        <p:nvSpPr>
+          <p:cNvPr id="7" name="TextBox 6"/>
+          <p:cNvSpPr txBox="1"/>
+          <p:nvPr/>
+        </p:nvSpPr>
+        <p:spPr>
+          <a:xfrm>
+            <a:off x="365760" y="6446520"/>
+            <a:ext cx="11887200" cy="365760"/>
+          </a:xfrm>
+          <a:prstGeom prst="rect">
+            <a:avLst/>
+          </a:prstGeom>
+          <a:noFill/>
+        </p:spPr>
+        <p:txBody>
+          <a:bodyPr wrap="none" lIns="0" rIns="0">
+            <a:spAutoFit/>
+          </a:bodyPr>
+          <a:lstStyle/>
+          <a:p>
+            <a:r>
+              <a:rPr sz="1200">
+                <a:solidFill>
+                  <a:srgbClr val="AAAAAA"/>
+                </a:solidFill>
+              </a:rPr>
+              <a:t>DataHour  •  Hybrid RAG with Re-Ranker  •  Ravindra Babu Katiki</a:t>
+            </a:r>
+          </a:p>
+        </p:txBody>
+      </p:sp>
+      <p:sp>
+        <p:nvSpPr>
+          <p:cNvPr id="8" name="TextBox 7"/>
+          <p:cNvSpPr txBox="1"/>
+          <p:nvPr/>
+        </p:nvSpPr>
+        <p:spPr>
+          <a:xfrm>
+            <a:off x="11338560" y="6446520"/>
+            <a:ext cx="731520" cy="365760"/>
           </a:xfrm>
           <a:prstGeom prst="rect">
             <a:avLst/>
@@ -15553,81 +16655,14 @@
           </a:bodyPr>
           <a:lstStyle/>
           <a:p>
-            <a:pPr algn="ctr"/>
-            <a:r>
-              <a:rPr sz="1300" i="1">
+            <a:pPr algn="r"/>
+            <a:r>
+              <a:rPr sz="1000">
                 <a:solidFill>
                   <a:srgbClr val="AAAAAA"/>
                 </a:solidFill>
               </a:rPr>
-              <a:t>Query: "When was the Eiffel Tower built?"  →  Answer: 1887 to 1889</a:t>
-            </a:r>
-          </a:p>
-        </p:txBody>
-      </p:sp>
-      <p:sp>
-        <p:nvSpPr>
-          <p:cNvPr id="7" name="TextBox 6"/>
-          <p:cNvSpPr txBox="1"/>
-          <p:nvPr/>
-        </p:nvSpPr>
-        <p:spPr>
-          <a:xfrm>
-            <a:off x="365760" y="6446520"/>
-            <a:ext cx="11887200" cy="365760"/>
-          </a:xfrm>
-          <a:prstGeom prst="rect">
-            <a:avLst/>
-          </a:prstGeom>
-          <a:noFill/>
-        </p:spPr>
-        <p:txBody>
-          <a:bodyPr wrap="none">
-            <a:spAutoFit/>
-          </a:bodyPr>
-          <a:lstStyle/>
-          <a:p>
-            <a:r>
-              <a:rPr sz="1200">
-                <a:solidFill>
-                  <a:srgbClr val="AAAAAA"/>
-                </a:solidFill>
-              </a:rPr>
-              <a:t>DataHour  •  Hybrid RAG with Re-Ranker  •  Ravindra Babu Katiki</a:t>
-            </a:r>
-          </a:p>
-        </p:txBody>
-      </p:sp>
-      <p:sp>
-        <p:nvSpPr>
-          <p:cNvPr id="8" name="TextBox 7"/>
-          <p:cNvSpPr txBox="1"/>
-          <p:nvPr/>
-        </p:nvSpPr>
-        <p:spPr>
-          <a:xfrm>
-            <a:off x="11338560" y="6446520"/>
-            <a:ext cx="731520" cy="365760"/>
-          </a:xfrm>
-          <a:prstGeom prst="rect">
-            <a:avLst/>
-          </a:prstGeom>
-          <a:noFill/>
-        </p:spPr>
-        <p:txBody>
-          <a:bodyPr wrap="none">
-            <a:spAutoFit/>
-          </a:bodyPr>
-          <a:lstStyle/>
-          <a:p>
-            <a:pPr algn="r"/>
-            <a:r>
-              <a:rPr sz="1000">
-                <a:solidFill>
-                  <a:srgbClr val="AAAAAA"/>
-                </a:solidFill>
-              </a:rPr>
-              <a:t>29</a:t>
+              <a:t>27</a:t>
             </a:r>
           </a:p>
         </p:txBody>
@@ -15731,7 +16766,7 @@
                 </a:solidFill>
                 <a:latin typeface="Calibri"/>
               </a:rPr>
-              <a:t>Key Takeaways</a:t>
+              <a:t>Live Demo — Streamlit UI</a:t>
             </a:r>
           </a:p>
         </p:txBody>
@@ -15789,7 +16824,42 @@
         <p:spPr>
           <a:xfrm>
             <a:off x="640080" y="1463040"/>
-            <a:ext cx="11247120" cy="4937760"/>
+            <a:ext cx="10972800" cy="457200"/>
+          </a:xfrm>
+          <a:prstGeom prst="rect">
+            <a:avLst/>
+          </a:prstGeom>
+          <a:noFill/>
+        </p:spPr>
+        <p:txBody>
+          <a:bodyPr wrap="square" lIns="45720" rIns="45720">
+            <a:spAutoFit/>
+          </a:bodyPr>
+          <a:lstStyle/>
+          <a:p>
+            <a:pPr algn="l"/>
+            <a:r>
+              <a:rPr sz="1800" b="1">
+                <a:solidFill>
+                  <a:srgbClr val="F46E32"/>
+                </a:solidFill>
+                <a:latin typeface="Calibri"/>
+              </a:rPr>
+              <a:t>What you will see</a:t>
+            </a:r>
+          </a:p>
+        </p:txBody>
+      </p:sp>
+      <p:sp>
+        <p:nvSpPr>
+          <p:cNvPr id="6" name="TextBox 5"/>
+          <p:cNvSpPr txBox="1"/>
+          <p:nvPr/>
+        </p:nvSpPr>
+        <p:spPr>
+          <a:xfrm>
+            <a:off x="640080" y="1920240"/>
+            <a:ext cx="11247120" cy="2560320"/>
           </a:xfrm>
           <a:prstGeom prst="rect">
             <a:avLst/>
@@ -15814,7 +16884,7 @@
                 </a:solidFill>
                 <a:latin typeface="Calibri"/>
               </a:rPr>
-              <a:t>▸  RAG grounds LLMs and kills hallucinations</a:t>
+              <a:t>▸  Toggle the cross-encoder reranker</a:t>
             </a:r>
             <a:r>
               <a:rPr sz="1800">
@@ -15823,7 +16893,7 @@
                 </a:solidFill>
                 <a:latin typeface="Calibri"/>
               </a:rPr>
-              <a:t> — but only if retrieval is good</a:t>
+              <a:t> on and off — same query, see the difference</a:t>
             </a:r>
           </a:p>
           <a:p>
@@ -15839,7 +16909,7 @@
                 </a:solidFill>
                 <a:latin typeface="Calibri"/>
               </a:rPr>
-              <a:t>▸  Hybrid retrieval (Dense + BM25 + RRF)</a:t>
+              <a:t>▸  </a:t>
             </a:r>
             <a:r>
               <a:rPr sz="1800">
@@ -15848,7 +16918,25 @@
                 </a:solidFill>
                 <a:latin typeface="Calibri"/>
               </a:rPr>
-              <a:t> is robust because dense and sparse fail differently</a:t>
+              <a:t>Tune </a:t>
+            </a:r>
+            <a:r>
+              <a:rPr sz="1800" b="1">
+                <a:solidFill>
+                  <a:srgbClr val="F46E32"/>
+                </a:solidFill>
+                <a:latin typeface="Calibri"/>
+              </a:rPr>
+              <a:t>retrieval top-K, rerank pool size, context chunks, max tokens</a:t>
+            </a:r>
+            <a:r>
+              <a:rPr sz="1800">
+                <a:solidFill>
+                  <a:srgbClr val="FFFFFF"/>
+                </a:solidFill>
+                <a:latin typeface="Calibri"/>
+              </a:rPr>
+              <a:t> live</a:t>
             </a:r>
           </a:p>
           <a:p>
@@ -15864,7 +16952,7 @@
                 </a:solidFill>
                 <a:latin typeface="Calibri"/>
               </a:rPr>
-              <a:t>▸  Reciprocal Rank Fusion</a:t>
+              <a:t>▸  Per-source explainability:</a:t>
             </a:r>
             <a:r>
               <a:rPr sz="1800">
@@ -15873,7 +16961,7 @@
                 </a:solidFill>
                 <a:latin typeface="Calibri"/>
               </a:rPr>
-              <a:t> needs no score calibration and is trivially extensible</a:t>
+              <a:t> Dense Rank, BM25 Rank, RRF Score, Rerank Score</a:t>
             </a:r>
           </a:p>
           <a:p>
@@ -15889,7 +16977,7 @@
                 </a:solidFill>
                 <a:latin typeface="Calibri"/>
               </a:rPr>
-              <a:t>▸  A cross-encoder re-ranker is the cheapest big quality win</a:t>
+              <a:t>▸  Latency breakdown:</a:t>
             </a:r>
             <a:r>
               <a:rPr sz="1800">
@@ -15898,9 +16986,67 @@
                 </a:solidFill>
                 <a:latin typeface="Calibri"/>
               </a:rPr>
-              <a:t> you can add to a working RAG system</a:t>
-            </a:r>
-          </a:p>
+              <a:t> retrieval vs generation vs total</a:t>
+            </a:r>
+          </a:p>
+        </p:txBody>
+      </p:sp>
+      <p:sp>
+        <p:nvSpPr>
+          <p:cNvPr id="7" name="TextBox 6"/>
+          <p:cNvSpPr txBox="1"/>
+          <p:nvPr/>
+        </p:nvSpPr>
+        <p:spPr>
+          <a:xfrm>
+            <a:off x="640080" y="4297680"/>
+            <a:ext cx="10972800" cy="457200"/>
+          </a:xfrm>
+          <a:prstGeom prst="rect">
+            <a:avLst/>
+          </a:prstGeom>
+          <a:noFill/>
+        </p:spPr>
+        <p:txBody>
+          <a:bodyPr wrap="square" lIns="45720" rIns="45720">
+            <a:spAutoFit/>
+          </a:bodyPr>
+          <a:lstStyle/>
+          <a:p>
+            <a:pPr algn="l"/>
+            <a:r>
+              <a:rPr sz="1800" b="1">
+                <a:solidFill>
+                  <a:srgbClr val="F46E32"/>
+                </a:solidFill>
+                <a:latin typeface="Calibri"/>
+              </a:rPr>
+              <a:t>Demo queries</a:t>
+            </a:r>
+          </a:p>
+        </p:txBody>
+      </p:sp>
+      <p:sp>
+        <p:nvSpPr>
+          <p:cNvPr id="8" name="TextBox 7"/>
+          <p:cNvSpPr txBox="1"/>
+          <p:nvPr/>
+        </p:nvSpPr>
+        <p:spPr>
+          <a:xfrm>
+            <a:off x="640080" y="4754880"/>
+            <a:ext cx="11247120" cy="1828800"/>
+          </a:xfrm>
+          <a:prstGeom prst="rect">
+            <a:avLst/>
+          </a:prstGeom>
+          <a:noFill/>
+        </p:spPr>
+        <p:txBody>
+          <a:bodyPr wrap="square">
+            <a:spAutoFit/>
+          </a:bodyPr>
+          <a:lstStyle/>
           <a:p>
             <a:pPr algn="l">
               <a:spcAft>
@@ -15914,16 +17060,7 @@
                 </a:solidFill>
                 <a:latin typeface="Calibri"/>
               </a:rPr>
-              <a:t>▸  Two-stage retrieval</a:t>
-            </a:r>
-            <a:r>
-              <a:rPr sz="1800">
-                <a:solidFill>
-                  <a:srgbClr val="FFFFFF"/>
-                </a:solidFill>
-                <a:latin typeface="Calibri"/>
-              </a:rPr>
-              <a:t> = fast recall (bi-encoder) + sharp precision (cross-encoder)</a:t>
+              <a:t>▸  "When was the Eiffel Tower built?"</a:t>
             </a:r>
           </a:p>
           <a:p>
@@ -15939,16 +17076,7 @@
                 </a:solidFill>
                 <a:latin typeface="Calibri"/>
               </a:rPr>
-              <a:t>▸  Custom metrics (CUS, ACS)</a:t>
-            </a:r>
-            <a:r>
-              <a:rPr sz="1800">
-                <a:solidFill>
-                  <a:srgbClr val="FFFFFF"/>
-                </a:solidFill>
-                <a:latin typeface="Calibri"/>
-              </a:rPr>
-              <a:t> reveal answer-quality issues that MRR alone hides</a:t>
+              <a:t>▸  "What is the height of Burj Khalifa?"</a:t>
             </a:r>
           </a:p>
           <a:p>
@@ -15964,16 +17092,7 @@
                 </a:solidFill>
                 <a:latin typeface="Calibri"/>
               </a:rPr>
-              <a:t>▸  All of this runs on CPU with open models</a:t>
-            </a:r>
-            <a:r>
-              <a:rPr sz="1800">
-                <a:solidFill>
-                  <a:srgbClr val="FFFFFF"/>
-                </a:solidFill>
-                <a:latin typeface="Calibri"/>
-              </a:rPr>
-              <a:t> — no API keys, no vendor lock-in</a:t>
+              <a:t>▸  "Which country is Machu Picchu located in?"</a:t>
             </a:r>
           </a:p>
           <a:p>
@@ -15989,7 +17108,7 @@
                 </a:solidFill>
                 <a:latin typeface="Calibri"/>
               </a:rPr>
-              <a:t>▸  Plan for production from day one</a:t>
+              <a:t>▸  "Where is the Burj Khalifa and when was it built?"</a:t>
             </a:r>
             <a:r>
               <a:rPr sz="1800">
@@ -15998,14 +17117,14 @@
                 </a:solidFill>
                 <a:latin typeface="Calibri"/>
               </a:rPr>
-              <a:t> — observability, evaluation harness, fallbacks</a:t>
-            </a:r>
-          </a:p>
-        </p:txBody>
-      </p:sp>
-      <p:sp>
-        <p:nvSpPr>
-          <p:cNvPr id="6" name="TextBox 5"/>
+              <a:t>  (compound query)</a:t>
+            </a:r>
+          </a:p>
+        </p:txBody>
+      </p:sp>
+      <p:sp>
+        <p:nvSpPr>
+          <p:cNvPr id="9" name="TextBox 8"/>
           <p:cNvSpPr txBox="1"/>
           <p:nvPr/>
         </p:nvSpPr>
@@ -16038,7 +17157,7 @@
       </p:sp>
       <p:sp>
         <p:nvSpPr>
-          <p:cNvPr id="7" name="TextBox 6"/>
+          <p:cNvPr id="10" name="TextBox 9"/>
           <p:cNvSpPr txBox="1"/>
           <p:nvPr/>
         </p:nvSpPr>
@@ -16065,7 +17184,7 @@
                   <a:srgbClr val="AAAAAA"/>
                 </a:solidFill>
               </a:rPr>
-              <a:t>30</a:t>
+              <a:t>28</a:t>
             </a:r>
           </a:p>
         </p:txBody>
@@ -16156,20 +17275,19 @@
           <a:noFill/>
         </p:spPr>
         <p:txBody>
-          <a:bodyPr wrap="square" lIns="45720" rIns="45720">
+          <a:bodyPr wrap="none">
             <a:spAutoFit/>
           </a:bodyPr>
           <a:lstStyle/>
           <a:p>
-            <a:pPr algn="l"/>
-            <a:r>
-              <a:rPr sz="3000" b="1">
-                <a:solidFill>
-                  <a:srgbClr val="FFFFFF"/>
-                </a:solidFill>
-                <a:latin typeface="Calibri"/>
-              </a:rPr>
-              <a:t>Closing Statement</a:t>
+            <a:r>
+              <a:rPr sz="2800" b="1">
+                <a:solidFill>
+                  <a:srgbClr val="FFFFFF"/>
+                </a:solidFill>
+                <a:latin typeface="Calibri"/>
+              </a:rPr>
+              <a:t>Live Demo — Example 1</a:t>
             </a:r>
           </a:p>
         </p:txBody>
@@ -16182,7 +17300,7 @@
         </p:nvSpPr>
         <p:spPr>
           <a:xfrm>
-            <a:off x="457200" y="1051560"/>
+            <a:off x="457200" y="1005840"/>
             <a:ext cx="1188720" cy="64008"/>
           </a:xfrm>
           <a:prstGeom prst="rect">
@@ -16218,186 +17336,30 @@
           </a:p>
         </p:txBody>
       </p:sp>
-      <p:sp>
-        <p:nvSpPr>
-          <p:cNvPr id="5" name="TextBox 4"/>
-          <p:cNvSpPr txBox="1"/>
-          <p:nvPr/>
-        </p:nvSpPr>
-        <p:spPr>
-          <a:xfrm>
-            <a:off x="640080" y="1463040"/>
-            <a:ext cx="11247120" cy="3400931"/>
-          </a:xfrm>
-          <a:prstGeom prst="rect">
-            <a:avLst/>
-          </a:prstGeom>
-          <a:noFill/>
-        </p:spPr>
-        <p:txBody>
-          <a:bodyPr wrap="square">
-            <a:spAutoFit/>
-          </a:bodyPr>
-          <a:lstStyle/>
-          <a:p>
-            <a:pPr algn="l">
-              <a:spcAft>
-                <a:spcPts val="700"/>
-              </a:spcAft>
-            </a:pPr>
-            <a:r>
-              <a:rPr sz="1800" b="1" dirty="0">
-                <a:solidFill>
-                  <a:srgbClr val="F46E32"/>
-                </a:solidFill>
-                <a:latin typeface="Calibri"/>
-              </a:rPr>
-              <a:t>▸  The Core Shift:</a:t>
-            </a:r>
-            <a:r>
-              <a:rPr sz="1800" dirty="0">
-                <a:solidFill>
-                  <a:srgbClr val="FFFFFF"/>
-                </a:solidFill>
-                <a:latin typeface="Calibri"/>
-              </a:rPr>
-              <a:t> RAG is no longer optional. Conversational AI without grounding is a hallucination machine in production.</a:t>
-            </a:r>
-          </a:p>
-          <a:p>
-            <a:pPr algn="l">
-              <a:spcAft>
-                <a:spcPts val="700"/>
-              </a:spcAft>
-            </a:pPr>
-            <a:endParaRPr sz="1800" b="1" dirty="0">
-              <a:solidFill>
-                <a:srgbClr val="F46E32"/>
-              </a:solidFill>
-              <a:latin typeface="Calibri"/>
-            </a:endParaRPr>
-          </a:p>
-          <a:p>
-            <a:pPr algn="l">
-              <a:spcAft>
-                <a:spcPts val="700"/>
-              </a:spcAft>
-            </a:pPr>
-            <a:r>
-              <a:rPr sz="1800" b="1" dirty="0">
-                <a:solidFill>
-                  <a:srgbClr val="F46E32"/>
-                </a:solidFill>
-                <a:latin typeface="Calibri"/>
-              </a:rPr>
-              <a:t>▸  Retrieval is the bottleneck:</a:t>
-            </a:r>
-            <a:r>
-              <a:rPr sz="1800" dirty="0">
-                <a:solidFill>
-                  <a:srgbClr val="FFFFFF"/>
-                </a:solidFill>
-                <a:latin typeface="Calibri"/>
-              </a:rPr>
-              <a:t> the model is rarely the problem. The retriever almost always is. Fix retrieval first and everything downstream gets cheaper.</a:t>
-            </a:r>
-          </a:p>
-          <a:p>
-            <a:pPr algn="l">
-              <a:spcAft>
-                <a:spcPts val="700"/>
-              </a:spcAft>
-            </a:pPr>
-            <a:endParaRPr sz="1800" b="1" dirty="0">
-              <a:solidFill>
-                <a:srgbClr val="F46E32"/>
-              </a:solidFill>
-              <a:latin typeface="Calibri"/>
-            </a:endParaRPr>
-          </a:p>
-          <a:p>
-            <a:pPr algn="l">
-              <a:spcAft>
-                <a:spcPts val="700"/>
-              </a:spcAft>
-            </a:pPr>
-            <a:r>
-              <a:rPr sz="1800" b="1" dirty="0">
-                <a:solidFill>
-                  <a:srgbClr val="F46E32"/>
-                </a:solidFill>
-                <a:latin typeface="Calibri"/>
-              </a:rPr>
-              <a:t>▸  Hybrid + Re-Rank as the new default:</a:t>
-            </a:r>
-            <a:r>
-              <a:rPr sz="1800" dirty="0">
-                <a:solidFill>
-                  <a:srgbClr val="FFFFFF"/>
-                </a:solidFill>
-                <a:latin typeface="Calibri"/>
-              </a:rPr>
-              <a:t> combine dense and sparse for recall, fuse with RRF, then let a cross-encoder pick the winners. Simple, robust, fast.</a:t>
-            </a:r>
-          </a:p>
-          <a:p>
-            <a:pPr algn="l">
-              <a:spcAft>
-                <a:spcPts val="700"/>
-              </a:spcAft>
-            </a:pPr>
-            <a:endParaRPr sz="1800" b="1" dirty="0">
-              <a:solidFill>
-                <a:srgbClr val="F46E32"/>
-              </a:solidFill>
-              <a:latin typeface="Calibri"/>
-            </a:endParaRPr>
-          </a:p>
-          <a:p>
-            <a:pPr algn="l">
-              <a:spcAft>
-                <a:spcPts val="700"/>
-              </a:spcAft>
-            </a:pPr>
-            <a:r>
-              <a:rPr sz="1800" b="1" dirty="0">
-                <a:solidFill>
-                  <a:srgbClr val="F46E32"/>
-                </a:solidFill>
-                <a:latin typeface="Calibri"/>
-              </a:rPr>
-              <a:t>▸  The Final Takeaway:</a:t>
-            </a:r>
-            <a:r>
-              <a:rPr sz="1800" dirty="0">
-                <a:solidFill>
-                  <a:srgbClr val="FFFFFF"/>
-                </a:solidFill>
-                <a:latin typeface="Calibri"/>
-              </a:rPr>
-              <a:t> the next generation of conversational AI will be built on </a:t>
-            </a:r>
-            <a:r>
-              <a:rPr sz="1800" b="1" dirty="0">
-                <a:solidFill>
-                  <a:srgbClr val="F46E32"/>
-                </a:solidFill>
-                <a:latin typeface="Calibri"/>
-              </a:rPr>
-              <a:t>reliable retrieval</a:t>
-            </a:r>
-            <a:r>
-              <a:rPr sz="1800" dirty="0">
-                <a:solidFill>
-                  <a:srgbClr val="FFFFFF"/>
-                </a:solidFill>
-                <a:latin typeface="Calibri"/>
-              </a:rPr>
-              <a:t>, not bigger models.</a:t>
-            </a:r>
-          </a:p>
-        </p:txBody>
-      </p:sp>
+      <p:pic>
+        <p:nvPicPr>
+          <p:cNvPr id="5" name="Picture 4" descr="02_query_1.png"/>
+          <p:cNvPicPr>
+            <a:picLocks noChangeAspect="1"/>
+          </p:cNvPicPr>
+          <p:nvPr/>
+        </p:nvPicPr>
+        <p:blipFill>
+          <a:blip r:embed="rId2"/>
+          <a:stretch>
+            <a:fillRect/>
+          </a:stretch>
+        </p:blipFill>
+        <p:spPr>
+          <a:xfrm>
+            <a:off x="3875802" y="717804"/>
+            <a:ext cx="4760595" cy="5440680"/>
+          </a:xfrm>
+          <a:prstGeom prst="rect">
+            <a:avLst/>
+          </a:prstGeom>
+        </p:spPr>
+      </p:pic>
       <p:sp>
         <p:nvSpPr>
           <p:cNvPr id="6" name="TextBox 5"/>
@@ -16406,41 +17368,8 @@
         </p:nvSpPr>
         <p:spPr>
           <a:xfrm>
-            <a:off x="365760" y="6446520"/>
-            <a:ext cx="11887200" cy="365760"/>
-          </a:xfrm>
-          <a:prstGeom prst="rect">
-            <a:avLst/>
-          </a:prstGeom>
-          <a:noFill/>
-        </p:spPr>
-        <p:txBody>
-          <a:bodyPr wrap="none" lIns="0" rIns="0">
-            <a:spAutoFit/>
-          </a:bodyPr>
-          <a:lstStyle/>
-          <a:p>
-            <a:r>
-              <a:rPr sz="1200">
-                <a:solidFill>
-                  <a:srgbClr val="AAAAAA"/>
-                </a:solidFill>
-              </a:rPr>
-              <a:t>DataHour  •  Hybrid RAG with Re-Ranker  •  Ravindra Babu Katiki</a:t>
-            </a:r>
-          </a:p>
-        </p:txBody>
-      </p:sp>
-      <p:sp>
-        <p:nvSpPr>
-          <p:cNvPr id="7" name="TextBox 6"/>
-          <p:cNvSpPr txBox="1"/>
-          <p:nvPr/>
-        </p:nvSpPr>
-        <p:spPr>
-          <a:xfrm>
-            <a:off x="11338560" y="6446520"/>
-            <a:ext cx="731520" cy="365760"/>
+            <a:off x="457200" y="6126480"/>
+            <a:ext cx="11430000" cy="320040"/>
           </a:xfrm>
           <a:prstGeom prst="rect">
             <a:avLst/>
@@ -16453,6 +17382,73 @@
           </a:bodyPr>
           <a:lstStyle/>
           <a:p>
+            <a:pPr algn="ctr"/>
+            <a:r>
+              <a:rPr sz="1300" i="1">
+                <a:solidFill>
+                  <a:srgbClr val="AAAAAA"/>
+                </a:solidFill>
+              </a:rPr>
+              <a:t>Query: "When was the Eiffel Tower built?"  →  Answer: 1887 to 1889</a:t>
+            </a:r>
+          </a:p>
+        </p:txBody>
+      </p:sp>
+      <p:sp>
+        <p:nvSpPr>
+          <p:cNvPr id="7" name="TextBox 6"/>
+          <p:cNvSpPr txBox="1"/>
+          <p:nvPr/>
+        </p:nvSpPr>
+        <p:spPr>
+          <a:xfrm>
+            <a:off x="365760" y="6446520"/>
+            <a:ext cx="11887200" cy="365760"/>
+          </a:xfrm>
+          <a:prstGeom prst="rect">
+            <a:avLst/>
+          </a:prstGeom>
+          <a:noFill/>
+        </p:spPr>
+        <p:txBody>
+          <a:bodyPr wrap="none">
+            <a:spAutoFit/>
+          </a:bodyPr>
+          <a:lstStyle/>
+          <a:p>
+            <a:r>
+              <a:rPr sz="1200">
+                <a:solidFill>
+                  <a:srgbClr val="AAAAAA"/>
+                </a:solidFill>
+              </a:rPr>
+              <a:t>DataHour  •  Hybrid RAG with Re-Ranker  •  Ravindra Babu Katiki</a:t>
+            </a:r>
+          </a:p>
+        </p:txBody>
+      </p:sp>
+      <p:sp>
+        <p:nvSpPr>
+          <p:cNvPr id="8" name="TextBox 7"/>
+          <p:cNvSpPr txBox="1"/>
+          <p:nvPr/>
+        </p:nvSpPr>
+        <p:spPr>
+          <a:xfrm>
+            <a:off x="11338560" y="6446520"/>
+            <a:ext cx="731520" cy="365760"/>
+          </a:xfrm>
+          <a:prstGeom prst="rect">
+            <a:avLst/>
+          </a:prstGeom>
+          <a:noFill/>
+        </p:spPr>
+        <p:txBody>
+          <a:bodyPr wrap="none">
+            <a:spAutoFit/>
+          </a:bodyPr>
+          <a:lstStyle/>
+          <a:p>
             <a:pPr algn="r"/>
             <a:r>
               <a:rPr sz="1000">
@@ -16460,7 +17456,7 @@
                   <a:srgbClr val="AAAAAA"/>
                 </a:solidFill>
               </a:rPr>
-              <a:t>31</a:t>
+              <a:t>29</a:t>
             </a:r>
           </a:p>
         </p:txBody>
@@ -17077,8 +18073,8 @@
         </p:nvSpPr>
         <p:spPr>
           <a:xfrm>
-            <a:off x="640080" y="2377440"/>
-            <a:ext cx="10972800" cy="1280160"/>
+            <a:off x="457200" y="320040"/>
+            <a:ext cx="11430000" cy="777240"/>
           </a:xfrm>
           <a:prstGeom prst="rect">
             <a:avLst/>
@@ -17091,16 +18087,60 @@
           </a:bodyPr>
           <a:lstStyle/>
           <a:p>
+            <a:pPr algn="l"/>
+            <a:r>
+              <a:rPr sz="3000" b="1">
+                <a:solidFill>
+                  <a:srgbClr val="FFFFFF"/>
+                </a:solidFill>
+                <a:latin typeface="Calibri"/>
+              </a:rPr>
+              <a:t>Key Takeaways</a:t>
+            </a:r>
+          </a:p>
+        </p:txBody>
+      </p:sp>
+      <p:sp>
+        <p:nvSpPr>
+          <p:cNvPr id="4" name="Rectangle 3"/>
+          <p:cNvSpPr/>
+          <p:nvPr/>
+        </p:nvSpPr>
+        <p:spPr>
+          <a:xfrm>
+            <a:off x="457200" y="1051560"/>
+            <a:ext cx="1188720" cy="64008"/>
+          </a:xfrm>
+          <a:prstGeom prst="rect">
+            <a:avLst/>
+          </a:prstGeom>
+          <a:solidFill>
+            <a:srgbClr val="F46E32"/>
+          </a:solidFill>
+          <a:ln>
+            <a:noFill/>
+          </a:ln>
+        </p:spPr>
+        <p:style>
+          <a:lnRef idx="1">
+            <a:schemeClr val="accent1"/>
+          </a:lnRef>
+          <a:fillRef idx="3">
+            <a:schemeClr val="accent1"/>
+          </a:fillRef>
+          <a:effectRef idx="2">
+            <a:schemeClr val="accent1"/>
+          </a:effectRef>
+          <a:fontRef idx="minor">
+            <a:schemeClr val="lt1"/>
+          </a:fontRef>
+        </p:style>
+        <p:txBody>
+          <a:bodyPr rtlCol="0" anchor="ctr"/>
+          <a:lstStyle/>
+          <a:p>
             <a:pPr algn="ctr"/>
-            <a:r>
-              <a:rPr sz="6600" b="1">
-                <a:solidFill>
-                  <a:srgbClr val="FFFFFF"/>
-                </a:solidFill>
-                <a:latin typeface="Calibri"/>
-              </a:rPr>
-              <a:t>Thank You!</a:t>
-            </a:r>
+            <a:endParaRPr/>
           </a:p>
         </p:txBody>
       </p:sp>
@@ -17112,8 +18152,8 @@
         </p:nvSpPr>
         <p:spPr>
           <a:xfrm>
-            <a:off x="640080" y="4572000"/>
-            <a:ext cx="10972800" cy="548640"/>
+            <a:off x="640080" y="1463040"/>
+            <a:ext cx="11247120" cy="4937760"/>
           </a:xfrm>
           <a:prstGeom prst="rect">
             <a:avLst/>
@@ -17121,36 +18161,209 @@
           <a:noFill/>
         </p:spPr>
         <p:txBody>
-          <a:bodyPr wrap="square" lIns="45720" rIns="45720">
+          <a:bodyPr wrap="square">
             <a:spAutoFit/>
           </a:bodyPr>
           <a:lstStyle/>
           <a:p>
-            <a:pPr algn="ctr"/>
-            <a:r>
-              <a:rPr sz="1800" b="0" dirty="0">
-                <a:solidFill>
-                  <a:srgbClr val="AAAAAA"/>
-                </a:solidFill>
-                <a:latin typeface="Calibri"/>
-              </a:rPr>
-              <a:t>github.com/sunrise197605/</a:t>
-            </a:r>
-            <a:r>
-              <a:rPr sz="1800" b="0" dirty="0" err="1">
-                <a:solidFill>
-                  <a:srgbClr val="AAAAAA"/>
-                </a:solidFill>
-                <a:latin typeface="Calibri"/>
-              </a:rPr>
-              <a:t>Datahour_HybridRAG</a:t>
-            </a:r>
-            <a:endParaRPr sz="1800" b="0" dirty="0">
-              <a:solidFill>
-                <a:srgbClr val="AAAAAA"/>
-              </a:solidFill>
-              <a:latin typeface="Calibri"/>
-            </a:endParaRPr>
+            <a:pPr algn="l">
+              <a:spcAft>
+                <a:spcPts val="700"/>
+              </a:spcAft>
+            </a:pPr>
+            <a:r>
+              <a:rPr sz="1800" b="1">
+                <a:solidFill>
+                  <a:srgbClr val="F46E32"/>
+                </a:solidFill>
+                <a:latin typeface="Calibri"/>
+              </a:rPr>
+              <a:t>▸  RAG grounds LLMs and kills hallucinations</a:t>
+            </a:r>
+            <a:r>
+              <a:rPr sz="1800">
+                <a:solidFill>
+                  <a:srgbClr val="FFFFFF"/>
+                </a:solidFill>
+                <a:latin typeface="Calibri"/>
+              </a:rPr>
+              <a:t> — but only if retrieval is good</a:t>
+            </a:r>
+          </a:p>
+          <a:p>
+            <a:pPr algn="l">
+              <a:spcAft>
+                <a:spcPts val="700"/>
+              </a:spcAft>
+            </a:pPr>
+            <a:r>
+              <a:rPr sz="1800" b="1">
+                <a:solidFill>
+                  <a:srgbClr val="F46E32"/>
+                </a:solidFill>
+                <a:latin typeface="Calibri"/>
+              </a:rPr>
+              <a:t>▸  Hybrid retrieval (Dense + BM25 + RRF)</a:t>
+            </a:r>
+            <a:r>
+              <a:rPr sz="1800">
+                <a:solidFill>
+                  <a:srgbClr val="FFFFFF"/>
+                </a:solidFill>
+                <a:latin typeface="Calibri"/>
+              </a:rPr>
+              <a:t> is robust because dense and sparse fail differently</a:t>
+            </a:r>
+          </a:p>
+          <a:p>
+            <a:pPr algn="l">
+              <a:spcAft>
+                <a:spcPts val="700"/>
+              </a:spcAft>
+            </a:pPr>
+            <a:r>
+              <a:rPr sz="1800" b="1">
+                <a:solidFill>
+                  <a:srgbClr val="F46E32"/>
+                </a:solidFill>
+                <a:latin typeface="Calibri"/>
+              </a:rPr>
+              <a:t>▸  Reciprocal Rank Fusion</a:t>
+            </a:r>
+            <a:r>
+              <a:rPr sz="1800">
+                <a:solidFill>
+                  <a:srgbClr val="FFFFFF"/>
+                </a:solidFill>
+                <a:latin typeface="Calibri"/>
+              </a:rPr>
+              <a:t> needs no score calibration and is trivially extensible</a:t>
+            </a:r>
+          </a:p>
+          <a:p>
+            <a:pPr algn="l">
+              <a:spcAft>
+                <a:spcPts val="700"/>
+              </a:spcAft>
+            </a:pPr>
+            <a:r>
+              <a:rPr sz="1800" b="1">
+                <a:solidFill>
+                  <a:srgbClr val="F46E32"/>
+                </a:solidFill>
+                <a:latin typeface="Calibri"/>
+              </a:rPr>
+              <a:t>▸  A cross-encoder re-ranker is the cheapest big quality win</a:t>
+            </a:r>
+            <a:r>
+              <a:rPr sz="1800">
+                <a:solidFill>
+                  <a:srgbClr val="FFFFFF"/>
+                </a:solidFill>
+                <a:latin typeface="Calibri"/>
+              </a:rPr>
+              <a:t> you can add to a working RAG system</a:t>
+            </a:r>
+          </a:p>
+          <a:p>
+            <a:pPr algn="l">
+              <a:spcAft>
+                <a:spcPts val="700"/>
+              </a:spcAft>
+            </a:pPr>
+            <a:r>
+              <a:rPr sz="1800" b="1">
+                <a:solidFill>
+                  <a:srgbClr val="F46E32"/>
+                </a:solidFill>
+                <a:latin typeface="Calibri"/>
+              </a:rPr>
+              <a:t>▸  Two-stage retrieval</a:t>
+            </a:r>
+            <a:r>
+              <a:rPr sz="1800">
+                <a:solidFill>
+                  <a:srgbClr val="FFFFFF"/>
+                </a:solidFill>
+                <a:latin typeface="Calibri"/>
+              </a:rPr>
+              <a:t> = fast recall (bi-encoder) + sharp precision (cross-encoder)</a:t>
+            </a:r>
+          </a:p>
+          <a:p>
+            <a:pPr algn="l">
+              <a:spcAft>
+                <a:spcPts val="700"/>
+              </a:spcAft>
+            </a:pPr>
+            <a:r>
+              <a:rPr sz="1800" b="1">
+                <a:solidFill>
+                  <a:srgbClr val="F46E32"/>
+                </a:solidFill>
+                <a:latin typeface="Calibri"/>
+              </a:rPr>
+              <a:t>▸  Custom metrics (CUS, ACS)</a:t>
+            </a:r>
+            <a:r>
+              <a:rPr sz="1800">
+                <a:solidFill>
+                  <a:srgbClr val="FFFFFF"/>
+                </a:solidFill>
+                <a:latin typeface="Calibri"/>
+              </a:rPr>
+              <a:t> reveal answer-quality issues that MRR alone hides</a:t>
+            </a:r>
+          </a:p>
+          <a:p>
+            <a:pPr algn="l">
+              <a:spcAft>
+                <a:spcPts val="700"/>
+              </a:spcAft>
+            </a:pPr>
+            <a:r>
+              <a:rPr sz="1800" b="1">
+                <a:solidFill>
+                  <a:srgbClr val="F46E32"/>
+                </a:solidFill>
+                <a:latin typeface="Calibri"/>
+              </a:rPr>
+              <a:t>▸  All of this runs on CPU with open models</a:t>
+            </a:r>
+            <a:r>
+              <a:rPr sz="1800">
+                <a:solidFill>
+                  <a:srgbClr val="FFFFFF"/>
+                </a:solidFill>
+                <a:latin typeface="Calibri"/>
+              </a:rPr>
+              <a:t> — no API keys, no vendor lock-in</a:t>
+            </a:r>
+          </a:p>
+          <a:p>
+            <a:pPr algn="l">
+              <a:spcAft>
+                <a:spcPts val="700"/>
+              </a:spcAft>
+            </a:pPr>
+            <a:r>
+              <a:rPr sz="1800" b="1">
+                <a:solidFill>
+                  <a:srgbClr val="F46E32"/>
+                </a:solidFill>
+                <a:latin typeface="Calibri"/>
+              </a:rPr>
+              <a:t>▸  Plan for production from day one</a:t>
+            </a:r>
+            <a:r>
+              <a:rPr sz="1800">
+                <a:solidFill>
+                  <a:srgbClr val="FFFFFF"/>
+                </a:solidFill>
+                <a:latin typeface="Calibri"/>
+              </a:rPr>
+              <a:t> — observability, evaluation harness, fallbacks</a:t>
+            </a:r>
           </a:p>
         </p:txBody>
       </p:sp>
@@ -17162,8 +18375,8 @@
         </p:nvSpPr>
         <p:spPr>
           <a:xfrm>
-            <a:off x="640080" y="5120640"/>
-            <a:ext cx="10972800" cy="457200"/>
+            <a:off x="365760" y="6446520"/>
+            <a:ext cx="11887200" cy="365760"/>
           </a:xfrm>
           <a:prstGeom prst="rect">
             <a:avLst/>
@@ -17171,20 +18384,52 @@
           <a:noFill/>
         </p:spPr>
         <p:txBody>
-          <a:bodyPr wrap="square" lIns="45720" rIns="45720">
+          <a:bodyPr wrap="none" lIns="0" rIns="0">
             <a:spAutoFit/>
           </a:bodyPr>
           <a:lstStyle/>
           <a:p>
-            <a:pPr algn="ctr"/>
-            <a:r>
-              <a:rPr sz="1600" b="0">
+            <a:r>
+              <a:rPr sz="1200">
                 <a:solidFill>
                   <a:srgbClr val="AAAAAA"/>
                 </a:solidFill>
-                <a:latin typeface="Calibri"/>
-              </a:rPr>
-              <a:t>Katiki Ravindra Babu  •  Strategic Technology Advisor, Vriksha.ai</a:t>
+              </a:rPr>
+              <a:t>DataHour  •  Hybrid RAG with Re-Ranker  •  Ravindra Babu Katiki</a:t>
+            </a:r>
+          </a:p>
+        </p:txBody>
+      </p:sp>
+      <p:sp>
+        <p:nvSpPr>
+          <p:cNvPr id="7" name="TextBox 6"/>
+          <p:cNvSpPr txBox="1"/>
+          <p:nvPr/>
+        </p:nvSpPr>
+        <p:spPr>
+          <a:xfrm>
+            <a:off x="11338560" y="6446520"/>
+            <a:ext cx="731520" cy="365760"/>
+          </a:xfrm>
+          <a:prstGeom prst="rect">
+            <a:avLst/>
+          </a:prstGeom>
+          <a:noFill/>
+        </p:spPr>
+        <p:txBody>
+          <a:bodyPr wrap="none">
+            <a:spAutoFit/>
+          </a:bodyPr>
+          <a:lstStyle/>
+          <a:p>
+            <a:pPr algn="r"/>
+            <a:r>
+              <a:rPr sz="1000">
+                <a:solidFill>
+                  <a:srgbClr val="AAAAAA"/>
+                </a:solidFill>
+              </a:rPr>
+              <a:t>30</a:t>
             </a:r>
           </a:p>
         </p:txBody>
@@ -17198,7 +18443,7 @@
 </file>
 
 <file path=ppt/slides/slide31.xml><?xml version="1.0" encoding="utf-8"?>
-<p:sld xmlns:a="http://schemas.openxmlformats.org/drawingml/2006/main" xmlns:p="http://schemas.openxmlformats.org/presentationml/2006/main" xmlns:r="http://schemas.openxmlformats.org/officeDocument/2006/relationships">
+<p:sld xmlns:a="http://schemas.openxmlformats.org/drawingml/2006/main" xmlns:r="http://schemas.openxmlformats.org/officeDocument/2006/relationships" xmlns:p="http://schemas.openxmlformats.org/presentationml/2006/main">
   <p:cSld>
     <p:spTree>
       <p:nvGrpSpPr>
@@ -17206,7 +18451,14 @@
         <p:cNvGrpSpPr/>
         <p:nvPr/>
       </p:nvGrpSpPr>
-      <p:grpSpPr/>
+      <p:grpSpPr>
+        <a:xfrm>
+          <a:off x="0" y="0"/>
+          <a:ext cx="0" cy="0"/>
+          <a:chOff x="0" y="0"/>
+          <a:chExt cx="0" cy="0"/>
+        </a:xfrm>
+      </p:grpSpPr>
       <p:sp>
         <p:nvSpPr>
           <p:cNvPr id="2" name="Rectangle 1"/>
@@ -17216,7 +18468,7 @@
         <p:spPr>
           <a:xfrm>
             <a:off x="0" y="0"/>
-            <a:ext cx="12192000" cy="6858000"/>
+            <a:ext cx="12191695" cy="6858000"/>
           </a:xfrm>
           <a:prstGeom prst="rect">
             <a:avLst/>
@@ -17247,6 +18499,7 @@
           <a:lstStyle/>
           <a:p>
             <a:pPr algn="ctr"/>
+            <a:endParaRPr/>
           </a:p>
         </p:txBody>
       </p:sp>
@@ -17267,7 +18520,7 @@
           <a:noFill/>
         </p:spPr>
         <p:txBody>
-          <a:bodyPr wrap="square">
+          <a:bodyPr wrap="square" lIns="45720" rIns="45720">
             <a:spAutoFit/>
           </a:bodyPr>
           <a:lstStyle/>
@@ -17280,7 +18533,7 @@
                 </a:solidFill>
                 <a:latin typeface="Calibri"/>
               </a:rPr>
-              <a:t>When to Use What — Decision Guide</a:t>
+              <a:t>Closing Statement</a:t>
             </a:r>
           </a:p>
         </p:txBody>
@@ -17325,6 +18578,7 @@
           <a:lstStyle/>
           <a:p>
             <a:pPr algn="ctr"/>
+            <a:endParaRPr/>
           </a:p>
         </p:txBody>
       </p:sp>
@@ -17336,1446 +18590,8 @@
         </p:nvSpPr>
         <p:spPr>
           <a:xfrm>
-            <a:off x="457200" y="1188720"/>
-            <a:ext cx="11430000" cy="365760"/>
-          </a:xfrm>
-          <a:prstGeom prst="rect">
-            <a:avLst/>
-          </a:prstGeom>
-          <a:noFill/>
-        </p:spPr>
-        <p:txBody>
-          <a:bodyPr wrap="square">
-            <a:spAutoFit/>
-          </a:bodyPr>
-          <a:lstStyle/>
-          <a:p>
-            <a:pPr algn="l"/>
-            <a:r>
-              <a:rPr sz="1400" b="0">
-                <a:solidFill>
-                  <a:srgbClr val="AAAAAA"/>
-                </a:solidFill>
-                <a:latin typeface="Calibri"/>
-              </a:rPr>
-              <a:t>Different query types deserve different retrieval stacks.</a:t>
-            </a:r>
-          </a:p>
-        </p:txBody>
-      </p:sp>
-      <p:sp>
-        <p:nvSpPr>
-          <p:cNvPr id="6" name="Rectangle 5"/>
-          <p:cNvSpPr/>
-          <p:nvPr/>
-        </p:nvSpPr>
-        <p:spPr>
-          <a:xfrm>
-            <a:off x="457200" y="1645920"/>
-            <a:ext cx="4754880" cy="530352"/>
-          </a:xfrm>
-          <a:prstGeom prst="rect">
-            <a:avLst/>
-          </a:prstGeom>
-          <a:solidFill>
-            <a:srgbClr val="F46E32"/>
-          </a:solidFill>
-          <a:ln>
-            <a:solidFill>
-              <a:srgbClr val="F46E32"/>
-            </a:solidFill>
-          </a:ln>
-        </p:spPr>
-        <p:style>
-          <a:lnRef idx="1">
-            <a:schemeClr val="accent1"/>
-          </a:lnRef>
-          <a:fillRef idx="3">
-            <a:schemeClr val="accent1"/>
-          </a:fillRef>
-          <a:effectRef idx="2">
-            <a:schemeClr val="accent1"/>
-          </a:effectRef>
-          <a:fontRef idx="minor">
-            <a:schemeClr val="lt1"/>
-          </a:fontRef>
-        </p:style>
-        <p:txBody>
-          <a:bodyPr rtlCol="0" anchor="ctr"/>
-          <a:lstStyle/>
-          <a:p>
-            <a:pPr algn="ctr"/>
-            <a:r>
-              <a:rPr sz="1400" b="1">
-                <a:solidFill>
-                  <a:srgbClr val="FFFFFF"/>
-                </a:solidFill>
-              </a:rPr>
-              <a:t>Your situation</a:t>
-            </a:r>
-          </a:p>
-        </p:txBody>
-      </p:sp>
-      <p:sp>
-        <p:nvSpPr>
-          <p:cNvPr id="7" name="Rectangle 6"/>
-          <p:cNvSpPr/>
-          <p:nvPr/>
-        </p:nvSpPr>
-        <p:spPr>
-          <a:xfrm>
-            <a:off x="5212080" y="1645920"/>
-            <a:ext cx="3474720" cy="530352"/>
-          </a:xfrm>
-          <a:prstGeom prst="rect">
-            <a:avLst/>
-          </a:prstGeom>
-          <a:solidFill>
-            <a:srgbClr val="F46E32"/>
-          </a:solidFill>
-          <a:ln>
-            <a:solidFill>
-              <a:srgbClr val="F46E32"/>
-            </a:solidFill>
-          </a:ln>
-        </p:spPr>
-        <p:style>
-          <a:lnRef idx="1">
-            <a:schemeClr val="accent1"/>
-          </a:lnRef>
-          <a:fillRef idx="3">
-            <a:schemeClr val="accent1"/>
-          </a:fillRef>
-          <a:effectRef idx="2">
-            <a:schemeClr val="accent1"/>
-          </a:effectRef>
-          <a:fontRef idx="minor">
-            <a:schemeClr val="lt1"/>
-          </a:fontRef>
-        </p:style>
-        <p:txBody>
-          <a:bodyPr rtlCol="0" anchor="ctr"/>
-          <a:lstStyle/>
-          <a:p>
-            <a:pPr algn="ctr"/>
-            <a:r>
-              <a:rPr sz="1400" b="1">
-                <a:solidFill>
-                  <a:srgbClr val="FFFFFF"/>
-                </a:solidFill>
-              </a:rPr>
-              <a:t>Best stack</a:t>
-            </a:r>
-          </a:p>
-        </p:txBody>
-      </p:sp>
-      <p:sp>
-        <p:nvSpPr>
-          <p:cNvPr id="8" name="Rectangle 7"/>
-          <p:cNvSpPr/>
-          <p:nvPr/>
-        </p:nvSpPr>
-        <p:spPr>
-          <a:xfrm>
-            <a:off x="8686800" y="1645920"/>
-            <a:ext cx="3200400" cy="530352"/>
-          </a:xfrm>
-          <a:prstGeom prst="rect">
-            <a:avLst/>
-          </a:prstGeom>
-          <a:solidFill>
-            <a:srgbClr val="F46E32"/>
-          </a:solidFill>
-          <a:ln>
-            <a:solidFill>
-              <a:srgbClr val="F46E32"/>
-            </a:solidFill>
-          </a:ln>
-        </p:spPr>
-        <p:style>
-          <a:lnRef idx="1">
-            <a:schemeClr val="accent1"/>
-          </a:lnRef>
-          <a:fillRef idx="3">
-            <a:schemeClr val="accent1"/>
-          </a:fillRef>
-          <a:effectRef idx="2">
-            <a:schemeClr val="accent1"/>
-          </a:effectRef>
-          <a:fontRef idx="minor">
-            <a:schemeClr val="lt1"/>
-          </a:fontRef>
-        </p:style>
-        <p:txBody>
-          <a:bodyPr rtlCol="0" anchor="ctr"/>
-          <a:lstStyle/>
-          <a:p>
-            <a:pPr algn="ctr"/>
-            <a:r>
-              <a:rPr sz="1400" b="1">
-                <a:solidFill>
-                  <a:srgbClr val="FFFFFF"/>
-                </a:solidFill>
-              </a:rPr>
-              <a:t>Why</a:t>
-            </a:r>
-          </a:p>
-        </p:txBody>
-      </p:sp>
-      <p:sp>
-        <p:nvSpPr>
-          <p:cNvPr id="9" name="Rectangle 8"/>
-          <p:cNvSpPr/>
-          <p:nvPr/>
-        </p:nvSpPr>
-        <p:spPr>
-          <a:xfrm>
-            <a:off x="457200" y="2176272"/>
-            <a:ext cx="4754880" cy="530352"/>
-          </a:xfrm>
-          <a:prstGeom prst="rect">
-            <a:avLst/>
-          </a:prstGeom>
-          <a:solidFill>
-            <a:srgbClr val="221B1F"/>
-          </a:solidFill>
-          <a:ln w="6350">
-            <a:solidFill>
-              <a:srgbClr val="F46E32"/>
-            </a:solidFill>
-          </a:ln>
-        </p:spPr>
-        <p:style>
-          <a:lnRef idx="1">
-            <a:schemeClr val="accent1"/>
-          </a:lnRef>
-          <a:fillRef idx="3">
-            <a:schemeClr val="accent1"/>
-          </a:fillRef>
-          <a:effectRef idx="2">
-            <a:schemeClr val="accent1"/>
-          </a:effectRef>
-          <a:fontRef idx="minor">
-            <a:schemeClr val="lt1"/>
-          </a:fontRef>
-        </p:style>
-        <p:txBody>
-          <a:bodyPr rtlCol="0" anchor="ctr"/>
-          <a:lstStyle/>
-          <a:p>
-            <a:pPr algn="ctr"/>
-            <a:r>
-              <a:rPr sz="1300">
-                <a:solidFill>
-                  <a:srgbClr val="FFFFFF"/>
-                </a:solidFill>
-              </a:rPr>
-              <a:t>Small corpus (&lt;1k docs), conceptual questions</a:t>
-            </a:r>
-          </a:p>
-        </p:txBody>
-      </p:sp>
-      <p:sp>
-        <p:nvSpPr>
-          <p:cNvPr id="10" name="Rectangle 9"/>
-          <p:cNvSpPr/>
-          <p:nvPr/>
-        </p:nvSpPr>
-        <p:spPr>
-          <a:xfrm>
-            <a:off x="5212080" y="2176272"/>
-            <a:ext cx="3474720" cy="530352"/>
-          </a:xfrm>
-          <a:prstGeom prst="rect">
-            <a:avLst/>
-          </a:prstGeom>
-          <a:solidFill>
-            <a:srgbClr val="221B1F"/>
-          </a:solidFill>
-          <a:ln w="6350">
-            <a:solidFill>
-              <a:srgbClr val="F46E32"/>
-            </a:solidFill>
-          </a:ln>
-        </p:spPr>
-        <p:style>
-          <a:lnRef idx="1">
-            <a:schemeClr val="accent1"/>
-          </a:lnRef>
-          <a:fillRef idx="3">
-            <a:schemeClr val="accent1"/>
-          </a:fillRef>
-          <a:effectRef idx="2">
-            <a:schemeClr val="accent1"/>
-          </a:effectRef>
-          <a:fontRef idx="minor">
-            <a:schemeClr val="lt1"/>
-          </a:fontRef>
-        </p:style>
-        <p:txBody>
-          <a:bodyPr rtlCol="0" anchor="ctr"/>
-          <a:lstStyle/>
-          <a:p>
-            <a:pPr algn="ctr"/>
-            <a:r>
-              <a:rPr sz="1300">
-                <a:solidFill>
-                  <a:srgbClr val="FFFFFF"/>
-                </a:solidFill>
-              </a:rPr>
-              <a:t>Dense only</a:t>
-            </a:r>
-          </a:p>
-        </p:txBody>
-      </p:sp>
-      <p:sp>
-        <p:nvSpPr>
-          <p:cNvPr id="11" name="Rectangle 10"/>
-          <p:cNvSpPr/>
-          <p:nvPr/>
-        </p:nvSpPr>
-        <p:spPr>
-          <a:xfrm>
-            <a:off x="8686800" y="2176272"/>
-            <a:ext cx="3200400" cy="530352"/>
-          </a:xfrm>
-          <a:prstGeom prst="rect">
-            <a:avLst/>
-          </a:prstGeom>
-          <a:solidFill>
-            <a:srgbClr val="221B1F"/>
-          </a:solidFill>
-          <a:ln w="6350">
-            <a:solidFill>
-              <a:srgbClr val="F46E32"/>
-            </a:solidFill>
-          </a:ln>
-        </p:spPr>
-        <p:style>
-          <a:lnRef idx="1">
-            <a:schemeClr val="accent1"/>
-          </a:lnRef>
-          <a:fillRef idx="3">
-            <a:schemeClr val="accent1"/>
-          </a:fillRef>
-          <a:effectRef idx="2">
-            <a:schemeClr val="accent1"/>
-          </a:effectRef>
-          <a:fontRef idx="minor">
-            <a:schemeClr val="lt1"/>
-          </a:fontRef>
-        </p:style>
-        <p:txBody>
-          <a:bodyPr rtlCol="0" anchor="ctr"/>
-          <a:lstStyle/>
-          <a:p>
-            <a:pPr algn="ctr"/>
-            <a:r>
-              <a:rPr sz="1300">
-                <a:solidFill>
-                  <a:srgbClr val="FFFFFF"/>
-                </a:solidFill>
-              </a:rPr>
-              <a:t>Simpler, faster, recall is easy</a:t>
-            </a:r>
-          </a:p>
-        </p:txBody>
-      </p:sp>
-      <p:sp>
-        <p:nvSpPr>
-          <p:cNvPr id="12" name="Rectangle 11"/>
-          <p:cNvSpPr/>
-          <p:nvPr/>
-        </p:nvSpPr>
-        <p:spPr>
-          <a:xfrm>
-            <a:off x="457200" y="2706624"/>
-            <a:ext cx="4754880" cy="530352"/>
-          </a:xfrm>
-          <a:prstGeom prst="rect">
-            <a:avLst/>
-          </a:prstGeom>
-          <a:solidFill>
-            <a:srgbClr val="2A2125"/>
-          </a:solidFill>
-          <a:ln w="6350">
-            <a:solidFill>
-              <a:srgbClr val="F46E32"/>
-            </a:solidFill>
-          </a:ln>
-        </p:spPr>
-        <p:style>
-          <a:lnRef idx="1">
-            <a:schemeClr val="accent1"/>
-          </a:lnRef>
-          <a:fillRef idx="3">
-            <a:schemeClr val="accent1"/>
-          </a:fillRef>
-          <a:effectRef idx="2">
-            <a:schemeClr val="accent1"/>
-          </a:effectRef>
-          <a:fontRef idx="minor">
-            <a:schemeClr val="lt1"/>
-          </a:fontRef>
-        </p:style>
-        <p:txBody>
-          <a:bodyPr rtlCol="0" anchor="ctr"/>
-          <a:lstStyle/>
-          <a:p>
-            <a:pPr algn="ctr"/>
-            <a:r>
-              <a:rPr sz="1300">
-                <a:solidFill>
-                  <a:srgbClr val="FFFFFF"/>
-                </a:solidFill>
-              </a:rPr>
-              <a:t>Exact-match queries (IDs, codes, product SKUs)</a:t>
-            </a:r>
-          </a:p>
-        </p:txBody>
-      </p:sp>
-      <p:sp>
-        <p:nvSpPr>
-          <p:cNvPr id="13" name="Rectangle 12"/>
-          <p:cNvSpPr/>
-          <p:nvPr/>
-        </p:nvSpPr>
-        <p:spPr>
-          <a:xfrm>
-            <a:off x="5212080" y="2706624"/>
-            <a:ext cx="3474720" cy="530352"/>
-          </a:xfrm>
-          <a:prstGeom prst="rect">
-            <a:avLst/>
-          </a:prstGeom>
-          <a:solidFill>
-            <a:srgbClr val="2A2125"/>
-          </a:solidFill>
-          <a:ln w="6350">
-            <a:solidFill>
-              <a:srgbClr val="F46E32"/>
-            </a:solidFill>
-          </a:ln>
-        </p:spPr>
-        <p:style>
-          <a:lnRef idx="1">
-            <a:schemeClr val="accent1"/>
-          </a:lnRef>
-          <a:fillRef idx="3">
-            <a:schemeClr val="accent1"/>
-          </a:fillRef>
-          <a:effectRef idx="2">
-            <a:schemeClr val="accent1"/>
-          </a:effectRef>
-          <a:fontRef idx="minor">
-            <a:schemeClr val="lt1"/>
-          </a:fontRef>
-        </p:style>
-        <p:txBody>
-          <a:bodyPr rtlCol="0" anchor="ctr"/>
-          <a:lstStyle/>
-          <a:p>
-            <a:pPr algn="ctr"/>
-            <a:r>
-              <a:rPr sz="1300">
-                <a:solidFill>
-                  <a:srgbClr val="FFFFFF"/>
-                </a:solidFill>
-              </a:rPr>
-              <a:t>BM25 only</a:t>
-            </a:r>
-          </a:p>
-        </p:txBody>
-      </p:sp>
-      <p:sp>
-        <p:nvSpPr>
-          <p:cNvPr id="14" name="Rectangle 13"/>
-          <p:cNvSpPr/>
-          <p:nvPr/>
-        </p:nvSpPr>
-        <p:spPr>
-          <a:xfrm>
-            <a:off x="8686800" y="2706624"/>
-            <a:ext cx="3200400" cy="530352"/>
-          </a:xfrm>
-          <a:prstGeom prst="rect">
-            <a:avLst/>
-          </a:prstGeom>
-          <a:solidFill>
-            <a:srgbClr val="2A2125"/>
-          </a:solidFill>
-          <a:ln w="6350">
-            <a:solidFill>
-              <a:srgbClr val="F46E32"/>
-            </a:solidFill>
-          </a:ln>
-        </p:spPr>
-        <p:style>
-          <a:lnRef idx="1">
-            <a:schemeClr val="accent1"/>
-          </a:lnRef>
-          <a:fillRef idx="3">
-            <a:schemeClr val="accent1"/>
-          </a:fillRef>
-          <a:effectRef idx="2">
-            <a:schemeClr val="accent1"/>
-          </a:effectRef>
-          <a:fontRef idx="minor">
-            <a:schemeClr val="lt1"/>
-          </a:fontRef>
-        </p:style>
-        <p:txBody>
-          <a:bodyPr rtlCol="0" anchor="ctr"/>
-          <a:lstStyle/>
-          <a:p>
-            <a:pPr algn="ctr"/>
-            <a:r>
-              <a:rPr sz="1300">
-                <a:solidFill>
-                  <a:srgbClr val="FFFFFF"/>
-                </a:solidFill>
-              </a:rPr>
-              <a:t>Keyword precision beats semantic blur</a:t>
-            </a:r>
-          </a:p>
-        </p:txBody>
-      </p:sp>
-      <p:sp>
-        <p:nvSpPr>
-          <p:cNvPr id="15" name="Rectangle 14"/>
-          <p:cNvSpPr/>
-          <p:nvPr/>
-        </p:nvSpPr>
-        <p:spPr>
-          <a:xfrm>
-            <a:off x="457200" y="3236976"/>
-            <a:ext cx="4754880" cy="530352"/>
-          </a:xfrm>
-          <a:prstGeom prst="rect">
-            <a:avLst/>
-          </a:prstGeom>
-          <a:solidFill>
-            <a:srgbClr val="221B1F"/>
-          </a:solidFill>
-          <a:ln w="6350">
-            <a:solidFill>
-              <a:srgbClr val="F46E32"/>
-            </a:solidFill>
-          </a:ln>
-        </p:spPr>
-        <p:style>
-          <a:lnRef idx="1">
-            <a:schemeClr val="accent1"/>
-          </a:lnRef>
-          <a:fillRef idx="3">
-            <a:schemeClr val="accent1"/>
-          </a:fillRef>
-          <a:effectRef idx="2">
-            <a:schemeClr val="accent1"/>
-          </a:effectRef>
-          <a:fontRef idx="minor">
-            <a:schemeClr val="lt1"/>
-          </a:fontRef>
-        </p:style>
-        <p:txBody>
-          <a:bodyPr rtlCol="0" anchor="ctr"/>
-          <a:lstStyle/>
-          <a:p>
-            <a:pPr algn="ctr"/>
-            <a:r>
-              <a:rPr sz="1300">
-                <a:solidFill>
-                  <a:srgbClr val="FFFFFF"/>
-                </a:solidFill>
-              </a:rPr>
-              <a:t>Mixed query styles (most real systems)</a:t>
-            </a:r>
-          </a:p>
-        </p:txBody>
-      </p:sp>
-      <p:sp>
-        <p:nvSpPr>
-          <p:cNvPr id="16" name="Rectangle 15"/>
-          <p:cNvSpPr/>
-          <p:nvPr/>
-        </p:nvSpPr>
-        <p:spPr>
-          <a:xfrm>
-            <a:off x="5212080" y="3236976"/>
-            <a:ext cx="3474720" cy="530352"/>
-          </a:xfrm>
-          <a:prstGeom prst="rect">
-            <a:avLst/>
-          </a:prstGeom>
-          <a:solidFill>
-            <a:srgbClr val="221B1F"/>
-          </a:solidFill>
-          <a:ln w="6350">
-            <a:solidFill>
-              <a:srgbClr val="F46E32"/>
-            </a:solidFill>
-          </a:ln>
-        </p:spPr>
-        <p:style>
-          <a:lnRef idx="1">
-            <a:schemeClr val="accent1"/>
-          </a:lnRef>
-          <a:fillRef idx="3">
-            <a:schemeClr val="accent1"/>
-          </a:fillRef>
-          <a:effectRef idx="2">
-            <a:schemeClr val="accent1"/>
-          </a:effectRef>
-          <a:fontRef idx="minor">
-            <a:schemeClr val="lt1"/>
-          </a:fontRef>
-        </p:style>
-        <p:txBody>
-          <a:bodyPr rtlCol="0" anchor="ctr"/>
-          <a:lstStyle/>
-          <a:p>
-            <a:pPr algn="ctr"/>
-            <a:r>
-              <a:rPr sz="1300">
-                <a:solidFill>
-                  <a:srgbClr val="FFFFFF"/>
-                </a:solidFill>
-              </a:rPr>
-              <a:t>Hybrid (Dense + BM25 + RRF)</a:t>
-            </a:r>
-          </a:p>
-        </p:txBody>
-      </p:sp>
-      <p:sp>
-        <p:nvSpPr>
-          <p:cNvPr id="17" name="Rectangle 16"/>
-          <p:cNvSpPr/>
-          <p:nvPr/>
-        </p:nvSpPr>
-        <p:spPr>
-          <a:xfrm>
-            <a:off x="8686800" y="3236976"/>
-            <a:ext cx="3200400" cy="530352"/>
-          </a:xfrm>
-          <a:prstGeom prst="rect">
-            <a:avLst/>
-          </a:prstGeom>
-          <a:solidFill>
-            <a:srgbClr val="221B1F"/>
-          </a:solidFill>
-          <a:ln w="6350">
-            <a:solidFill>
-              <a:srgbClr val="F46E32"/>
-            </a:solidFill>
-          </a:ln>
-        </p:spPr>
-        <p:style>
-          <a:lnRef idx="1">
-            <a:schemeClr val="accent1"/>
-          </a:lnRef>
-          <a:fillRef idx="3">
-            <a:schemeClr val="accent1"/>
-          </a:fillRef>
-          <a:effectRef idx="2">
-            <a:schemeClr val="accent1"/>
-          </a:effectRef>
-          <a:fontRef idx="minor">
-            <a:schemeClr val="lt1"/>
-          </a:fontRef>
-        </p:style>
-        <p:txBody>
-          <a:bodyPr rtlCol="0" anchor="ctr"/>
-          <a:lstStyle/>
-          <a:p>
-            <a:pPr algn="ctr"/>
-            <a:r>
-              <a:rPr sz="1300">
-                <a:solidFill>
-                  <a:srgbClr val="FFFFFF"/>
-                </a:solidFill>
-              </a:rPr>
-              <a:t>Robust across paraphrases and exact terms</a:t>
-            </a:r>
-          </a:p>
-        </p:txBody>
-      </p:sp>
-      <p:sp>
-        <p:nvSpPr>
-          <p:cNvPr id="18" name="Rectangle 17"/>
-          <p:cNvSpPr/>
-          <p:nvPr/>
-        </p:nvSpPr>
-        <p:spPr>
-          <a:xfrm>
-            <a:off x="457200" y="3767328"/>
-            <a:ext cx="4754880" cy="530352"/>
-          </a:xfrm>
-          <a:prstGeom prst="rect">
-            <a:avLst/>
-          </a:prstGeom>
-          <a:solidFill>
-            <a:srgbClr val="2A2125"/>
-          </a:solidFill>
-          <a:ln w="6350">
-            <a:solidFill>
-              <a:srgbClr val="F46E32"/>
-            </a:solidFill>
-          </a:ln>
-        </p:spPr>
-        <p:style>
-          <a:lnRef idx="1">
-            <a:schemeClr val="accent1"/>
-          </a:lnRef>
-          <a:fillRef idx="3">
-            <a:schemeClr val="accent1"/>
-          </a:fillRef>
-          <a:effectRef idx="2">
-            <a:schemeClr val="accent1"/>
-          </a:effectRef>
-          <a:fontRef idx="minor">
-            <a:schemeClr val="lt1"/>
-          </a:fontRef>
-        </p:style>
-        <p:txBody>
-          <a:bodyPr rtlCol="0" anchor="ctr"/>
-          <a:lstStyle/>
-          <a:p>
-            <a:pPr algn="ctr"/>
-            <a:r>
-              <a:rPr sz="1300">
-                <a:solidFill>
-                  <a:srgbClr val="FFFFFF"/>
-                </a:solidFill>
-              </a:rPr>
-              <a:t>Quality matters more than latency</a:t>
-            </a:r>
-          </a:p>
-        </p:txBody>
-      </p:sp>
-      <p:sp>
-        <p:nvSpPr>
-          <p:cNvPr id="19" name="Rectangle 18"/>
-          <p:cNvSpPr/>
-          <p:nvPr/>
-        </p:nvSpPr>
-        <p:spPr>
-          <a:xfrm>
-            <a:off x="5212080" y="3767328"/>
-            <a:ext cx="3474720" cy="530352"/>
-          </a:xfrm>
-          <a:prstGeom prst="rect">
-            <a:avLst/>
-          </a:prstGeom>
-          <a:solidFill>
-            <a:srgbClr val="2A2125"/>
-          </a:solidFill>
-          <a:ln w="6350">
-            <a:solidFill>
-              <a:srgbClr val="F46E32"/>
-            </a:solidFill>
-          </a:ln>
-        </p:spPr>
-        <p:style>
-          <a:lnRef idx="1">
-            <a:schemeClr val="accent1"/>
-          </a:lnRef>
-          <a:fillRef idx="3">
-            <a:schemeClr val="accent1"/>
-          </a:fillRef>
-          <a:effectRef idx="2">
-            <a:schemeClr val="accent1"/>
-          </a:effectRef>
-          <a:fontRef idx="minor">
-            <a:schemeClr val="lt1"/>
-          </a:fontRef>
-        </p:style>
-        <p:txBody>
-          <a:bodyPr rtlCol="0" anchor="ctr"/>
-          <a:lstStyle/>
-          <a:p>
-            <a:pPr algn="ctr"/>
-            <a:r>
-              <a:rPr sz="1300">
-                <a:solidFill>
-                  <a:srgbClr val="FFFFFF"/>
-                </a:solidFill>
-              </a:rPr>
-              <a:t>Hybrid + Cross-Encoder Re-Ranker</a:t>
-            </a:r>
-          </a:p>
-        </p:txBody>
-      </p:sp>
-      <p:sp>
-        <p:nvSpPr>
-          <p:cNvPr id="20" name="Rectangle 19"/>
-          <p:cNvSpPr/>
-          <p:nvPr/>
-        </p:nvSpPr>
-        <p:spPr>
-          <a:xfrm>
-            <a:off x="8686800" y="3767328"/>
-            <a:ext cx="3200400" cy="530352"/>
-          </a:xfrm>
-          <a:prstGeom prst="rect">
-            <a:avLst/>
-          </a:prstGeom>
-          <a:solidFill>
-            <a:srgbClr val="2A2125"/>
-          </a:solidFill>
-          <a:ln w="6350">
-            <a:solidFill>
-              <a:srgbClr val="F46E32"/>
-            </a:solidFill>
-          </a:ln>
-        </p:spPr>
-        <p:style>
-          <a:lnRef idx="1">
-            <a:schemeClr val="accent1"/>
-          </a:lnRef>
-          <a:fillRef idx="3">
-            <a:schemeClr val="accent1"/>
-          </a:fillRef>
-          <a:effectRef idx="2">
-            <a:schemeClr val="accent1"/>
-          </a:effectRef>
-          <a:fontRef idx="minor">
-            <a:schemeClr val="lt1"/>
-          </a:fontRef>
-        </p:style>
-        <p:txBody>
-          <a:bodyPr rtlCol="0" anchor="ctr"/>
-          <a:lstStyle/>
-          <a:p>
-            <a:pPr algn="ctr"/>
-            <a:r>
-              <a:rPr sz="1300">
-                <a:solidFill>
-                  <a:srgbClr val="FFFFFF"/>
-                </a:solidFill>
-              </a:rPr>
-              <a:t>Highest precision per millisecond</a:t>
-            </a:r>
-          </a:p>
-        </p:txBody>
-      </p:sp>
-      <p:sp>
-        <p:nvSpPr>
-          <p:cNvPr id="21" name="Rectangle 20"/>
-          <p:cNvSpPr/>
-          <p:nvPr/>
-        </p:nvSpPr>
-        <p:spPr>
-          <a:xfrm>
-            <a:off x="457200" y="4297680"/>
-            <a:ext cx="4754880" cy="530352"/>
-          </a:xfrm>
-          <a:prstGeom prst="rect">
-            <a:avLst/>
-          </a:prstGeom>
-          <a:solidFill>
-            <a:srgbClr val="221B1F"/>
-          </a:solidFill>
-          <a:ln w="6350">
-            <a:solidFill>
-              <a:srgbClr val="F46E32"/>
-            </a:solidFill>
-          </a:ln>
-        </p:spPr>
-        <p:style>
-          <a:lnRef idx="1">
-            <a:schemeClr val="accent1"/>
-          </a:lnRef>
-          <a:fillRef idx="3">
-            <a:schemeClr val="accent1"/>
-          </a:fillRef>
-          <a:effectRef idx="2">
-            <a:schemeClr val="accent1"/>
-          </a:effectRef>
-          <a:fontRef idx="minor">
-            <a:schemeClr val="lt1"/>
-          </a:fontRef>
-        </p:style>
-        <p:txBody>
-          <a:bodyPr rtlCol="0" anchor="ctr"/>
-          <a:lstStyle/>
-          <a:p>
-            <a:pPr algn="ctr"/>
-            <a:r>
-              <a:rPr sz="1300">
-                <a:solidFill>
-                  <a:srgbClr val="FFFFFF"/>
-                </a:solidFill>
-              </a:rPr>
-              <a:t>Highly structured data (relational records)</a:t>
-            </a:r>
-          </a:p>
-        </p:txBody>
-      </p:sp>
-      <p:sp>
-        <p:nvSpPr>
-          <p:cNvPr id="22" name="Rectangle 21"/>
-          <p:cNvSpPr/>
-          <p:nvPr/>
-        </p:nvSpPr>
-        <p:spPr>
-          <a:xfrm>
-            <a:off x="5212080" y="4297680"/>
-            <a:ext cx="3474720" cy="530352"/>
-          </a:xfrm>
-          <a:prstGeom prst="rect">
-            <a:avLst/>
-          </a:prstGeom>
-          <a:solidFill>
-            <a:srgbClr val="221B1F"/>
-          </a:solidFill>
-          <a:ln w="6350">
-            <a:solidFill>
-              <a:srgbClr val="F46E32"/>
-            </a:solidFill>
-          </a:ln>
-        </p:spPr>
-        <p:style>
-          <a:lnRef idx="1">
-            <a:schemeClr val="accent1"/>
-          </a:lnRef>
-          <a:fillRef idx="3">
-            <a:schemeClr val="accent1"/>
-          </a:fillRef>
-          <a:effectRef idx="2">
-            <a:schemeClr val="accent1"/>
-          </a:effectRef>
-          <a:fontRef idx="minor">
-            <a:schemeClr val="lt1"/>
-          </a:fontRef>
-        </p:style>
-        <p:txBody>
-          <a:bodyPr rtlCol="0" anchor="ctr"/>
-          <a:lstStyle/>
-          <a:p>
-            <a:pPr algn="ctr"/>
-            <a:r>
-              <a:rPr sz="1300">
-                <a:solidFill>
-                  <a:srgbClr val="FFFFFF"/>
-                </a:solidFill>
-              </a:rPr>
-              <a:t>SQL / SPARQL, not RAG</a:t>
-            </a:r>
-          </a:p>
-        </p:txBody>
-      </p:sp>
-      <p:sp>
-        <p:nvSpPr>
-          <p:cNvPr id="23" name="Rectangle 22"/>
-          <p:cNvSpPr/>
-          <p:nvPr/>
-        </p:nvSpPr>
-        <p:spPr>
-          <a:xfrm>
-            <a:off x="8686800" y="4297680"/>
-            <a:ext cx="3200400" cy="530352"/>
-          </a:xfrm>
-          <a:prstGeom prst="rect">
-            <a:avLst/>
-          </a:prstGeom>
-          <a:solidFill>
-            <a:srgbClr val="221B1F"/>
-          </a:solidFill>
-          <a:ln w="6350">
-            <a:solidFill>
-              <a:srgbClr val="F46E32"/>
-            </a:solidFill>
-          </a:ln>
-        </p:spPr>
-        <p:style>
-          <a:lnRef idx="1">
-            <a:schemeClr val="accent1"/>
-          </a:lnRef>
-          <a:fillRef idx="3">
-            <a:schemeClr val="accent1"/>
-          </a:fillRef>
-          <a:effectRef idx="2">
-            <a:schemeClr val="accent1"/>
-          </a:effectRef>
-          <a:fontRef idx="minor">
-            <a:schemeClr val="lt1"/>
-          </a:fontRef>
-        </p:style>
-        <p:txBody>
-          <a:bodyPr rtlCol="0" anchor="ctr"/>
-          <a:lstStyle/>
-          <a:p>
-            <a:pPr algn="ctr"/>
-            <a:r>
-              <a:rPr sz="1300">
-                <a:solidFill>
-                  <a:srgbClr val="FFFFFF"/>
-                </a:solidFill>
-              </a:rPr>
-              <a:t>Structured query beats vector search</a:t>
-            </a:r>
-          </a:p>
-        </p:txBody>
-      </p:sp>
-      <p:sp>
-        <p:nvSpPr>
-          <p:cNvPr id="24" name="Rectangle 23"/>
-          <p:cNvSpPr/>
-          <p:nvPr/>
-        </p:nvSpPr>
-        <p:spPr>
-          <a:xfrm>
-            <a:off x="457200" y="4828032"/>
-            <a:ext cx="4754880" cy="530352"/>
-          </a:xfrm>
-          <a:prstGeom prst="rect">
-            <a:avLst/>
-          </a:prstGeom>
-          <a:solidFill>
-            <a:srgbClr val="2A2125"/>
-          </a:solidFill>
-          <a:ln w="6350">
-            <a:solidFill>
-              <a:srgbClr val="F46E32"/>
-            </a:solidFill>
-          </a:ln>
-        </p:spPr>
-        <p:style>
-          <a:lnRef idx="1">
-            <a:schemeClr val="accent1"/>
-          </a:lnRef>
-          <a:fillRef idx="3">
-            <a:schemeClr val="accent1"/>
-          </a:fillRef>
-          <a:effectRef idx="2">
-            <a:schemeClr val="accent1"/>
-          </a:effectRef>
-          <a:fontRef idx="minor">
-            <a:schemeClr val="lt1"/>
-          </a:fontRef>
-        </p:style>
-        <p:txBody>
-          <a:bodyPr rtlCol="0" anchor="ctr"/>
-          <a:lstStyle/>
-          <a:p>
-            <a:pPr algn="ctr"/>
-            <a:r>
-              <a:rPr sz="1300">
-                <a:solidFill>
-                  <a:srgbClr val="FFFFFF"/>
-                </a:solidFill>
-              </a:rPr>
-              <a:t>Sub-100ms p99 latency budget</a:t>
-            </a:r>
-          </a:p>
-        </p:txBody>
-      </p:sp>
-      <p:sp>
-        <p:nvSpPr>
-          <p:cNvPr id="25" name="Rectangle 24"/>
-          <p:cNvSpPr/>
-          <p:nvPr/>
-        </p:nvSpPr>
-        <p:spPr>
-          <a:xfrm>
-            <a:off x="5212080" y="4828032"/>
-            <a:ext cx="3474720" cy="530352"/>
-          </a:xfrm>
-          <a:prstGeom prst="rect">
-            <a:avLst/>
-          </a:prstGeom>
-          <a:solidFill>
-            <a:srgbClr val="2A2125"/>
-          </a:solidFill>
-          <a:ln w="6350">
-            <a:solidFill>
-              <a:srgbClr val="F46E32"/>
-            </a:solidFill>
-          </a:ln>
-        </p:spPr>
-        <p:style>
-          <a:lnRef idx="1">
-            <a:schemeClr val="accent1"/>
-          </a:lnRef>
-          <a:fillRef idx="3">
-            <a:schemeClr val="accent1"/>
-          </a:fillRef>
-          <a:effectRef idx="2">
-            <a:schemeClr val="accent1"/>
-          </a:effectRef>
-          <a:fontRef idx="minor">
-            <a:schemeClr val="lt1"/>
-          </a:fontRef>
-        </p:style>
-        <p:txBody>
-          <a:bodyPr rtlCol="0" anchor="ctr"/>
-          <a:lstStyle/>
-          <a:p>
-            <a:pPr algn="ctr"/>
-            <a:r>
-              <a:rPr sz="1300">
-                <a:solidFill>
-                  <a:srgbClr val="FFFFFF"/>
-                </a:solidFill>
-              </a:rPr>
-              <a:t>Dense only, no reranker</a:t>
-            </a:r>
-          </a:p>
-        </p:txBody>
-      </p:sp>
-      <p:sp>
-        <p:nvSpPr>
-          <p:cNvPr id="26" name="Rectangle 25"/>
-          <p:cNvSpPr/>
-          <p:nvPr/>
-        </p:nvSpPr>
-        <p:spPr>
-          <a:xfrm>
-            <a:off x="8686800" y="4828032"/>
-            <a:ext cx="3200400" cy="530352"/>
-          </a:xfrm>
-          <a:prstGeom prst="rect">
-            <a:avLst/>
-          </a:prstGeom>
-          <a:solidFill>
-            <a:srgbClr val="2A2125"/>
-          </a:solidFill>
-          <a:ln w="6350">
-            <a:solidFill>
-              <a:srgbClr val="F46E32"/>
-            </a:solidFill>
-          </a:ln>
-        </p:spPr>
-        <p:style>
-          <a:lnRef idx="1">
-            <a:schemeClr val="accent1"/>
-          </a:lnRef>
-          <a:fillRef idx="3">
-            <a:schemeClr val="accent1"/>
-          </a:fillRef>
-          <a:effectRef idx="2">
-            <a:schemeClr val="accent1"/>
-          </a:effectRef>
-          <a:fontRef idx="minor">
-            <a:schemeClr val="lt1"/>
-          </a:fontRef>
-        </p:style>
-        <p:txBody>
-          <a:bodyPr rtlCol="0" anchor="ctr"/>
-          <a:lstStyle/>
-          <a:p>
-            <a:pPr algn="ctr"/>
-            <a:r>
-              <a:rPr sz="1300">
-                <a:solidFill>
-                  <a:srgbClr val="FFFFFF"/>
-                </a:solidFill>
-              </a:rPr>
-              <a:t>Reranker adds 300–800ms</a:t>
-            </a:r>
-          </a:p>
-        </p:txBody>
-      </p:sp>
-      <p:sp>
-        <p:nvSpPr>
-          <p:cNvPr id="27" name="TextBox 26"/>
-          <p:cNvSpPr txBox="1"/>
-          <p:nvPr/>
-        </p:nvSpPr>
-        <p:spPr>
-          <a:xfrm>
-            <a:off x="640080" y="5852160"/>
-            <a:ext cx="10972800" cy="457200"/>
-          </a:xfrm>
-          <a:prstGeom prst="rect">
-            <a:avLst/>
-          </a:prstGeom>
-          <a:noFill/>
-        </p:spPr>
-        <p:txBody>
-          <a:bodyPr wrap="square">
-            <a:spAutoFit/>
-          </a:bodyPr>
-          <a:lstStyle/>
-          <a:p>
-            <a:pPr algn="ctr"/>
-            <a:r>
-              <a:rPr sz="1500" b="1">
-                <a:solidFill>
-                  <a:srgbClr val="F46E32"/>
-                </a:solidFill>
-                <a:latin typeface="Calibri"/>
-              </a:rPr>
-              <a:t>Start with hybrid + reranker. Drop pieces only when latency or simplicity forces it.</a:t>
-            </a:r>
-          </a:p>
-        </p:txBody>
-      </p:sp>
-    </p:spTree>
-  </p:cSld>
-  <p:clrMapOvr>
-    <a:masterClrMapping/>
-  </p:clrMapOvr>
-</p:sld>
-</file>
-
-<file path=ppt/slides/slide32.xml><?xml version="1.0" encoding="utf-8"?>
-<p:sld xmlns:a="http://schemas.openxmlformats.org/drawingml/2006/main" xmlns:p="http://schemas.openxmlformats.org/presentationml/2006/main" xmlns:r="http://schemas.openxmlformats.org/officeDocument/2006/relationships">
-  <p:cSld>
-    <p:spTree>
-      <p:nvGrpSpPr>
-        <p:cNvPr id="1" name=""/>
-        <p:cNvGrpSpPr/>
-        <p:nvPr/>
-      </p:nvGrpSpPr>
-      <p:grpSpPr/>
-      <p:sp>
-        <p:nvSpPr>
-          <p:cNvPr id="2" name="Rectangle 1"/>
-          <p:cNvSpPr/>
-          <p:nvPr/>
-        </p:nvSpPr>
-        <p:spPr>
-          <a:xfrm>
-            <a:off x="0" y="0"/>
-            <a:ext cx="12192000" cy="6858000"/>
-          </a:xfrm>
-          <a:prstGeom prst="rect">
-            <a:avLst/>
-          </a:prstGeom>
-          <a:solidFill>
-            <a:srgbClr val="171115"/>
-          </a:solidFill>
-          <a:ln>
-            <a:noFill/>
-          </a:ln>
-        </p:spPr>
-        <p:style>
-          <a:lnRef idx="1">
-            <a:schemeClr val="accent1"/>
-          </a:lnRef>
-          <a:fillRef idx="3">
-            <a:schemeClr val="accent1"/>
-          </a:fillRef>
-          <a:effectRef idx="2">
-            <a:schemeClr val="accent1"/>
-          </a:effectRef>
-          <a:fontRef idx="minor">
-            <a:schemeClr val="lt1"/>
-          </a:fontRef>
-        </p:style>
-        <p:txBody>
-          <a:bodyPr rtlCol="0" anchor="ctr"/>
-          <a:lstStyle/>
-          <a:p>
-            <a:pPr algn="ctr"/>
-          </a:p>
-        </p:txBody>
-      </p:sp>
-      <p:sp>
-        <p:nvSpPr>
-          <p:cNvPr id="3" name="TextBox 2"/>
-          <p:cNvSpPr txBox="1"/>
-          <p:nvPr/>
-        </p:nvSpPr>
-        <p:spPr>
-          <a:xfrm>
-            <a:off x="457200" y="320040"/>
-            <a:ext cx="11430000" cy="777240"/>
-          </a:xfrm>
-          <a:prstGeom prst="rect">
-            <a:avLst/>
-          </a:prstGeom>
-          <a:noFill/>
-        </p:spPr>
-        <p:txBody>
-          <a:bodyPr wrap="square">
-            <a:spAutoFit/>
-          </a:bodyPr>
-          <a:lstStyle/>
-          <a:p>
-            <a:pPr algn="l"/>
-            <a:r>
-              <a:rPr sz="3000" b="1">
-                <a:solidFill>
-                  <a:srgbClr val="FFFFFF"/>
-                </a:solidFill>
-                <a:latin typeface="Calibri"/>
-              </a:rPr>
-              <a:t>A Real-World Lesson — When Dense Alone Fails</a:t>
-            </a:r>
-          </a:p>
-        </p:txBody>
-      </p:sp>
-      <p:sp>
-        <p:nvSpPr>
-          <p:cNvPr id="4" name="Rectangle 3"/>
-          <p:cNvSpPr/>
-          <p:nvPr/>
-        </p:nvSpPr>
-        <p:spPr>
-          <a:xfrm>
-            <a:off x="457200" y="1051560"/>
-            <a:ext cx="1188720" cy="64008"/>
-          </a:xfrm>
-          <a:prstGeom prst="rect">
-            <a:avLst/>
-          </a:prstGeom>
-          <a:solidFill>
-            <a:srgbClr val="F46E32"/>
-          </a:solidFill>
-          <a:ln>
-            <a:noFill/>
-          </a:ln>
-        </p:spPr>
-        <p:style>
-          <a:lnRef idx="1">
-            <a:schemeClr val="accent1"/>
-          </a:lnRef>
-          <a:fillRef idx="3">
-            <a:schemeClr val="accent1"/>
-          </a:fillRef>
-          <a:effectRef idx="2">
-            <a:schemeClr val="accent1"/>
-          </a:effectRef>
-          <a:fontRef idx="minor">
-            <a:schemeClr val="lt1"/>
-          </a:fontRef>
-        </p:style>
-        <p:txBody>
-          <a:bodyPr rtlCol="0" anchor="ctr"/>
-          <a:lstStyle/>
-          <a:p>
-            <a:pPr algn="ctr"/>
-          </a:p>
-        </p:txBody>
-      </p:sp>
-      <p:sp>
-        <p:nvSpPr>
-          <p:cNvPr id="5" name="Rounded Rectangle 4"/>
-          <p:cNvSpPr/>
-          <p:nvPr/>
-        </p:nvSpPr>
-        <p:spPr>
-          <a:xfrm>
-            <a:off x="640080" y="1280160"/>
-            <a:ext cx="10972800" cy="1234440"/>
-          </a:xfrm>
-          <a:prstGeom prst="roundRect">
-            <a:avLst/>
-          </a:prstGeom>
-          <a:solidFill>
-            <a:srgbClr val="221B1F"/>
-          </a:solidFill>
-          <a:ln w="15875">
-            <a:solidFill>
-              <a:srgbClr val="F46E32"/>
-            </a:solidFill>
-          </a:ln>
-        </p:spPr>
-        <p:style>
-          <a:lnRef idx="1">
-            <a:schemeClr val="accent1"/>
-          </a:lnRef>
-          <a:fillRef idx="3">
-            <a:schemeClr val="accent1"/>
-          </a:fillRef>
-          <a:effectRef idx="2">
-            <a:schemeClr val="accent1"/>
-          </a:effectRef>
-          <a:fontRef idx="minor">
-            <a:schemeClr val="lt1"/>
-          </a:fontRef>
-        </p:style>
-        <p:txBody>
-          <a:bodyPr rtlCol="0" anchor="ctr" wrap="square" lIns="182880" rIns="182880"/>
-          <a:lstStyle/>
-          <a:p>
-            <a:pPr algn="ctr"/>
-            <a:r>
-              <a:rPr sz="1600" b="1">
-                <a:solidFill>
-                  <a:srgbClr val="F46E32"/>
-                </a:solidFill>
-                <a:latin typeface="Calibri"/>
-              </a:rPr>
-              <a:t>Scenario: </a:t>
-            </a:r>
-            <a:r>
-              <a:rPr sz="1600">
-                <a:solidFill>
-                  <a:srgbClr val="FFFFFF"/>
-                </a:solidFill>
-                <a:latin typeface="Calibri"/>
-              </a:rPr>
-              <a:t>A customer-support team ships a dense-only RAG over their product docs. Three weeks in, users search </a:t>
-            </a:r>
-            <a:r>
-              <a:rPr sz="1600" b="1">
-                <a:solidFill>
-                  <a:srgbClr val="2E8BC4"/>
-                </a:solidFill>
-                <a:latin typeface="Consolas"/>
-              </a:rPr>
-              <a:t>"ORA-04031 fix"</a:t>
-            </a:r>
-            <a:r>
-              <a:rPr sz="1600">
-                <a:solidFill>
-                  <a:srgbClr val="FFFFFF"/>
-                </a:solidFill>
-                <a:latin typeface="Calibri"/>
-              </a:rPr>
-              <a:t> and get an article about Oracle licensing instead of the one that actually debugs the error. Ticket volume climbs; trust tanks.</a:t>
-            </a:r>
-          </a:p>
-        </p:txBody>
-      </p:sp>
-      <p:sp>
-        <p:nvSpPr>
-          <p:cNvPr id="6" name="TextBox 5"/>
-          <p:cNvSpPr txBox="1"/>
-          <p:nvPr/>
-        </p:nvSpPr>
-        <p:spPr>
-          <a:xfrm>
-            <a:off x="640080" y="2743200"/>
-            <a:ext cx="10972800" cy="457200"/>
-          </a:xfrm>
-          <a:prstGeom prst="rect">
-            <a:avLst/>
-          </a:prstGeom>
-          <a:noFill/>
-        </p:spPr>
-        <p:txBody>
-          <a:bodyPr wrap="square">
-            <a:spAutoFit/>
-          </a:bodyPr>
-          <a:lstStyle/>
-          <a:p>
-            <a:pPr algn="l"/>
-            <a:r>
-              <a:rPr sz="1800" b="1">
-                <a:solidFill>
-                  <a:srgbClr val="F46E32"/>
-                </a:solidFill>
-                <a:latin typeface="Calibri"/>
-              </a:rPr>
-              <a:t>What went wrong</a:t>
-            </a:r>
-          </a:p>
-        </p:txBody>
-      </p:sp>
-      <p:sp>
-        <p:nvSpPr>
-          <p:cNvPr id="7" name="TextBox 6"/>
-          <p:cNvSpPr txBox="1"/>
-          <p:nvPr/>
-        </p:nvSpPr>
-        <p:spPr>
-          <a:xfrm>
-            <a:off x="640080" y="3200400"/>
-            <a:ext cx="11247120" cy="2011680"/>
+            <a:off x="640080" y="1463040"/>
+            <a:ext cx="11247120" cy="3400931"/>
           </a:xfrm>
           <a:prstGeom prst="rect">
             <a:avLst/>
@@ -18794,31 +18610,22 @@
               </a:spcAft>
             </a:pPr>
             <a:r>
-              <a:rPr sz="1600" b="1">
-                <a:solidFill>
-                  <a:srgbClr val="F46E32"/>
-                </a:solidFill>
-                <a:latin typeface="Calibri"/>
-              </a:rPr>
-              <a:t>▸  </a:t>
-            </a:r>
-            <a:r>
-              <a:rPr b="1" sz="1600">
-                <a:solidFill>
-                  <a:srgbClr val="F46E32"/>
-                </a:solidFill>
-                <a:latin typeface="Calibri"/>
-              </a:rPr>
-              <a:t>Embeddings smooth over exact tokens.</a:t>
-            </a:r>
-            <a:r>
-              <a:rPr sz="1600">
-                <a:solidFill>
-                  <a:srgbClr val="FFFFFF"/>
-                </a:solidFill>
-                <a:latin typeface="Calibri"/>
-              </a:rPr>
-              <a:t> "ORA-04031" is rare; the model finds docs with similar prose, not the exact code.</a:t>
+              <a:rPr sz="1800" b="1" dirty="0">
+                <a:solidFill>
+                  <a:srgbClr val="F46E32"/>
+                </a:solidFill>
+                <a:latin typeface="Calibri"/>
+              </a:rPr>
+              <a:t>▸  The Core Shift:</a:t>
+            </a:r>
+            <a:r>
+              <a:rPr sz="1800" dirty="0">
+                <a:solidFill>
+                  <a:srgbClr val="FFFFFF"/>
+                </a:solidFill>
+                <a:latin typeface="Calibri"/>
+              </a:rPr>
+              <a:t> RAG is no longer optional. Conversational AI without grounding is a hallucination machine in production.</a:t>
             </a:r>
           </a:p>
           <a:p>
@@ -18827,33 +18634,12 @@
                 <a:spcPts val="700"/>
               </a:spcAft>
             </a:pPr>
-            <a:r>
-              <a:rPr sz="1600" b="1">
-                <a:solidFill>
-                  <a:srgbClr val="F46E32"/>
-                </a:solidFill>
-                <a:latin typeface="Calibri"/>
-              </a:rPr>
-              <a:t>▸  </a:t>
-            </a:r>
-            <a:r>
-              <a:rPr b="1" sz="1600">
-                <a:solidFill>
-                  <a:srgbClr val="F46E32"/>
-                </a:solidFill>
-                <a:latin typeface="Calibri"/>
-              </a:rPr>
-              <a:t>Recall ceiling hit.</a:t>
-            </a:r>
-            <a:r>
-              <a:rPr sz="1600">
-                <a:solidFill>
-                  <a:srgbClr val="FFFFFF"/>
-                </a:solidFill>
-                <a:latin typeface="Calibri"/>
-              </a:rPr>
-              <a:t> The right doc wasn't in the top-50 at all — no amount of prompt tuning could save the generator.</a:t>
-            </a:r>
+            <a:endParaRPr sz="1800" b="1" dirty="0">
+              <a:solidFill>
+                <a:srgbClr val="F46E32"/>
+              </a:solidFill>
+              <a:latin typeface="Calibri"/>
+            </a:endParaRPr>
           </a:p>
           <a:p>
             <a:pPr algn="l">
@@ -18862,168 +18648,183 @@
               </a:spcAft>
             </a:pPr>
             <a:r>
-              <a:rPr sz="1600" b="1">
-                <a:solidFill>
-                  <a:srgbClr val="F46E32"/>
-                </a:solidFill>
-                <a:latin typeface="Calibri"/>
-              </a:rPr>
-              <a:t>▸  </a:t>
-            </a:r>
-            <a:r>
-              <a:rPr b="1" sz="1600">
-                <a:solidFill>
-                  <a:srgbClr val="F46E32"/>
-                </a:solidFill>
-                <a:latin typeface="Calibri"/>
-              </a:rPr>
-              <a:t>The generator looked confident.</a:t>
-            </a:r>
-            <a:r>
-              <a:rPr sz="1600">
-                <a:solidFill>
-                  <a:srgbClr val="FFFFFF"/>
-                </a:solidFill>
-                <a:latin typeface="Calibri"/>
-              </a:rPr>
-              <a:t> The LLM answered from the wrong doc rather than saying "I don't know".</a:t>
-            </a:r>
-          </a:p>
-        </p:txBody>
-      </p:sp>
-      <p:sp>
-        <p:nvSpPr>
-          <p:cNvPr id="8" name="TextBox 7"/>
-          <p:cNvSpPr txBox="1"/>
-          <p:nvPr/>
-        </p:nvSpPr>
-        <p:spPr>
-          <a:xfrm>
-            <a:off x="640080" y="5120640"/>
-            <a:ext cx="10972800" cy="457200"/>
-          </a:xfrm>
-          <a:prstGeom prst="rect">
-            <a:avLst/>
-          </a:prstGeom>
-          <a:noFill/>
-        </p:spPr>
-        <p:txBody>
-          <a:bodyPr wrap="square">
-            <a:spAutoFit/>
-          </a:bodyPr>
-          <a:lstStyle/>
-          <a:p>
-            <a:pPr algn="l"/>
-            <a:r>
-              <a:rPr sz="1800" b="1">
-                <a:solidFill>
-                  <a:srgbClr val="F46E32"/>
-                </a:solidFill>
-                <a:latin typeface="Calibri"/>
-              </a:rPr>
-              <a:t>What fixed it (one afternoon of work)</a:t>
-            </a:r>
-          </a:p>
-        </p:txBody>
-      </p:sp>
-      <p:sp>
-        <p:nvSpPr>
-          <p:cNvPr id="9" name="TextBox 8"/>
-          <p:cNvSpPr txBox="1"/>
-          <p:nvPr/>
-        </p:nvSpPr>
-        <p:spPr>
-          <a:xfrm>
-            <a:off x="640080" y="5577840"/>
-            <a:ext cx="11247120" cy="731520"/>
-          </a:xfrm>
-          <a:prstGeom prst="rect">
-            <a:avLst/>
-          </a:prstGeom>
-          <a:noFill/>
-        </p:spPr>
-        <p:txBody>
-          <a:bodyPr wrap="square">
-            <a:spAutoFit/>
-          </a:bodyPr>
-          <a:lstStyle/>
+              <a:rPr sz="1800" b="1" dirty="0">
+                <a:solidFill>
+                  <a:srgbClr val="F46E32"/>
+                </a:solidFill>
+                <a:latin typeface="Calibri"/>
+              </a:rPr>
+              <a:t>▸  Retrieval is the bottleneck:</a:t>
+            </a:r>
+            <a:r>
+              <a:rPr sz="1800" dirty="0">
+                <a:solidFill>
+                  <a:srgbClr val="FFFFFF"/>
+                </a:solidFill>
+                <a:latin typeface="Calibri"/>
+              </a:rPr>
+              <a:t> the model is rarely the problem. The retriever almost always is. Fix retrieval first and everything downstream gets cheaper.</a:t>
+            </a:r>
+          </a:p>
           <a:p>
             <a:pPr algn="l">
               <a:spcAft>
                 <a:spcPts val="700"/>
               </a:spcAft>
             </a:pPr>
-            <a:r>
-              <a:rPr sz="1500" b="1">
-                <a:solidFill>
-                  <a:srgbClr val="F46E32"/>
-                </a:solidFill>
-                <a:latin typeface="Calibri"/>
-              </a:rPr>
-              <a:t>▸  </a:t>
-            </a:r>
-            <a:r>
-              <a:rPr sz="1500">
-                <a:solidFill>
-                  <a:srgbClr val="FFFFFF"/>
-                </a:solidFill>
-                <a:latin typeface="Calibri"/>
-              </a:rPr>
-              <a:t>Added </a:t>
-            </a:r>
-            <a:r>
-              <a:rPr b="1" sz="1500">
-                <a:solidFill>
-                  <a:srgbClr val="F46E32"/>
-                </a:solidFill>
-                <a:latin typeface="Calibri"/>
-              </a:rPr>
-              <a:t>BM25</a:t>
-            </a:r>
-            <a:r>
-              <a:rPr sz="1500">
-                <a:solidFill>
-                  <a:srgbClr val="FFFFFF"/>
-                </a:solidFill>
-                <a:latin typeface="Calibri"/>
-              </a:rPr>
-              <a:t> alongside dense; fused with </a:t>
-            </a:r>
-            <a:r>
-              <a:rPr b="1" sz="1500">
-                <a:solidFill>
-                  <a:srgbClr val="F46E32"/>
-                </a:solidFill>
-                <a:latin typeface="Calibri"/>
-              </a:rPr>
-              <a:t>RRF</a:t>
-            </a:r>
-            <a:r>
-              <a:rPr sz="1500">
-                <a:solidFill>
-                  <a:srgbClr val="FFFFFF"/>
-                </a:solidFill>
-                <a:latin typeface="Calibri"/>
-              </a:rPr>
-              <a:t> — exact-code match jumped to rank 1. Added a </a:t>
-            </a:r>
-            <a:r>
-              <a:rPr b="1" sz="1500">
-                <a:solidFill>
-                  <a:srgbClr val="F46E32"/>
-                </a:solidFill>
-                <a:latin typeface="Calibri"/>
-              </a:rPr>
-              <a:t>cross-encoder reranker</a:t>
-            </a:r>
-            <a:r>
-              <a:rPr sz="1500">
-                <a:solidFill>
-                  <a:srgbClr val="FFFFFF"/>
-                </a:solidFill>
-                <a:latin typeface="Calibri"/>
-              </a:rPr>
-              <a:t> to keep noisy matches out of the prompt. Ticket deflection went back above baseline.</a:t>
+            <a:endParaRPr sz="1800" b="1" dirty="0">
+              <a:solidFill>
+                <a:srgbClr val="F46E32"/>
+              </a:solidFill>
+              <a:latin typeface="Calibri"/>
+            </a:endParaRPr>
+          </a:p>
+          <a:p>
+            <a:pPr algn="l">
+              <a:spcAft>
+                <a:spcPts val="700"/>
+              </a:spcAft>
+            </a:pPr>
+            <a:r>
+              <a:rPr sz="1800" b="1" dirty="0">
+                <a:solidFill>
+                  <a:srgbClr val="F46E32"/>
+                </a:solidFill>
+                <a:latin typeface="Calibri"/>
+              </a:rPr>
+              <a:t>▸  Hybrid + Re-Rank as the new default:</a:t>
+            </a:r>
+            <a:r>
+              <a:rPr sz="1800" dirty="0">
+                <a:solidFill>
+                  <a:srgbClr val="FFFFFF"/>
+                </a:solidFill>
+                <a:latin typeface="Calibri"/>
+              </a:rPr>
+              <a:t> combine dense and sparse for recall, fuse with RRF, then let a cross-encoder pick the winners. Simple, robust, fast.</a:t>
+            </a:r>
+          </a:p>
+          <a:p>
+            <a:pPr algn="l">
+              <a:spcAft>
+                <a:spcPts val="700"/>
+              </a:spcAft>
+            </a:pPr>
+            <a:endParaRPr sz="1800" b="1" dirty="0">
+              <a:solidFill>
+                <a:srgbClr val="F46E32"/>
+              </a:solidFill>
+              <a:latin typeface="Calibri"/>
+            </a:endParaRPr>
+          </a:p>
+          <a:p>
+            <a:pPr algn="l">
+              <a:spcAft>
+                <a:spcPts val="700"/>
+              </a:spcAft>
+            </a:pPr>
+            <a:r>
+              <a:rPr sz="1800" b="1" dirty="0">
+                <a:solidFill>
+                  <a:srgbClr val="F46E32"/>
+                </a:solidFill>
+                <a:latin typeface="Calibri"/>
+              </a:rPr>
+              <a:t>▸  The Final Takeaway:</a:t>
+            </a:r>
+            <a:r>
+              <a:rPr sz="1800" dirty="0">
+                <a:solidFill>
+                  <a:srgbClr val="FFFFFF"/>
+                </a:solidFill>
+                <a:latin typeface="Calibri"/>
+              </a:rPr>
+              <a:t> the next generation of conversational AI will be built on </a:t>
+            </a:r>
+            <a:r>
+              <a:rPr sz="1800" b="1" dirty="0">
+                <a:solidFill>
+                  <a:srgbClr val="F46E32"/>
+                </a:solidFill>
+                <a:latin typeface="Calibri"/>
+              </a:rPr>
+              <a:t>reliable retrieval</a:t>
+            </a:r>
+            <a:r>
+              <a:rPr sz="1800" dirty="0">
+                <a:solidFill>
+                  <a:srgbClr val="FFFFFF"/>
+                </a:solidFill>
+                <a:latin typeface="Calibri"/>
+              </a:rPr>
+              <a:t>, not bigger models.</a:t>
+            </a:r>
+          </a:p>
+        </p:txBody>
+      </p:sp>
+      <p:sp>
+        <p:nvSpPr>
+          <p:cNvPr id="6" name="TextBox 5"/>
+          <p:cNvSpPr txBox="1"/>
+          <p:nvPr/>
+        </p:nvSpPr>
+        <p:spPr>
+          <a:xfrm>
+            <a:off x="365760" y="6446520"/>
+            <a:ext cx="11887200" cy="365760"/>
+          </a:xfrm>
+          <a:prstGeom prst="rect">
+            <a:avLst/>
+          </a:prstGeom>
+          <a:noFill/>
+        </p:spPr>
+        <p:txBody>
+          <a:bodyPr wrap="none" lIns="0" rIns="0">
+            <a:spAutoFit/>
+          </a:bodyPr>
+          <a:lstStyle/>
+          <a:p>
+            <a:r>
+              <a:rPr sz="1200">
+                <a:solidFill>
+                  <a:srgbClr val="AAAAAA"/>
+                </a:solidFill>
+              </a:rPr>
+              <a:t>DataHour  •  Hybrid RAG with Re-Ranker  •  Ravindra Babu Katiki</a:t>
+            </a:r>
+          </a:p>
+        </p:txBody>
+      </p:sp>
+      <p:sp>
+        <p:nvSpPr>
+          <p:cNvPr id="7" name="TextBox 6"/>
+          <p:cNvSpPr txBox="1"/>
+          <p:nvPr/>
+        </p:nvSpPr>
+        <p:spPr>
+          <a:xfrm>
+            <a:off x="11338560" y="6446520"/>
+            <a:ext cx="731520" cy="365760"/>
+          </a:xfrm>
+          <a:prstGeom prst="rect">
+            <a:avLst/>
+          </a:prstGeom>
+          <a:noFill/>
+        </p:spPr>
+        <p:txBody>
+          <a:bodyPr wrap="none">
+            <a:spAutoFit/>
+          </a:bodyPr>
+          <a:lstStyle/>
+          <a:p>
+            <a:pPr algn="r"/>
+            <a:r>
+              <a:rPr sz="1000">
+                <a:solidFill>
+                  <a:srgbClr val="AAAAAA"/>
+                </a:solidFill>
+              </a:rPr>
+              <a:t>31</a:t>
             </a:r>
           </a:p>
         </p:txBody>
